--- a/Pramaan_Presentation.pptx
+++ b/Pramaan_Presentation.pptx
@@ -3559,14 +3559,14 @@
           <a:p>
             <a:pPr algn="ctr"/>
             <a:r>
-              <a:rPr sz="1900">
+              <a:rPr sz="1700">
                 <a:solidFill>
                   <a:srgbClr val="FFFFFF"/>
                 </a:solidFill>
                 <a:latin typeface="Calibri"/>
               </a:rPr>
               <a:t>Under realistic Indian costs over 2019–2024, none of the four classic strategies beat passive ownership on a risk-adjusted basis.
-That is not a failure of the project. It is the result the engine was built to find.</a:t>
+Student Reflections (Syllabus 5.4): Zero-lookahead execution and statutory friction explain why over 90% of retail strategies fail live. An honest tool measures true worth.</a:t>
             </a:r>
           </a:p>
         </p:txBody>
@@ -3878,7 +3878,7 @@
                 </a:solidFill>
                 <a:latin typeface="Calibri"/>
               </a:rPr>
-              <a:t>GTU DI05000341 · Pramaan  ·  Apache 2.0  ·  Thank you</a:t>
+              <a:t>GTU DI05000341 · Pramaan · Aayush Bankar &amp; Meet Patel · Apache 2.0</a:t>
             </a:r>
           </a:p>
         </p:txBody>

--- a/Pramaan_Presentation.pptx
+++ b/Pramaan_Presentation.pptx
@@ -3751,7 +3751,7 @@
                 </a:solidFill>
                 <a:latin typeface="Calibri"/>
               </a:rPr>
-              <a:t>64%</a:t>
+              <a:t>60%</a:t>
             </a:r>
           </a:p>
           <a:p>
@@ -7187,20 +7187,20 @@
                 </a:solidFill>
                 <a:latin typeface="Calibri"/>
               </a:rPr>
-              <a:t>PBO = 64.3%</a:t>
+              <a:t>PBO = 60.0%</a:t>
             </a:r>
           </a:p>
           <a:p>
             <a:pPr algn="ctr"/>
             <a:r>
-              <a:rPr sz="1200">
+              <a:rPr sz="1100">
                 <a:solidFill>
                   <a:srgbClr val="CBD5E1"/>
                 </a:solidFill>
                 <a:latin typeface="Calibri"/>
               </a:rPr>
-              <a:t>probability the in-sample winner
-is not the out-of-sample winner</a:t>
+              <a:t>95% CI: [44.4%, 73.3%] · 133 configs · 45 paths
+probability in-sample winner underperforms OOS</a:t>
             </a:r>
           </a:p>
         </p:txBody>
@@ -7578,7 +7578,7 @@
                 </a:solidFill>
                 <a:latin typeface="Calibri"/>
               </a:rPr>
-              <a:t>35 automated tests</a:t>
+              <a:t>72 automated tests</a:t>
             </a:r>
           </a:p>
           <a:p>
@@ -7589,7 +7589,7 @@
                 </a:solidFill>
                 <a:latin typeface="Calibri"/>
               </a:rPr>
-              <a:t>up from 9 at baseline</a:t>
+              <a:t>up from 9 at baseline (100% offline via seeded fixtures)</a:t>
             </a:r>
           </a:p>
         </p:txBody>
@@ -7843,7 +7843,7 @@
                 </a:solidFill>
                 <a:latin typeface="Calibri"/>
               </a:rPr>
-              <a:t>▪  Reproduce everything with two commands:</a:t>
+              <a:t>▪  Reproduce everything with clean checkout commands:</a:t>
             </a:r>
           </a:p>
           <a:p>
@@ -7859,7 +7859,7 @@
                 </a:solidFill>
                 <a:latin typeface="Calibri"/>
               </a:rPr>
-              <a:t>PYTHONPATH=. python scripts/run_experiments.py</a:t>
+              <a:t>python scripts/run_experiments.py</a:t>
             </a:r>
           </a:p>
           <a:p>
@@ -7875,7 +7875,7 @@
                 </a:solidFill>
                 <a:latin typeface="Calibri"/>
               </a:rPr>
-              <a:t>PYTHONPATH=. python scripts/generate_real_charts.py</a:t>
+              <a:t>python scripts/generate_real_charts.py</a:t>
             </a:r>
           </a:p>
           <a:p>
@@ -7891,7 +7891,7 @@
                 </a:solidFill>
                 <a:latin typeface="Calibri"/>
               </a:rPr>
-              <a:t>Then: pytest tests/ -q  →  35 passed</a:t>
+              <a:t>Then: pytest tests/ -q  →  72 passed in ~7s</a:t>
             </a:r>
           </a:p>
         </p:txBody>

--- a/Pramaan_Presentation.pptx
+++ b/Pramaan_Presentation.pptx
@@ -3093,7 +3093,7 @@
     <p:bg>
       <p:bgPr>
         <a:solidFill>
-          <a:srgbClr val="1E293B"/>
+          <a:srgbClr val="0A1124"/>
         </a:solidFill>
         <a:effectLst/>
       </p:bgPr>
@@ -3113,14 +3113,14 @@
         </p:nvSpPr>
         <p:spPr>
           <a:xfrm>
-            <a:off x="0" y="0"/>
-            <a:ext cx="12191695" cy="128016"/>
+            <a:off x="731520" y="1371600"/>
+            <a:ext cx="73152" cy="4114800"/>
           </a:xfrm>
           <a:prstGeom prst="rect">
             <a:avLst/>
           </a:prstGeom>
           <a:solidFill>
-            <a:srgbClr val="CC0000"/>
+            <a:srgbClr val="B91C1C"/>
           </a:solidFill>
           <a:ln>
             <a:noFill/>
@@ -3150,24 +3150,163 @@
       </p:sp>
       <p:sp>
         <p:nvSpPr>
-          <p:cNvPr id="3" name="Rectangle 2"/>
+          <p:cNvPr id="3" name="TextBox 2"/>
+          <p:cNvSpPr txBox="1"/>
+          <p:nvPr/>
+        </p:nvSpPr>
+        <p:spPr>
+          <a:xfrm>
+            <a:off x="1005840" y="1371600"/>
+            <a:ext cx="9601200" cy="320040"/>
+          </a:xfrm>
+          <a:prstGeom prst="rect">
+            <a:avLst/>
+          </a:prstGeom>
+          <a:noFill/>
+        </p:spPr>
+        <p:txBody>
+          <a:bodyPr wrap="none">
+            <a:spAutoFit/>
+          </a:bodyPr>
+          <a:lstStyle/>
+          <a:p>
+            <a:r>
+              <a:rPr sz="1100" b="1">
+                <a:solidFill>
+                  <a:srgbClr val="94A3B8"/>
+                </a:solidFill>
+                <a:latin typeface="Consolas"/>
+              </a:rPr>
+              <a:t>GUJARAT TECHNOLOGICAL UNIVERSITY  |  DI05000341 MINOR PROJECT DEFENSE</a:t>
+            </a:r>
+          </a:p>
+        </p:txBody>
+      </p:sp>
+      <p:sp>
+        <p:nvSpPr>
+          <p:cNvPr id="4" name="TextBox 3"/>
+          <p:cNvSpPr txBox="1"/>
+          <p:nvPr/>
+        </p:nvSpPr>
+        <p:spPr>
+          <a:xfrm>
+            <a:off x="1005840" y="1737360"/>
+            <a:ext cx="9601200" cy="1097280"/>
+          </a:xfrm>
+          <a:prstGeom prst="rect">
+            <a:avLst/>
+          </a:prstGeom>
+          <a:noFill/>
+        </p:spPr>
+        <p:txBody>
+          <a:bodyPr wrap="none">
+            <a:spAutoFit/>
+          </a:bodyPr>
+          <a:lstStyle/>
+          <a:p>
+            <a:r>
+              <a:rPr sz="4800" b="1">
+                <a:solidFill>
+                  <a:srgbClr val="F8FAFC"/>
+                </a:solidFill>
+                <a:latin typeface="Trebuchet MS"/>
+              </a:rPr>
+              <a:t>Pramaan (प्रमाण)</a:t>
+            </a:r>
+          </a:p>
+        </p:txBody>
+      </p:sp>
+      <p:sp>
+        <p:nvSpPr>
+          <p:cNvPr id="5" name="TextBox 4"/>
+          <p:cNvSpPr txBox="1"/>
+          <p:nvPr/>
+        </p:nvSpPr>
+        <p:spPr>
+          <a:xfrm>
+            <a:off x="1005840" y="2834640"/>
+            <a:ext cx="9601200" cy="548640"/>
+          </a:xfrm>
+          <a:prstGeom prst="rect">
+            <a:avLst/>
+          </a:prstGeom>
+          <a:noFill/>
+        </p:spPr>
+        <p:txBody>
+          <a:bodyPr wrap="none">
+            <a:spAutoFit/>
+          </a:bodyPr>
+          <a:lstStyle/>
+          <a:p>
+            <a:r>
+              <a:rPr sz="2000" i="1">
+                <a:solidFill>
+                  <a:srgbClr val="38BDF8"/>
+                </a:solidFill>
+                <a:latin typeface="Georgia"/>
+              </a:rPr>
+              <a:t>Prove your edge before you deploy a rupee.</a:t>
+            </a:r>
+          </a:p>
+        </p:txBody>
+      </p:sp>
+      <p:sp>
+        <p:nvSpPr>
+          <p:cNvPr id="6" name="TextBox 5"/>
+          <p:cNvSpPr txBox="1"/>
+          <p:nvPr/>
+        </p:nvSpPr>
+        <p:spPr>
+          <a:xfrm>
+            <a:off x="1005840" y="3429000"/>
+            <a:ext cx="9601200" cy="731520"/>
+          </a:xfrm>
+          <a:prstGeom prst="rect">
+            <a:avLst/>
+          </a:prstGeom>
+          <a:noFill/>
+        </p:spPr>
+        <p:txBody>
+          <a:bodyPr wrap="none">
+            <a:spAutoFit/>
+          </a:bodyPr>
+          <a:lstStyle/>
+          <a:p>
+            <a:r>
+              <a:rPr sz="1400">
+                <a:solidFill>
+                  <a:srgbClr val="94A3B8"/>
+                </a:solidFill>
+                <a:latin typeface="Georgia"/>
+              </a:rPr>
+              <a:t>An event-driven backtesting engine for Indian equities that enforces zero-lookahead T+1 execution, statutory delivery costs (STT, Stamp Duty, GST, Exchange), and Deflated Sharpe / CPCV statistical overfitting verification.</a:t>
+            </a:r>
+          </a:p>
+        </p:txBody>
+      </p:sp>
+      <p:sp>
+        <p:nvSpPr>
+          <p:cNvPr id="7" name="Rectangle 6"/>
           <p:cNvSpPr/>
           <p:nvPr/>
         </p:nvSpPr>
         <p:spPr>
           <a:xfrm>
-            <a:off x="0" y="6729984"/>
-            <a:ext cx="12191695" cy="128016"/>
+            <a:off x="1005840" y="4389120"/>
+            <a:ext cx="4754880" cy="1188720"/>
           </a:xfrm>
           <a:prstGeom prst="rect">
             <a:avLst/>
           </a:prstGeom>
           <a:solidFill>
-            <a:srgbClr val="003366"/>
+            <a:srgbClr val="131E36"/>
           </a:solidFill>
-          <a:ln>
-            <a:noFill/>
+          <a:ln w="12700">
+            <a:solidFill>
+              <a:srgbClr val="243354"/>
+            </a:solidFill>
           </a:ln>
+          <a:effectLst/>
         </p:spPr>
         <p:style>
           <a:lnRef idx="1">
@@ -3184,139 +3323,56 @@
           </a:fontRef>
         </p:style>
         <p:txBody>
-          <a:bodyPr rtlCol="0" anchor="ctr"/>
+          <a:bodyPr rtlCol="0" anchor="ctr" lIns="228600" tIns="182880"/>
           <a:lstStyle/>
           <a:p>
             <a:pPr algn="ctr"/>
-          </a:p>
-        </p:txBody>
-      </p:sp>
-      <p:sp>
-        <p:nvSpPr>
-          <p:cNvPr id="4" name="TextBox 3"/>
-          <p:cNvSpPr txBox="1"/>
-          <p:nvPr/>
-        </p:nvSpPr>
-        <p:spPr>
-          <a:xfrm>
-            <a:off x="822960" y="1371600"/>
-            <a:ext cx="10545775" cy="1005840"/>
-          </a:xfrm>
-          <a:prstGeom prst="rect">
-            <a:avLst/>
-          </a:prstGeom>
-          <a:noFill/>
-        </p:spPr>
-        <p:txBody>
-          <a:bodyPr wrap="square" anchor="t">
-            <a:spAutoFit/>
-          </a:bodyPr>
-          <a:lstStyle/>
-          <a:p>
-            <a:pPr algn="ctr"/>
-            <a:r>
-              <a:rPr sz="6000" b="1" i="0">
-                <a:solidFill>
-                  <a:srgbClr val="FFFFFF"/>
-                </a:solidFill>
-                <a:latin typeface="Calibri"/>
-              </a:rPr>
-              <a:t>Pramaan</a:t>
-            </a:r>
-          </a:p>
-        </p:txBody>
-      </p:sp>
-      <p:sp>
-        <p:nvSpPr>
-          <p:cNvPr id="5" name="TextBox 4"/>
-          <p:cNvSpPr txBox="1"/>
-          <p:nvPr/>
-        </p:nvSpPr>
-        <p:spPr>
-          <a:xfrm>
-            <a:off x="822960" y="2423160"/>
-            <a:ext cx="10545775" cy="548640"/>
-          </a:xfrm>
-          <a:prstGeom prst="rect">
-            <a:avLst/>
-          </a:prstGeom>
-          <a:noFill/>
-        </p:spPr>
-        <p:txBody>
-          <a:bodyPr wrap="square" anchor="t">
-            <a:spAutoFit/>
-          </a:bodyPr>
-          <a:lstStyle/>
-          <a:p>
-            <a:pPr algn="ctr"/>
-            <a:r>
-              <a:rPr sz="2200" b="0" i="1">
+            <a:r>
+              <a:rPr sz="1400" b="1">
                 <a:solidFill>
                   <a:srgbClr val="F8FAFC"/>
                 </a:solidFill>
-                <a:latin typeface="Calibri"/>
-              </a:rPr>
-              <a:t>Prove your edge before you deploy a rupee.</a:t>
-            </a:r>
-          </a:p>
-        </p:txBody>
-      </p:sp>
-      <p:sp>
-        <p:nvSpPr>
-          <p:cNvPr id="6" name="TextBox 5"/>
-          <p:cNvSpPr txBox="1"/>
-          <p:nvPr/>
-        </p:nvSpPr>
-        <p:spPr>
-          <a:xfrm>
-            <a:off x="822960" y="3200400"/>
-            <a:ext cx="10545775" cy="914400"/>
-          </a:xfrm>
-          <a:prstGeom prst="rect">
-            <a:avLst/>
-          </a:prstGeom>
-          <a:noFill/>
-        </p:spPr>
-        <p:txBody>
-          <a:bodyPr wrap="square" anchor="t">
-            <a:spAutoFit/>
-          </a:bodyPr>
-          <a:lstStyle/>
-          <a:p>
-            <a:pPr algn="ctr"/>
-            <a:r>
-              <a:rPr sz="1700" b="0" i="0">
-                <a:solidFill>
-                  <a:srgbClr val="64748B"/>
-                </a:solidFill>
-                <a:latin typeface="Calibri"/>
-              </a:rPr>
-              <a:t>An event-driven backtesting engine and overfitting
-diagnostic platform for Indian equities</a:t>
-            </a:r>
-          </a:p>
-        </p:txBody>
-      </p:sp>
-      <p:sp>
-        <p:nvSpPr>
-          <p:cNvPr id="7" name="Rectangle 6"/>
+                <a:latin typeface="Trebuchet MS"/>
+              </a:rPr>
+              <a:t>Aayush Avinash Bankar  (246230316006)</a:t>
+            </a:r>
+          </a:p>
+          <a:p>
+            <a:r>
+              <a:rPr sz="1100">
+                <a:solidFill>
+                  <a:srgbClr val="94A3B8"/>
+                </a:solidFill>
+                <a:latin typeface="Georgia"/>
+              </a:rPr>
+              <a:t>Role: Core Engine Architecture, Statutory Cost Stack, Test Suite &amp; CI</a:t>
+            </a:r>
+          </a:p>
+        </p:txBody>
+      </p:sp>
+      <p:sp>
+        <p:nvSpPr>
+          <p:cNvPr id="8" name="Rectangle 7"/>
           <p:cNvSpPr/>
           <p:nvPr/>
         </p:nvSpPr>
         <p:spPr>
           <a:xfrm>
-            <a:off x="0" y="4480560"/>
-            <a:ext cx="12191695" cy="27432"/>
+            <a:off x="6035040" y="4389120"/>
+            <a:ext cx="4754880" cy="1188720"/>
           </a:xfrm>
           <a:prstGeom prst="rect">
             <a:avLst/>
           </a:prstGeom>
           <a:solidFill>
-            <a:srgbClr val="003366"/>
+            <a:srgbClr val="131E36"/>
           </a:solidFill>
-          <a:ln>
-            <a:noFill/>
+          <a:ln w="12700">
+            <a:solidFill>
+              <a:srgbClr val="243354"/>
+            </a:solidFill>
           </a:ln>
+          <a:effectLst/>
         </p:spPr>
         <p:style>
           <a:lnRef idx="1">
@@ -3333,23 +3389,43 @@
           </a:fontRef>
         </p:style>
         <p:txBody>
-          <a:bodyPr rtlCol="0" anchor="ctr"/>
+          <a:bodyPr rtlCol="0" anchor="ctr" lIns="228600" tIns="182880"/>
           <a:lstStyle/>
           <a:p>
             <a:pPr algn="ctr"/>
-          </a:p>
-        </p:txBody>
-      </p:sp>
-      <p:sp>
-        <p:nvSpPr>
-          <p:cNvPr id="8" name="TextBox 7"/>
+            <a:r>
+              <a:rPr sz="1400" b="1">
+                <a:solidFill>
+                  <a:srgbClr val="F8FAFC"/>
+                </a:solidFill>
+                <a:latin typeface="Trebuchet MS"/>
+              </a:rPr>
+              <a:t>Meet Jayeshbhai Patel  (246230316133)</a:t>
+            </a:r>
+          </a:p>
+          <a:p>
+            <a:r>
+              <a:rPr sz="1100">
+                <a:solidFill>
+                  <a:srgbClr val="94A3B8"/>
+                </a:solidFill>
+                <a:latin typeface="Georgia"/>
+              </a:rPr>
+              <a:t>Role: Analytics UI &amp; Tauri Packaging, Academic Documentation &amp; Defense</a:t>
+            </a:r>
+          </a:p>
+        </p:txBody>
+      </p:sp>
+      <p:sp>
+        <p:nvSpPr>
+          <p:cNvPr id="9" name="TextBox 8"/>
           <p:cNvSpPr txBox="1"/>
           <p:nvPr/>
         </p:nvSpPr>
         <p:spPr>
           <a:xfrm>
-            <a:off x="822960" y="4709160"/>
-            <a:ext cx="10545775" cy="1097280"/>
+            <a:off x="1005840" y="5943600"/>
+            <a:ext cx="9601200" cy="320040"/>
           </a:xfrm>
           <a:prstGeom prst="rect">
             <a:avLst/>
@@ -3357,56 +3433,19 @@
           <a:noFill/>
         </p:spPr>
         <p:txBody>
-          <a:bodyPr wrap="square" anchor="t">
+          <a:bodyPr wrap="none">
             <a:spAutoFit/>
           </a:bodyPr>
           <a:lstStyle/>
           <a:p>
-            <a:pPr algn="ctr"/>
-            <a:r>
-              <a:rPr sz="1400" b="0" i="0">
-                <a:solidFill>
-                  <a:srgbClr val="CBD5E1"/>
-                </a:solidFill>
-                <a:latin typeface="Calibri"/>
-              </a:rPr>
-              <a:t>Aayush Avinash Bankar (246230316006)  ·  Meet Jayeshbhai Patel (246230316133)
-GTU Diploma Engineering, Semester 5 · DI05000341 Minor Project · 2026</a:t>
-            </a:r>
-          </a:p>
-        </p:txBody>
-      </p:sp>
-      <p:sp>
-        <p:nvSpPr>
-          <p:cNvPr id="9" name="TextBox 8"/>
-          <p:cNvSpPr txBox="1"/>
-          <p:nvPr/>
-        </p:nvSpPr>
-        <p:spPr>
-          <a:xfrm>
-            <a:off x="822960" y="5943600"/>
-            <a:ext cx="10545775" cy="365760"/>
-          </a:xfrm>
-          <a:prstGeom prst="rect">
-            <a:avLst/>
-          </a:prstGeom>
-          <a:noFill/>
-        </p:spPr>
-        <p:txBody>
-          <a:bodyPr wrap="square" anchor="t">
-            <a:spAutoFit/>
-          </a:bodyPr>
-          <a:lstStyle/>
-          <a:p>
-            <a:pPr algn="ctr"/>
-            <a:r>
-              <a:rPr sz="1100" b="0" i="0">
-                <a:solidFill>
-                  <a:srgbClr val="CC0000"/>
-                </a:solidFill>
-                <a:latin typeface="Calibri"/>
-              </a:rPr>
-              <a:t>Reproducible from 30 real runs on 10 NSE symbols · 2019-01-01..2024-12-31</a:t>
+            <a:r>
+              <a:rPr sz="1000">
+                <a:solidFill>
+                  <a:srgbClr val="94A3B8"/>
+                </a:solidFill>
+                <a:latin typeface="Consolas"/>
+              </a:rPr>
+              <a:t>Empirical Ground Truth: 30 deterministic runs across 10 NIFTY-50 symbols (2019-01-01..2024-12-31) | 72 Passing Pytests</a:t>
             </a:r>
           </a:p>
         </p:txBody>
@@ -3425,7 +3464,7 @@
     <p:bg>
       <p:bgPr>
         <a:solidFill>
-          <a:srgbClr val="1E293B"/>
+          <a:srgbClr val="0A1124"/>
         </a:solidFill>
         <a:effectLst/>
       </p:bgPr>
@@ -3439,24 +3478,61 @@
       <p:grpSpPr/>
       <p:sp>
         <p:nvSpPr>
-          <p:cNvPr id="2" name="Rectangle 1"/>
+          <p:cNvPr id="2" name="TextBox 1"/>
+          <p:cNvSpPr txBox="1"/>
+          <p:nvPr/>
+        </p:nvSpPr>
+        <p:spPr>
+          <a:xfrm>
+            <a:off x="731520" y="548640"/>
+            <a:ext cx="10728655" cy="731520"/>
+          </a:xfrm>
+          <a:prstGeom prst="rect">
+            <a:avLst/>
+          </a:prstGeom>
+          <a:noFill/>
+        </p:spPr>
+        <p:txBody>
+          <a:bodyPr wrap="none">
+            <a:spAutoFit/>
+          </a:bodyPr>
+          <a:lstStyle/>
+          <a:p>
+            <a:r>
+              <a:rPr sz="2600" b="1">
+                <a:solidFill>
+                  <a:srgbClr val="F8FAFC"/>
+                </a:solidFill>
+                <a:latin typeface="Trebuchet MS"/>
+              </a:rPr>
+              <a:t>Conclusion &amp; Viva Voce Cross-Defense</a:t>
+            </a:r>
+          </a:p>
+        </p:txBody>
+      </p:sp>
+      <p:sp>
+        <p:nvSpPr>
+          <p:cNvPr id="3" name="Rectangle 2"/>
           <p:cNvSpPr/>
           <p:nvPr/>
         </p:nvSpPr>
         <p:spPr>
           <a:xfrm>
-            <a:off x="0" y="0"/>
-            <a:ext cx="12191695" cy="128016"/>
+            <a:off x="731520" y="1371600"/>
+            <a:ext cx="3429000" cy="1463040"/>
           </a:xfrm>
           <a:prstGeom prst="rect">
             <a:avLst/>
           </a:prstGeom>
           <a:solidFill>
-            <a:srgbClr val="CC0000"/>
+            <a:srgbClr val="131E36"/>
           </a:solidFill>
-          <a:ln>
-            <a:noFill/>
+          <a:ln w="12700">
+            <a:solidFill>
+              <a:srgbClr val="243354"/>
+            </a:solidFill>
           </a:ln>
+          <a:effectLst/>
         </p:spPr>
         <p:style>
           <a:lnRef idx="1">
@@ -3473,68 +3549,66 @@
           </a:fontRef>
         </p:style>
         <p:txBody>
-          <a:bodyPr rtlCol="0" anchor="ctr"/>
+          <a:bodyPr rtlCol="0" anchor="ctr" lIns="182880" rIns="182880" tIns="164592"/>
           <a:lstStyle/>
           <a:p>
             <a:pPr algn="ctr"/>
-          </a:p>
-        </p:txBody>
-      </p:sp>
-      <p:sp>
-        <p:nvSpPr>
-          <p:cNvPr id="3" name="TextBox 2"/>
-          <p:cNvSpPr txBox="1"/>
+            <a:r>
+              <a:rPr sz="3200" b="1">
+                <a:solidFill>
+                  <a:srgbClr val="38BDF8"/>
+                </a:solidFill>
+                <a:latin typeface="Consolas"/>
+              </a:rPr>
+              <a:t>48%</a:t>
+            </a:r>
+          </a:p>
+          <a:p>
+            <a:pPr algn="ctr"/>
+            <a:r>
+              <a:rPr sz="1200" b="1">
+                <a:solidFill>
+                  <a:srgbClr val="F8FAFC"/>
+                </a:solidFill>
+                <a:latin typeface="Trebuchet MS"/>
+              </a:rPr>
+              <a:t>Sharpe Drag</a:t>
+            </a:r>
+          </a:p>
+          <a:p>
+            <a:pPr algn="ctr"/>
+            <a:r>
+              <a:rPr sz="950">
+                <a:solidFill>
+                  <a:srgbClr val="94A3B8"/>
+                </a:solidFill>
+                <a:latin typeface="Georgia"/>
+              </a:rPr>
+              <a:t>Removed by Indian statutory delivery costs</a:t>
+            </a:r>
+          </a:p>
+        </p:txBody>
+      </p:sp>
+      <p:sp>
+        <p:nvSpPr>
+          <p:cNvPr id="4" name="Rectangle 3"/>
+          <p:cNvSpPr/>
           <p:nvPr/>
         </p:nvSpPr>
         <p:spPr>
           <a:xfrm>
-            <a:off x="731520" y="640080"/>
-            <a:ext cx="10728655" cy="822960"/>
+            <a:off x="4389120" y="1371600"/>
+            <a:ext cx="3429000" cy="1463040"/>
           </a:xfrm>
           <a:prstGeom prst="rect">
             <a:avLst/>
           </a:prstGeom>
-          <a:noFill/>
-        </p:spPr>
-        <p:txBody>
-          <a:bodyPr wrap="square" anchor="t">
-            <a:spAutoFit/>
-          </a:bodyPr>
-          <a:lstStyle/>
-          <a:p>
-            <a:pPr algn="l"/>
-            <a:r>
-              <a:rPr sz="3800" b="1" i="0">
-                <a:solidFill>
-                  <a:srgbClr val="FFFFFF"/>
-                </a:solidFill>
-                <a:latin typeface="Calibri"/>
-              </a:rPr>
-              <a:t>Conclusion</a:t>
-            </a:r>
-          </a:p>
-        </p:txBody>
-      </p:sp>
-      <p:sp>
-        <p:nvSpPr>
-          <p:cNvPr id="4" name="Rounded Rectangle 3"/>
-          <p:cNvSpPr/>
-          <p:nvPr/>
-        </p:nvSpPr>
-        <p:spPr>
-          <a:xfrm>
-            <a:off x="822960" y="1600200"/>
-            <a:ext cx="10545775" cy="2286000"/>
-          </a:xfrm>
-          <a:prstGeom prst="roundRect">
-            <a:avLst/>
-          </a:prstGeom>
           <a:solidFill>
-            <a:srgbClr val="0F172A"/>
+            <a:srgbClr val="131E36"/>
           </a:solidFill>
-          <a:ln w="25400">
+          <a:ln w="12700">
             <a:solidFill>
-              <a:srgbClr val="CC0000"/>
+              <a:srgbClr val="243354"/>
             </a:solidFill>
           </a:ln>
           <a:effectLst/>
@@ -3554,42 +3628,67 @@
           </a:fontRef>
         </p:style>
         <p:txBody>
-          <a:bodyPr rtlCol="0" anchor="ctr" wrap="square" lIns="365760" rIns="365760"/>
+          <a:bodyPr rtlCol="0" anchor="ctr" lIns="182880" rIns="182880" tIns="164592"/>
           <a:lstStyle/>
           <a:p>
             <a:pPr algn="ctr"/>
             <a:r>
-              <a:rPr sz="1700">
-                <a:solidFill>
-                  <a:srgbClr val="FFFFFF"/>
-                </a:solidFill>
-                <a:latin typeface="Calibri"/>
-              </a:rPr>
-              <a:t>Under realistic Indian costs over 2019–2024, none of the four classic strategies beat passive ownership on a risk-adjusted basis.
-Student Reflections (Syllabus 5.4): Zero-lookahead execution and statutory friction explain why over 90% of retail strategies fail live. An honest tool measures true worth.</a:t>
-            </a:r>
-          </a:p>
-        </p:txBody>
-      </p:sp>
-      <p:sp>
-        <p:nvSpPr>
-          <p:cNvPr id="5" name="Rounded Rectangle 4"/>
+              <a:rPr sz="3200" b="1">
+                <a:solidFill>
+                  <a:srgbClr val="38BDF8"/>
+                </a:solidFill>
+                <a:latin typeface="Consolas"/>
+              </a:rPr>
+              <a:t>Rs 12,995</a:t>
+            </a:r>
+          </a:p>
+          <a:p>
+            <a:pPr algn="ctr"/>
+            <a:r>
+              <a:rPr sz="1200" b="1">
+                <a:solidFill>
+                  <a:srgbClr val="F8FAFC"/>
+                </a:solidFill>
+                <a:latin typeface="Trebuchet MS"/>
+              </a:rPr>
+              <a:t>Capital Lost</a:t>
+            </a:r>
+          </a:p>
+          <a:p>
+            <a:pPr algn="ctr"/>
+            <a:r>
+              <a:rPr sz="950">
+                <a:solidFill>
+                  <a:srgbClr val="94A3B8"/>
+                </a:solidFill>
+                <a:latin typeface="Georgia"/>
+              </a:rPr>
+              <a:t>Friction drag on Rs 100,000 start</a:t>
+            </a:r>
+          </a:p>
+        </p:txBody>
+      </p:sp>
+      <p:sp>
+        <p:nvSpPr>
+          <p:cNvPr id="5" name="Rectangle 4"/>
           <p:cNvSpPr/>
           <p:nvPr/>
         </p:nvSpPr>
         <p:spPr>
           <a:xfrm>
-            <a:off x="822960" y="4114800"/>
-            <a:ext cx="3291840" cy="1371600"/>
-          </a:xfrm>
-          <a:prstGeom prst="roundRect">
+            <a:off x="8046720" y="1371600"/>
+            <a:ext cx="3429000" cy="1463040"/>
+          </a:xfrm>
+          <a:prstGeom prst="rect">
             <a:avLst/>
           </a:prstGeom>
           <a:solidFill>
-            <a:srgbClr val="003366"/>
+            <a:srgbClr val="131E36"/>
           </a:solidFill>
-          <a:ln>
-            <a:noFill/>
+          <a:ln w="12700">
+            <a:solidFill>
+              <a:srgbClr val="243354"/>
+            </a:solidFill>
           </a:ln>
           <a:effectLst/>
         </p:spPr>
@@ -3608,54 +3707,67 @@
           </a:fontRef>
         </p:style>
         <p:txBody>
-          <a:bodyPr rtlCol="0" anchor="ctr" wrap="square"/>
+          <a:bodyPr rtlCol="0" anchor="ctr" lIns="182880" rIns="182880" tIns="164592"/>
           <a:lstStyle/>
           <a:p>
             <a:pPr algn="ctr"/>
             <a:r>
-              <a:rPr sz="2800" b="1">
-                <a:solidFill>
-                  <a:srgbClr val="FFFFFF"/>
-                </a:solidFill>
-                <a:latin typeface="Calibri"/>
-              </a:rPr>
-              <a:t>48%</a:t>
+              <a:rPr sz="3200" b="1">
+                <a:solidFill>
+                  <a:srgbClr val="38BDF8"/>
+                </a:solidFill>
+                <a:latin typeface="Consolas"/>
+              </a:rPr>
+              <a:t>60%</a:t>
             </a:r>
           </a:p>
           <a:p>
             <a:pPr algn="ctr"/>
             <a:r>
-              <a:rPr sz="1200">
-                <a:solidFill>
-                  <a:srgbClr val="CBD5E1"/>
-                </a:solidFill>
-                <a:latin typeface="Calibri"/>
-              </a:rPr>
-              <a:t>of Sharpe removed
-by the cost stack</a:t>
-            </a:r>
-          </a:p>
-        </p:txBody>
-      </p:sp>
-      <p:sp>
-        <p:nvSpPr>
-          <p:cNvPr id="6" name="Rounded Rectangle 5"/>
+              <a:rPr sz="1200" b="1">
+                <a:solidFill>
+                  <a:srgbClr val="F8FAFC"/>
+                </a:solidFill>
+                <a:latin typeface="Trebuchet MS"/>
+              </a:rPr>
+              <a:t>PBO Overfitting</a:t>
+            </a:r>
+          </a:p>
+          <a:p>
+            <a:pPr algn="ctr"/>
+            <a:r>
+              <a:rPr sz="950">
+                <a:solidFill>
+                  <a:srgbClr val="94A3B8"/>
+                </a:solidFill>
+                <a:latin typeface="Georgia"/>
+              </a:rPr>
+              <a:t>Probability IS winner fails out-of-sample</a:t>
+            </a:r>
+          </a:p>
+        </p:txBody>
+      </p:sp>
+      <p:sp>
+        <p:nvSpPr>
+          <p:cNvPr id="6" name="Rectangle 5"/>
           <p:cNvSpPr/>
           <p:nvPr/>
         </p:nvSpPr>
         <p:spPr>
           <a:xfrm>
-            <a:off x="4434840" y="4114800"/>
-            <a:ext cx="3291840" cy="1371600"/>
-          </a:xfrm>
-          <a:prstGeom prst="roundRect">
+            <a:off x="731520" y="3063240"/>
+            <a:ext cx="5257800" cy="2194560"/>
+          </a:xfrm>
+          <a:prstGeom prst="rect">
             <a:avLst/>
           </a:prstGeom>
           <a:solidFill>
-            <a:srgbClr val="003366"/>
+            <a:srgbClr val="131E36"/>
           </a:solidFill>
-          <a:ln>
-            <a:noFill/>
+          <a:ln w="12700">
+            <a:solidFill>
+              <a:srgbClr val="243354"/>
+            </a:solidFill>
           </a:ln>
           <a:effectLst/>
         </p:spPr>
@@ -3674,54 +3786,91 @@
           </a:fontRef>
         </p:style>
         <p:txBody>
-          <a:bodyPr rtlCol="0" anchor="ctr" wrap="square"/>
+          <a:bodyPr rtlCol="0" anchor="ctr" lIns="228600" tIns="182880"/>
           <a:lstStyle/>
           <a:p>
             <a:pPr algn="ctr"/>
             <a:r>
-              <a:rPr sz="2800" b="1">
-                <a:solidFill>
-                  <a:srgbClr val="FFFFFF"/>
-                </a:solidFill>
-                <a:latin typeface="Calibri"/>
-              </a:rPr>
-              <a:t>Rs12,995</a:t>
-            </a:r>
-          </a:p>
-          <a:p>
-            <a:pPr algn="ctr"/>
-            <a:r>
-              <a:rPr sz="1200">
-                <a:solidFill>
-                  <a:srgbClr val="CBD5E1"/>
-                </a:solidFill>
-                <a:latin typeface="Calibri"/>
-              </a:rPr>
-              <a:t>destroyed on
-Rs1,00,000</a:t>
-            </a:r>
-          </a:p>
-        </p:txBody>
-      </p:sp>
-      <p:sp>
-        <p:nvSpPr>
-          <p:cNvPr id="7" name="Rounded Rectangle 6"/>
+              <a:rPr sz="1300" b="1">
+                <a:solidFill>
+                  <a:srgbClr val="F8FAFC"/>
+                </a:solidFill>
+                <a:latin typeface="Trebuchet MS"/>
+              </a:rPr>
+              <a:t>Aayush Avinash Bankar (246230316006)  —  Core Engine</a:t>
+            </a:r>
+          </a:p>
+          <a:p>
+            <a:pPr>
+              <a:spcBef>
+                <a:spcPts val="400"/>
+              </a:spcBef>
+            </a:pPr>
+            <a:r>
+              <a:rPr sz="950">
+                <a:solidFill>
+                  <a:srgbClr val="94A3B8"/>
+                </a:solidFill>
+                <a:latin typeface="Georgia"/>
+              </a:rPr>
+              <a:t>• Architecture &amp; Cost Model: Implemented zero-lookahead T+1 loop and Indian delivery fee stack.</a:t>
+            </a:r>
+          </a:p>
+          <a:p>
+            <a:pPr>
+              <a:spcBef>
+                <a:spcPts val="400"/>
+              </a:spcBef>
+            </a:pPr>
+            <a:r>
+              <a:rPr sz="950">
+                <a:solidFill>
+                  <a:srgbClr val="94A3B8"/>
+                </a:solidFill>
+                <a:latin typeface="Georgia"/>
+              </a:rPr>
+              <a:t>• Engineering Rigour: 72 pytest regression suite, seed fixtures, deterministic execution hashes.</a:t>
+            </a:r>
+          </a:p>
+          <a:p>
+            <a:pPr>
+              <a:spcBef>
+                <a:spcPts val="400"/>
+              </a:spcBef>
+            </a:pPr>
+            <a:r>
+              <a:rPr sz="950">
+                <a:solidFill>
+                  <a:srgbClr val="94A3B8"/>
+                </a:solidFill>
+                <a:latin typeface="Georgia"/>
+              </a:rPr>
+              <a:t>• Student Reflection: Proving the negative result required deeper discipline than seeking a false positive.</a:t>
+            </a:r>
+          </a:p>
+        </p:txBody>
+      </p:sp>
+      <p:sp>
+        <p:nvSpPr>
+          <p:cNvPr id="7" name="Rectangle 6"/>
           <p:cNvSpPr/>
           <p:nvPr/>
         </p:nvSpPr>
         <p:spPr>
           <a:xfrm>
-            <a:off x="8046720" y="4114800"/>
-            <a:ext cx="3291840" cy="1371600"/>
-          </a:xfrm>
-          <a:prstGeom prst="roundRect">
+            <a:off x="6202375" y="3063240"/>
+            <a:ext cx="5257800" cy="2194560"/>
+          </a:xfrm>
+          <a:prstGeom prst="rect">
             <a:avLst/>
           </a:prstGeom>
           <a:solidFill>
-            <a:srgbClr val="003366"/>
+            <a:srgbClr val="131E36"/>
           </a:solidFill>
-          <a:ln>
-            <a:noFill/>
+          <a:ln w="12700">
+            <a:solidFill>
+              <a:srgbClr val="243354"/>
+            </a:solidFill>
           </a:ln>
           <a:effectLst/>
         </p:spPr>
@@ -3740,31 +3889,66 @@
           </a:fontRef>
         </p:style>
         <p:txBody>
-          <a:bodyPr rtlCol="0" anchor="ctr" wrap="square"/>
+          <a:bodyPr rtlCol="0" anchor="ctr" lIns="228600" tIns="182880"/>
           <a:lstStyle/>
           <a:p>
             <a:pPr algn="ctr"/>
             <a:r>
-              <a:rPr sz="2800" b="1">
-                <a:solidFill>
-                  <a:srgbClr val="FFFFFF"/>
-                </a:solidFill>
-                <a:latin typeface="Calibri"/>
-              </a:rPr>
-              <a:t>60%</a:t>
-            </a:r>
-          </a:p>
-          <a:p>
-            <a:pPr algn="ctr"/>
-            <a:r>
-              <a:rPr sz="1200">
-                <a:solidFill>
-                  <a:srgbClr val="CBD5E1"/>
-                </a:solidFill>
-                <a:latin typeface="Calibri"/>
-              </a:rPr>
-              <a:t>probability of
-backtest overfitting</a:t>
+              <a:rPr sz="1300" b="1">
+                <a:solidFill>
+                  <a:srgbClr val="F8FAFC"/>
+                </a:solidFill>
+                <a:latin typeface="Trebuchet MS"/>
+              </a:rPr>
+              <a:t>Meet Jayeshbhai Patel (246230316133)  —  Product &amp; Diagnostics</a:t>
+            </a:r>
+          </a:p>
+          <a:p>
+            <a:pPr>
+              <a:spcBef>
+                <a:spcPts val="400"/>
+              </a:spcBef>
+            </a:pPr>
+            <a:r>
+              <a:rPr sz="950">
+                <a:solidFill>
+                  <a:srgbClr val="94A3B8"/>
+                </a:solidFill>
+                <a:latin typeface="Georgia"/>
+              </a:rPr>
+              <a:t>• Product Delivery: Next.js dashboard UI, Tauri desktop binary packaging, and live demo URL.</a:t>
+            </a:r>
+          </a:p>
+          <a:p>
+            <a:pPr>
+              <a:spcBef>
+                <a:spcPts val="400"/>
+              </a:spcBef>
+            </a:pPr>
+            <a:r>
+              <a:rPr sz="950">
+                <a:solidFill>
+                  <a:srgbClr val="94A3B8"/>
+                </a:solidFill>
+                <a:latin typeface="Georgia"/>
+              </a:rPr>
+              <a:t>• Overfitting Analytics: López de Prado CPCV implementation, PBO matrix visualization, academic report.</a:t>
+            </a:r>
+          </a:p>
+          <a:p>
+            <a:pPr>
+              <a:spcBef>
+                <a:spcPts val="400"/>
+              </a:spcBef>
+            </a:pPr>
+            <a:r>
+              <a:rPr sz="950">
+                <a:solidFill>
+                  <a:srgbClr val="94A3B8"/>
+                </a:solidFill>
+                <a:latin typeface="Georgia"/>
+              </a:rPr>
+              <a:t>• Student Reflection: Retail traders assume high returns because tools omit reality; honest tooling changes behavior.</a:t>
             </a:r>
           </a:p>
         </p:txBody>
@@ -3777,8 +3961,8 @@
         </p:nvSpPr>
         <p:spPr>
           <a:xfrm>
-            <a:off x="731520" y="5806440"/>
-            <a:ext cx="10728655" cy="640080"/>
+            <a:off x="731520" y="5486400"/>
+            <a:ext cx="10728655" cy="731520"/>
           </a:xfrm>
           <a:prstGeom prst="rect">
             <a:avLst/>
@@ -3786,99 +3970,21 @@
           <a:noFill/>
         </p:spPr>
         <p:txBody>
-          <a:bodyPr wrap="square" anchor="t">
+          <a:bodyPr wrap="none">
             <a:spAutoFit/>
           </a:bodyPr>
           <a:lstStyle/>
           <a:p>
             <a:pPr algn="ctr"/>
             <a:r>
-              <a:rPr sz="1700" b="1" i="1">
-                <a:solidFill>
-                  <a:srgbClr val="CC0000"/>
-                </a:solidFill>
-                <a:latin typeface="Calibri"/>
+              <a:rPr sz="1600" b="1">
+                <a:solidFill>
+                  <a:srgbClr val="38BDF8"/>
+                </a:solidFill>
+                <a:latin typeface="Georgia"/>
               </a:rPr>
               <a:t>An honest backtesting tool does not tell you your idea works.
 It tells you what your idea is actually worth.</a:t>
-            </a:r>
-          </a:p>
-        </p:txBody>
-      </p:sp>
-      <p:sp>
-        <p:nvSpPr>
-          <p:cNvPr id="9" name="Rectangle 8"/>
-          <p:cNvSpPr/>
-          <p:nvPr/>
-        </p:nvSpPr>
-        <p:spPr>
-          <a:xfrm>
-            <a:off x="0" y="6400800"/>
-            <a:ext cx="12191695" cy="457200"/>
-          </a:xfrm>
-          <a:prstGeom prst="rect">
-            <a:avLst/>
-          </a:prstGeom>
-          <a:solidFill>
-            <a:srgbClr val="003366"/>
-          </a:solidFill>
-          <a:ln>
-            <a:noFill/>
-          </a:ln>
-        </p:spPr>
-        <p:style>
-          <a:lnRef idx="1">
-            <a:schemeClr val="accent1"/>
-          </a:lnRef>
-          <a:fillRef idx="3">
-            <a:schemeClr val="accent1"/>
-          </a:fillRef>
-          <a:effectRef idx="2">
-            <a:schemeClr val="accent1"/>
-          </a:effectRef>
-          <a:fontRef idx="minor">
-            <a:schemeClr val="lt1"/>
-          </a:fontRef>
-        </p:style>
-        <p:txBody>
-          <a:bodyPr rtlCol="0" anchor="ctr"/>
-          <a:lstStyle/>
-          <a:p>
-            <a:pPr algn="ctr"/>
-          </a:p>
-        </p:txBody>
-      </p:sp>
-      <p:sp>
-        <p:nvSpPr>
-          <p:cNvPr id="10" name="TextBox 9"/>
-          <p:cNvSpPr txBox="1"/>
-          <p:nvPr/>
-        </p:nvSpPr>
-        <p:spPr>
-          <a:xfrm>
-            <a:off x="365760" y="6455664"/>
-            <a:ext cx="10058400" cy="365760"/>
-          </a:xfrm>
-          <a:prstGeom prst="rect">
-            <a:avLst/>
-          </a:prstGeom>
-          <a:noFill/>
-        </p:spPr>
-        <p:txBody>
-          <a:bodyPr wrap="square" anchor="ctr">
-            <a:spAutoFit/>
-          </a:bodyPr>
-          <a:lstStyle/>
-          <a:p>
-            <a:pPr algn="l"/>
-            <a:r>
-              <a:rPr sz="1000" b="0" i="0">
-                <a:solidFill>
-                  <a:srgbClr val="FFFFFF"/>
-                </a:solidFill>
-                <a:latin typeface="Calibri"/>
-              </a:rPr>
-              <a:t>GTU DI05000341 · Pramaan · Aayush Bankar &amp; Meet Patel · Apache 2.0</a:t>
             </a:r>
           </a:p>
         </p:txBody>
@@ -3897,7 +4003,7 @@
     <p:bg>
       <p:bgPr>
         <a:solidFill>
-          <a:srgbClr val="FFFFFF"/>
+          <a:srgbClr val="F8FAFC"/>
         </a:solidFill>
         <a:effectLst/>
       </p:bgPr>
@@ -3911,20 +4017,123 @@
       <p:grpSpPr/>
       <p:sp>
         <p:nvSpPr>
-          <p:cNvPr id="2" name="Rectangle 1"/>
+          <p:cNvPr id="2" name="TextBox 1"/>
+          <p:cNvSpPr txBox="1"/>
+          <p:nvPr/>
+        </p:nvSpPr>
+        <p:spPr>
+          <a:xfrm>
+            <a:off x="731520" y="411480"/>
+            <a:ext cx="7772400" cy="274320"/>
+          </a:xfrm>
+          <a:prstGeom prst="rect">
+            <a:avLst/>
+          </a:prstGeom>
+          <a:noFill/>
+        </p:spPr>
+        <p:txBody>
+          <a:bodyPr wrap="square" lIns="0" tIns="0" rIns="0" bIns="0">
+            <a:spAutoFit/>
+          </a:bodyPr>
+          <a:lstStyle/>
+          <a:p>
+            <a:r>
+              <a:rPr sz="950" b="1">
+                <a:solidFill>
+                  <a:srgbClr val="64748B"/>
+                </a:solidFill>
+                <a:latin typeface="Consolas"/>
+              </a:rPr>
+              <a:t>UNIT 1: LITERATURE REVIEW &amp; PROBLEM STATEMENT</a:t>
+            </a:r>
+          </a:p>
+        </p:txBody>
+      </p:sp>
+      <p:sp>
+        <p:nvSpPr>
+          <p:cNvPr id="3" name="TextBox 2"/>
+          <p:cNvSpPr txBox="1"/>
+          <p:nvPr/>
+        </p:nvSpPr>
+        <p:spPr>
+          <a:xfrm>
+            <a:off x="731520" y="685800"/>
+            <a:ext cx="9144000" cy="594360"/>
+          </a:xfrm>
+          <a:prstGeom prst="rect">
+            <a:avLst/>
+          </a:prstGeom>
+          <a:noFill/>
+        </p:spPr>
+        <p:txBody>
+          <a:bodyPr wrap="square" lIns="0" tIns="0" rIns="0" bIns="0">
+            <a:spAutoFit/>
+          </a:bodyPr>
+          <a:lstStyle/>
+          <a:p>
+            <a:r>
+              <a:rPr sz="2200" b="1">
+                <a:solidFill>
+                  <a:srgbClr val="132A52"/>
+                </a:solidFill>
+                <a:latin typeface="Trebuchet MS"/>
+              </a:rPr>
+              <a:t>Why Retail Backtests Lie: Three Structural Deceptions</a:t>
+            </a:r>
+          </a:p>
+        </p:txBody>
+      </p:sp>
+      <p:sp>
+        <p:nvSpPr>
+          <p:cNvPr id="4" name="TextBox 3"/>
+          <p:cNvSpPr txBox="1"/>
+          <p:nvPr/>
+        </p:nvSpPr>
+        <p:spPr>
+          <a:xfrm>
+            <a:off x="10058400" y="411480"/>
+            <a:ext cx="1371600" cy="365760"/>
+          </a:xfrm>
+          <a:prstGeom prst="rect">
+            <a:avLst/>
+          </a:prstGeom>
+          <a:noFill/>
+        </p:spPr>
+        <p:txBody>
+          <a:bodyPr wrap="none" lIns="0" tIns="0" rIns="0" bIns="0">
+            <a:spAutoFit/>
+          </a:bodyPr>
+          <a:lstStyle/>
+          <a:p>
+            <a:pPr algn="r"/>
+            <a:r>
+              <a:rPr sz="1100" b="1">
+                <a:solidFill>
+                  <a:srgbClr val="64748B"/>
+                </a:solidFill>
+                <a:latin typeface="Consolas"/>
+              </a:rPr>
+              <a:t>02 / 10</a:t>
+            </a:r>
+          </a:p>
+        </p:txBody>
+      </p:sp>
+      <p:sp>
+        <p:nvSpPr>
+          <p:cNvPr id="5" name="Rectangle 4"/>
           <p:cNvSpPr/>
           <p:nvPr/>
         </p:nvSpPr>
         <p:spPr>
           <a:xfrm>
-            <a:off x="0" y="0"/>
-            <a:ext cx="12191695" cy="914400"/>
+            <a:off x="731520" y="1280160"/>
+            <a:ext cx="10728655" cy="13716"/>
           </a:xfrm>
           <a:prstGeom prst="rect">
             <a:avLst/>
           </a:prstGeom>
           <a:solidFill>
-            <a:srgbClr val="003366"/>
+            <a:srgbClr val="E2E8F0"/>
           </a:solidFill>
           <a:ln>
             <a:noFill/>
@@ -3954,94 +4163,24 @@
       </p:sp>
       <p:sp>
         <p:nvSpPr>
-          <p:cNvPr id="3" name="TextBox 2"/>
-          <p:cNvSpPr txBox="1"/>
+          <p:cNvPr id="6" name="Rectangle 5"/>
+          <p:cNvSpPr/>
           <p:nvPr/>
         </p:nvSpPr>
         <p:spPr>
           <a:xfrm>
-            <a:off x="457200" y="146304"/>
-            <a:ext cx="9601200" cy="640080"/>
+            <a:off x="731520" y="1554480"/>
+            <a:ext cx="3429000" cy="3840480"/>
           </a:xfrm>
           <a:prstGeom prst="rect">
             <a:avLst/>
           </a:prstGeom>
-          <a:noFill/>
-        </p:spPr>
-        <p:txBody>
-          <a:bodyPr wrap="square" anchor="ctr">
-            <a:spAutoFit/>
-          </a:bodyPr>
-          <a:lstStyle/>
-          <a:p>
-            <a:pPr algn="l"/>
-            <a:r>
-              <a:rPr sz="3000" b="1" i="0">
-                <a:solidFill>
-                  <a:srgbClr val="FFFFFF"/>
-                </a:solidFill>
-                <a:latin typeface="Calibri"/>
-              </a:rPr>
-              <a:t>Backtests Lie. Three Specific Lies.</a:t>
-            </a:r>
-          </a:p>
-        </p:txBody>
-      </p:sp>
-      <p:sp>
-        <p:nvSpPr>
-          <p:cNvPr id="4" name="TextBox 3"/>
-          <p:cNvSpPr txBox="1"/>
-          <p:nvPr/>
-        </p:nvSpPr>
-        <p:spPr>
-          <a:xfrm>
-            <a:off x="11140135" y="146304"/>
-            <a:ext cx="685800" cy="640080"/>
-          </a:xfrm>
-          <a:prstGeom prst="rect">
-            <a:avLst/>
-          </a:prstGeom>
-          <a:noFill/>
-        </p:spPr>
-        <p:txBody>
-          <a:bodyPr wrap="square" anchor="ctr">
-            <a:spAutoFit/>
-          </a:bodyPr>
-          <a:lstStyle/>
-          <a:p>
-            <a:pPr algn="r"/>
-            <a:r>
-              <a:rPr sz="4400" b="1" i="0">
-                <a:solidFill>
-                  <a:srgbClr val="0A4D8C"/>
-                </a:solidFill>
-                <a:latin typeface="Calibri"/>
-              </a:rPr>
-              <a:t>2</a:t>
-            </a:r>
-          </a:p>
-        </p:txBody>
-      </p:sp>
-      <p:sp>
-        <p:nvSpPr>
-          <p:cNvPr id="5" name="Rounded Rectangle 4"/>
-          <p:cNvSpPr/>
-          <p:nvPr/>
-        </p:nvSpPr>
-        <p:spPr>
-          <a:xfrm>
-            <a:off x="548640" y="1371600"/>
-            <a:ext cx="3611880" cy="2286000"/>
-          </a:xfrm>
-          <a:prstGeom prst="roundRect">
-            <a:avLst/>
-          </a:prstGeom>
           <a:solidFill>
-            <a:srgbClr val="F1F5F9"/>
+            <a:srgbClr val="FFFFFF"/>
           </a:solidFill>
-          <a:ln w="19050">
+          <a:ln w="12700">
             <a:solidFill>
-              <a:srgbClr val="B42828"/>
+              <a:srgbClr val="E2E8F0"/>
             </a:solidFill>
           </a:ln>
           <a:effectLst/>
@@ -4061,59 +4200,90 @@
           </a:fontRef>
         </p:style>
         <p:txBody>
-          <a:bodyPr rtlCol="0" anchor="ctr" wrap="square" lIns="228600" rIns="182880" tIns="274320"/>
+          <a:bodyPr rtlCol="0" anchor="ctr" wrap="square" lIns="256032" rIns="256032" tIns="256032"/>
           <a:lstStyle/>
           <a:p>
             <a:pPr algn="ctr"/>
             <a:r>
-              <a:rPr sz="2000" b="1">
-                <a:solidFill>
-                  <a:srgbClr val="B42828"/>
-                </a:solidFill>
-                <a:latin typeface="Calibri"/>
-              </a:rPr>
-              <a:t>Hidden costs</a:t>
-            </a:r>
-          </a:p>
-          <a:p>
-            <a:pPr algn="ctr">
+              <a:rPr sz="1000" b="1">
+                <a:solidFill>
+                  <a:srgbClr val="B91C1C"/>
+                </a:solidFill>
+                <a:latin typeface="Consolas"/>
+              </a:rPr>
+              <a:t>01 / Synthetic Execution Bias</a:t>
+            </a:r>
+          </a:p>
+          <a:p>
+            <a:pPr>
+              <a:spcBef>
+                <a:spcPts val="600"/>
+              </a:spcBef>
+            </a:pPr>
+            <a:r>
+              <a:rPr sz="1500" b="1">
+                <a:solidFill>
+                  <a:srgbClr val="132A52"/>
+                </a:solidFill>
+                <a:latin typeface="Trebuchet MS"/>
+              </a:rPr>
+              <a:t>Lookahead &amp; Same-Bar Fills</a:t>
+            </a:r>
+          </a:p>
+          <a:p>
+            <a:pPr>
               <a:spcBef>
                 <a:spcPts val="1000"/>
               </a:spcBef>
             </a:pPr>
             <a:r>
-              <a:rPr sz="1400">
-                <a:solidFill>
-                  <a:srgbClr val="1E293B"/>
-                </a:solidFill>
-                <a:latin typeface="Calibri"/>
-              </a:rPr>
-              <a:t>STT, stamp duty, GST, NSE and SEBI turnover are
-omitted — gross return is reported as net.</a:t>
-            </a:r>
-          </a:p>
-        </p:txBody>
-      </p:sp>
-      <p:sp>
-        <p:nvSpPr>
-          <p:cNvPr id="6" name="Rounded Rectangle 5"/>
+              <a:rPr sz="1100">
+                <a:solidFill>
+                  <a:srgbClr val="0F172A"/>
+                </a:solidFill>
+                <a:latin typeface="Georgia"/>
+              </a:rPr>
+              <a:t>Most platforms generate a signal on bar t close and execute at bar t close. In reality, market orders execute on bar t+1 open, and limit orders execute only on pessimistic trade-through.</a:t>
+            </a:r>
+          </a:p>
+          <a:p>
+            <a:pPr>
+              <a:spcBef>
+                <a:spcPts val="1400"/>
+              </a:spcBef>
+            </a:pPr>
+            <a:r>
+              <a:rPr sz="1100" b="1">
+                <a:solidFill>
+                  <a:srgbClr val="047857"/>
+                </a:solidFill>
+                <a:latin typeface="Georgia"/>
+              </a:rPr>
+              <a:t>Pramaan: Event clock enforces bar t Close signal -&gt; bar t+1 Open fill.</a:t>
+            </a:r>
+          </a:p>
+        </p:txBody>
+      </p:sp>
+      <p:sp>
+        <p:nvSpPr>
+          <p:cNvPr id="7" name="Rectangle 6"/>
           <p:cNvSpPr/>
           <p:nvPr/>
         </p:nvSpPr>
         <p:spPr>
           <a:xfrm>
-            <a:off x="4297679" y="1371600"/>
-            <a:ext cx="3611880" cy="2286000"/>
-          </a:xfrm>
-          <a:prstGeom prst="roundRect">
+            <a:off x="4389120" y="1554480"/>
+            <a:ext cx="3429000" cy="3840480"/>
+          </a:xfrm>
+          <a:prstGeom prst="rect">
             <a:avLst/>
           </a:prstGeom>
           <a:solidFill>
-            <a:srgbClr val="F1F5F9"/>
+            <a:srgbClr val="FFFFFF"/>
           </a:solidFill>
-          <a:ln w="19050">
+          <a:ln w="12700">
             <a:solidFill>
-              <a:srgbClr val="B42828"/>
+              <a:srgbClr val="E2E8F0"/>
             </a:solidFill>
           </a:ln>
           <a:effectLst/>
@@ -4133,59 +4303,90 @@
           </a:fontRef>
         </p:style>
         <p:txBody>
-          <a:bodyPr rtlCol="0" anchor="ctr" wrap="square" lIns="228600" rIns="182880" tIns="274320"/>
+          <a:bodyPr rtlCol="0" anchor="ctr" wrap="square" lIns="256032" rIns="256032" tIns="256032"/>
           <a:lstStyle/>
           <a:p>
             <a:pPr algn="ctr"/>
             <a:r>
-              <a:rPr sz="2000" b="1">
-                <a:solidFill>
-                  <a:srgbClr val="B42828"/>
-                </a:solidFill>
-                <a:latin typeface="Calibri"/>
-              </a:rPr>
-              <a:t>Hidden slippage</a:t>
-            </a:r>
-          </a:p>
-          <a:p>
-            <a:pPr algn="ctr">
+              <a:rPr sz="1000" b="1">
+                <a:solidFill>
+                  <a:srgbClr val="B91C1C"/>
+                </a:solidFill>
+                <a:latin typeface="Consolas"/>
+              </a:rPr>
+              <a:t>02 / The Statutory Blindspot</a:t>
+            </a:r>
+          </a:p>
+          <a:p>
+            <a:pPr>
+              <a:spcBef>
+                <a:spcPts val="600"/>
+              </a:spcBef>
+            </a:pPr>
+            <a:r>
+              <a:rPr sz="1500" b="1">
+                <a:solidFill>
+                  <a:srgbClr val="132A52"/>
+                </a:solidFill>
+                <a:latin typeface="Trebuchet MS"/>
+              </a:rPr>
+              <a:t>Omission of Indian Friction</a:t>
+            </a:r>
+          </a:p>
+          <a:p>
+            <a:pPr>
               <a:spcBef>
                 <a:spcPts val="1000"/>
               </a:spcBef>
             </a:pPr>
             <a:r>
-              <a:rPr sz="1400">
-                <a:solidFill>
-                  <a:srgbClr val="1E293B"/>
-                </a:solidFill>
-                <a:latin typeface="Calibri"/>
-              </a:rPr>
-              <a:t>Orders are filled at the close price as if a
-sized order had no market impact.</a:t>
-            </a:r>
-          </a:p>
-        </p:txBody>
-      </p:sp>
-      <p:sp>
-        <p:nvSpPr>
-          <p:cNvPr id="7" name="Rounded Rectangle 6"/>
+              <a:rPr sz="1100">
+                <a:solidFill>
+                  <a:srgbClr val="0F172A"/>
+                </a:solidFill>
+                <a:latin typeface="Georgia"/>
+              </a:rPr>
+              <a:t>Backtests frequently report gross returns. In India, STT (0.1%), stamp duty (0.015%), GST (18%), and exchange turnover consume substantial alpha on active turnover.</a:t>
+            </a:r>
+          </a:p>
+          <a:p>
+            <a:pPr>
+              <a:spcBef>
+                <a:spcPts val="1400"/>
+              </a:spcBef>
+            </a:pPr>
+            <a:r>
+              <a:rPr sz="1100" b="1">
+                <a:solidFill>
+                  <a:srgbClr val="047857"/>
+                </a:solidFill>
+                <a:latin typeface="Georgia"/>
+              </a:rPr>
+              <a:t>Pramaan: Full statutory cost stack + Almgren-Chriss market impact.</a:t>
+            </a:r>
+          </a:p>
+        </p:txBody>
+      </p:sp>
+      <p:sp>
+        <p:nvSpPr>
+          <p:cNvPr id="8" name="Rectangle 7"/>
           <p:cNvSpPr/>
           <p:nvPr/>
         </p:nvSpPr>
         <p:spPr>
           <a:xfrm>
-            <a:off x="8046718" y="1371600"/>
-            <a:ext cx="3611880" cy="2286000"/>
-          </a:xfrm>
-          <a:prstGeom prst="roundRect">
+            <a:off x="8046720" y="1554480"/>
+            <a:ext cx="3429000" cy="3840480"/>
+          </a:xfrm>
+          <a:prstGeom prst="rect">
             <a:avLst/>
           </a:prstGeom>
           <a:solidFill>
-            <a:srgbClr val="F1F5F9"/>
+            <a:srgbClr val="FFFFFF"/>
           </a:solidFill>
-          <a:ln w="19050">
+          <a:ln w="12700">
             <a:solidFill>
-              <a:srgbClr val="B42828"/>
+              <a:srgbClr val="E2E8F0"/>
             </a:solidFill>
           </a:ln>
           <a:effectLst/>
@@ -4205,93 +4406,91 @@
           </a:fontRef>
         </p:style>
         <p:txBody>
-          <a:bodyPr rtlCol="0" anchor="ctr" wrap="square" lIns="228600" rIns="182880" tIns="274320"/>
+          <a:bodyPr rtlCol="0" anchor="ctr" wrap="square" lIns="256032" rIns="256032" tIns="256032"/>
           <a:lstStyle/>
           <a:p>
             <a:pPr algn="ctr"/>
             <a:r>
-              <a:rPr sz="2000" b="1">
-                <a:solidFill>
-                  <a:srgbClr val="B42828"/>
-                </a:solidFill>
-                <a:latin typeface="Calibri"/>
-              </a:rPr>
-              <a:t>Hidden overfitting</a:t>
-            </a:r>
-          </a:p>
-          <a:p>
-            <a:pPr algn="ctr">
+              <a:rPr sz="1000" b="1">
+                <a:solidFill>
+                  <a:srgbClr val="B91C1C"/>
+                </a:solidFill>
+                <a:latin typeface="Consolas"/>
+              </a:rPr>
+              <a:t>03 / Selection Bias &amp; Overfitting</a:t>
+            </a:r>
+          </a:p>
+          <a:p>
+            <a:pPr>
+              <a:spcBef>
+                <a:spcPts val="600"/>
+              </a:spcBef>
+            </a:pPr>
+            <a:r>
+              <a:rPr sz="1500" b="1">
+                <a:solidFill>
+                  <a:srgbClr val="132A52"/>
+                </a:solidFill>
+                <a:latin typeface="Trebuchet MS"/>
+              </a:rPr>
+              <a:t>P-Hacking &amp; Multiple Testing</a:t>
+            </a:r>
+          </a:p>
+          <a:p>
+            <a:pPr>
               <a:spcBef>
                 <a:spcPts val="1000"/>
               </a:spcBef>
             </a:pPr>
             <a:r>
-              <a:rPr sz="1400">
-                <a:solidFill>
-                  <a:srgbClr val="1E293B"/>
-                </a:solidFill>
-                <a:latin typeface="Calibri"/>
-              </a:rPr>
-              <a:t>One parameter set chosen from many; the Sharpe
-ratio is inflated by selection.</a:t>
-            </a:r>
-          </a:p>
-        </p:txBody>
-      </p:sp>
-      <p:sp>
-        <p:nvSpPr>
-          <p:cNvPr id="8" name="TextBox 7"/>
-          <p:cNvSpPr txBox="1"/>
+              <a:rPr sz="1100">
+                <a:solidFill>
+                  <a:srgbClr val="0F172A"/>
+                </a:solidFill>
+                <a:latin typeface="Georgia"/>
+              </a:rPr>
+              <a:t>Testing dozens of parameter combinations and presenting only the best equity curve guarantees false discoveries that rapidly collapse out-of-sample.</a:t>
+            </a:r>
+          </a:p>
+          <a:p>
+            <a:pPr>
+              <a:spcBef>
+                <a:spcPts val="1400"/>
+              </a:spcBef>
+            </a:pPr>
+            <a:r>
+              <a:rPr sz="1100" b="1">
+                <a:solidFill>
+                  <a:srgbClr val="047857"/>
+                </a:solidFill>
+                <a:latin typeface="Georgia"/>
+              </a:rPr>
+              <a:t>Pramaan: Deflated Sharpe Ratio (DSR) &amp; CPCV with purge and embargo.</a:t>
+            </a:r>
+          </a:p>
+        </p:txBody>
+      </p:sp>
+      <p:sp>
+        <p:nvSpPr>
+          <p:cNvPr id="9" name="Rectangle 8"/>
+          <p:cNvSpPr/>
           <p:nvPr/>
         </p:nvSpPr>
         <p:spPr>
           <a:xfrm>
-            <a:off x="548640" y="3977639"/>
-            <a:ext cx="11094415" cy="822960"/>
+            <a:off x="731520" y="5577840"/>
+            <a:ext cx="10728655" cy="731520"/>
           </a:xfrm>
           <a:prstGeom prst="rect">
             <a:avLst/>
           </a:prstGeom>
-          <a:noFill/>
-        </p:spPr>
-        <p:txBody>
-          <a:bodyPr wrap="square" anchor="t">
-            <a:spAutoFit/>
-          </a:bodyPr>
-          <a:lstStyle/>
-          <a:p>
-            <a:pPr algn="ctr"/>
-            <a:r>
-              <a:rPr sz="1800" b="1" i="0">
-                <a:solidFill>
-                  <a:srgbClr val="003366"/>
-                </a:solidFill>
-                <a:latin typeface="Calibri"/>
-              </a:rPr>
-              <a:t>Pramaan was built to remove all three — structurally, not by configuration.</a:t>
-            </a:r>
-          </a:p>
-        </p:txBody>
-      </p:sp>
-      <p:sp>
-        <p:nvSpPr>
-          <p:cNvPr id="9" name="Rounded Rectangle 8"/>
-          <p:cNvSpPr/>
-          <p:nvPr/>
-        </p:nvSpPr>
-        <p:spPr>
-          <a:xfrm>
-            <a:off x="1280160" y="4709160"/>
-            <a:ext cx="9631375" cy="1371600"/>
-          </a:xfrm>
-          <a:prstGeom prst="roundRect">
-            <a:avLst/>
-          </a:prstGeom>
           <a:solidFill>
-            <a:srgbClr val="003366"/>
+            <a:srgbClr val="FFFFFF"/>
           </a:solidFill>
-          <a:ln>
-            <a:noFill/>
+          <a:ln w="12700">
+            <a:solidFill>
+              <a:srgbClr val="132A52"/>
+            </a:solidFill>
           </a:ln>
           <a:effectLst/>
         </p:spPr>
@@ -4310,76 +4509,32 @@
           </a:fontRef>
         </p:style>
         <p:txBody>
-          <a:bodyPr rtlCol="0" anchor="ctr" wrap="square"/>
+          <a:bodyPr rtlCol="0" anchor="ctr" lIns="274320"/>
           <a:lstStyle/>
           <a:p>
             <a:pPr algn="ctr"/>
             <a:r>
-              <a:rPr sz="1700">
-                <a:solidFill>
-                  <a:srgbClr val="FFFFFF"/>
-                </a:solidFill>
-                <a:latin typeface="Calibri"/>
-              </a:rPr>
-              <a:t>A profitable backtest is not evidence of a profitable strategy.
-We measure whether a strategy survives reality — before a rupee is deployed.</a:t>
-            </a:r>
-          </a:p>
-        </p:txBody>
-      </p:sp>
-      <p:sp>
-        <p:nvSpPr>
-          <p:cNvPr id="10" name="Rectangle 9"/>
-          <p:cNvSpPr/>
-          <p:nvPr/>
-        </p:nvSpPr>
-        <p:spPr>
-          <a:xfrm>
-            <a:off x="0" y="6400800"/>
-            <a:ext cx="12191695" cy="457200"/>
-          </a:xfrm>
-          <a:prstGeom prst="rect">
-            <a:avLst/>
-          </a:prstGeom>
-          <a:solidFill>
-            <a:srgbClr val="003366"/>
-          </a:solidFill>
-          <a:ln>
-            <a:noFill/>
-          </a:ln>
-        </p:spPr>
-        <p:style>
-          <a:lnRef idx="1">
-            <a:schemeClr val="accent1"/>
-          </a:lnRef>
-          <a:fillRef idx="3">
-            <a:schemeClr val="accent1"/>
-          </a:fillRef>
-          <a:effectRef idx="2">
-            <a:schemeClr val="accent1"/>
-          </a:effectRef>
-          <a:fontRef idx="minor">
-            <a:schemeClr val="lt1"/>
-          </a:fontRef>
-        </p:style>
-        <p:txBody>
-          <a:bodyPr rtlCol="0" anchor="ctr"/>
-          <a:lstStyle/>
-          <a:p>
-            <a:pPr algn="ctr"/>
-          </a:p>
-        </p:txBody>
-      </p:sp>
-      <p:sp>
-        <p:nvSpPr>
-          <p:cNvPr id="11" name="TextBox 10"/>
+              <a:rPr sz="1300" b="1">
+                <a:solidFill>
+                  <a:srgbClr val="132A52"/>
+                </a:solidFill>
+                <a:latin typeface="Georgia"/>
+              </a:rPr>
+              <a:t>Core Thesis: A profitable backtest is not evidence of an edge. An honest tool measures whether a strategy survives reality.</a:t>
+            </a:r>
+          </a:p>
+        </p:txBody>
+      </p:sp>
+      <p:sp>
+        <p:nvSpPr>
+          <p:cNvPr id="10" name="TextBox 9"/>
           <p:cNvSpPr txBox="1"/>
           <p:nvPr/>
         </p:nvSpPr>
         <p:spPr>
           <a:xfrm>
-            <a:off x="365760" y="6455664"/>
-            <a:ext cx="10058400" cy="365760"/>
+            <a:off x="731520" y="6446520"/>
+            <a:ext cx="10728655" cy="274320"/>
           </a:xfrm>
           <a:prstGeom prst="rect">
             <a:avLst/>
@@ -4387,20 +4542,19 @@
           <a:noFill/>
         </p:spPr>
         <p:txBody>
-          <a:bodyPr wrap="square" anchor="ctr">
+          <a:bodyPr wrap="none" lIns="0" tIns="0" rIns="0" bIns="0">
             <a:spAutoFit/>
           </a:bodyPr>
           <a:lstStyle/>
           <a:p>
-            <a:pPr algn="l"/>
-            <a:r>
-              <a:rPr sz="1000" b="0" i="0">
-                <a:solidFill>
-                  <a:srgbClr val="FFFFFF"/>
-                </a:solidFill>
-                <a:latin typeface="Calibri"/>
-              </a:rPr>
-              <a:t>GTU DI05000341 · Pramaan</a:t>
+            <a:r>
+              <a:rPr sz="900">
+                <a:solidFill>
+                  <a:srgbClr val="64748B"/>
+                </a:solidFill>
+                <a:latin typeface="Consolas"/>
+              </a:rPr>
+              <a:t>GTU DI05000341 Minor Project | Pramaan Architecture &amp; Verification</a:t>
             </a:r>
           </a:p>
         </p:txBody>
@@ -4419,7 +4573,7 @@
     <p:bg>
       <p:bgPr>
         <a:solidFill>
-          <a:srgbClr val="FFFFFF"/>
+          <a:srgbClr val="F8FAFC"/>
         </a:solidFill>
         <a:effectLst/>
       </p:bgPr>
@@ -4433,20 +4587,123 @@
       <p:grpSpPr/>
       <p:sp>
         <p:nvSpPr>
-          <p:cNvPr id="2" name="Rectangle 1"/>
+          <p:cNvPr id="2" name="TextBox 1"/>
+          <p:cNvSpPr txBox="1"/>
+          <p:nvPr/>
+        </p:nvSpPr>
+        <p:spPr>
+          <a:xfrm>
+            <a:off x="731520" y="411480"/>
+            <a:ext cx="7772400" cy="274320"/>
+          </a:xfrm>
+          <a:prstGeom prst="rect">
+            <a:avLst/>
+          </a:prstGeom>
+          <a:noFill/>
+        </p:spPr>
+        <p:txBody>
+          <a:bodyPr wrap="square" lIns="0" tIns="0" rIns="0" bIns="0">
+            <a:spAutoFit/>
+          </a:bodyPr>
+          <a:lstStyle/>
+          <a:p>
+            <a:r>
+              <a:rPr sz="950" b="1">
+                <a:solidFill>
+                  <a:srgbClr val="64748B"/>
+                </a:solidFill>
+                <a:latin typeface="Consolas"/>
+              </a:rPr>
+              <a:t>UNIT 2: SYSTEM SPECIFICATIONS &amp; INDIAN MARKET MICROSTRUCTURE</a:t>
+            </a:r>
+          </a:p>
+        </p:txBody>
+      </p:sp>
+      <p:sp>
+        <p:nvSpPr>
+          <p:cNvPr id="3" name="TextBox 2"/>
+          <p:cNvSpPr txBox="1"/>
+          <p:nvPr/>
+        </p:nvSpPr>
+        <p:spPr>
+          <a:xfrm>
+            <a:off x="731520" y="685800"/>
+            <a:ext cx="9144000" cy="594360"/>
+          </a:xfrm>
+          <a:prstGeom prst="rect">
+            <a:avLst/>
+          </a:prstGeom>
+          <a:noFill/>
+        </p:spPr>
+        <p:txBody>
+          <a:bodyPr wrap="square" lIns="0" tIns="0" rIns="0" bIns="0">
+            <a:spAutoFit/>
+          </a:bodyPr>
+          <a:lstStyle/>
+          <a:p>
+            <a:r>
+              <a:rPr sz="2200" b="1">
+                <a:solidFill>
+                  <a:srgbClr val="132A52"/>
+                </a:solidFill>
+                <a:latin typeface="Trebuchet MS"/>
+              </a:rPr>
+              <a:t>The Indian Delivery Cost Stack: Statutory Breakdown</a:t>
+            </a:r>
+          </a:p>
+        </p:txBody>
+      </p:sp>
+      <p:sp>
+        <p:nvSpPr>
+          <p:cNvPr id="4" name="TextBox 3"/>
+          <p:cNvSpPr txBox="1"/>
+          <p:nvPr/>
+        </p:nvSpPr>
+        <p:spPr>
+          <a:xfrm>
+            <a:off x="10058400" y="411480"/>
+            <a:ext cx="1371600" cy="365760"/>
+          </a:xfrm>
+          <a:prstGeom prst="rect">
+            <a:avLst/>
+          </a:prstGeom>
+          <a:noFill/>
+        </p:spPr>
+        <p:txBody>
+          <a:bodyPr wrap="none" lIns="0" tIns="0" rIns="0" bIns="0">
+            <a:spAutoFit/>
+          </a:bodyPr>
+          <a:lstStyle/>
+          <a:p>
+            <a:pPr algn="r"/>
+            <a:r>
+              <a:rPr sz="1100" b="1">
+                <a:solidFill>
+                  <a:srgbClr val="64748B"/>
+                </a:solidFill>
+                <a:latin typeface="Consolas"/>
+              </a:rPr>
+              <a:t>03 / 10</a:t>
+            </a:r>
+          </a:p>
+        </p:txBody>
+      </p:sp>
+      <p:sp>
+        <p:nvSpPr>
+          <p:cNvPr id="5" name="Rectangle 4"/>
           <p:cNvSpPr/>
           <p:nvPr/>
         </p:nvSpPr>
         <p:spPr>
           <a:xfrm>
-            <a:off x="0" y="0"/>
-            <a:ext cx="12191695" cy="914400"/>
+            <a:off x="731520" y="1280160"/>
+            <a:ext cx="10728655" cy="13716"/>
           </a:xfrm>
           <a:prstGeom prst="rect">
             <a:avLst/>
           </a:prstGeom>
           <a:solidFill>
-            <a:srgbClr val="003366"/>
+            <a:srgbClr val="E2E8F0"/>
           </a:solidFill>
           <a:ln>
             <a:noFill/>
@@ -4474,96 +4731,598 @@
           </a:p>
         </p:txBody>
       </p:sp>
-      <p:sp>
-        <p:nvSpPr>
-          <p:cNvPr id="3" name="TextBox 2"/>
-          <p:cNvSpPr txBox="1"/>
+      <p:graphicFrame>
+        <p:nvGraphicFramePr>
+          <p:cNvPr id="6" name="Table 5"/>
+          <p:cNvGraphicFramePr>
+            <a:graphicFrameLocks noGrp="1"/>
+          </p:cNvGraphicFramePr>
           <p:nvPr/>
-        </p:nvSpPr>
-        <p:spPr>
-          <a:xfrm>
-            <a:off x="457200" y="146304"/>
-            <a:ext cx="9601200" cy="640080"/>
+        </p:nvGraphicFramePr>
+        <p:xfrm>
+          <a:off x="731520" y="1554480"/>
+          <a:ext cx="6217920" cy="3291840"/>
+        </p:xfrm>
+        <a:graphic>
+          <a:graphicData uri="http://schemas.openxmlformats.org/drawingml/2006/table">
+            <a:tbl>
+              <a:tblPr firstRow="1" bandRow="1">
+                <a:tableStyleId>{5C22544A-7EE6-4342-B048-85BDC9FD1C3A}</a:tableStyleId>
+              </a:tblPr>
+              <a:tblGrid>
+                <a:gridCol w="2011680"/>
+                <a:gridCol w="1371600"/>
+                <a:gridCol w="1463040"/>
+                <a:gridCol w="1371600"/>
+              </a:tblGrid>
+              <a:tr h="548640">
+                <a:tc>
+                  <a:txBody>
+                    <a:bodyPr/>
+                    <a:lstStyle/>
+                    <a:p>
+                      <a:pPr algn="l"/>
+                      <a:r>
+                        <a:rPr sz="1100" b="1">
+                          <a:solidFill>
+                            <a:srgbClr val="F8FAFC"/>
+                          </a:solidFill>
+                          <a:latin typeface="Trebuchet MS"/>
+                        </a:rPr>
+                        <a:t>Cost Component</a:t>
+                      </a:r>
+                    </a:p>
+                  </a:txBody>
+                  <a:tcPr>
+                    <a:solidFill>
+                      <a:srgbClr val="132A52"/>
+                    </a:solidFill>
+                  </a:tcPr>
+                </a:tc>
+                <a:tc>
+                  <a:txBody>
+                    <a:bodyPr/>
+                    <a:lstStyle/>
+                    <a:p>
+                      <a:pPr algn="l"/>
+                      <a:r>
+                        <a:rPr sz="1100" b="1">
+                          <a:solidFill>
+                            <a:srgbClr val="F8FAFC"/>
+                          </a:solidFill>
+                          <a:latin typeface="Trebuchet MS"/>
+                        </a:rPr>
+                        <a:t>Applicable Rate</a:t>
+                      </a:r>
+                    </a:p>
+                  </a:txBody>
+                  <a:tcPr>
+                    <a:solidFill>
+                      <a:srgbClr val="132A52"/>
+                    </a:solidFill>
+                  </a:tcPr>
+                </a:tc>
+                <a:tc>
+                  <a:txBody>
+                    <a:bodyPr/>
+                    <a:lstStyle/>
+                    <a:p>
+                      <a:pPr algn="l"/>
+                      <a:r>
+                        <a:rPr sz="1100" b="1">
+                          <a:solidFill>
+                            <a:srgbClr val="F8FAFC"/>
+                          </a:solidFill>
+                          <a:latin typeface="Trebuchet MS"/>
+                        </a:rPr>
+                        <a:t>Side Applied</a:t>
+                      </a:r>
+                    </a:p>
+                  </a:txBody>
+                  <a:tcPr>
+                    <a:solidFill>
+                      <a:srgbClr val="132A52"/>
+                    </a:solidFill>
+                  </a:tcPr>
+                </a:tc>
+                <a:tc>
+                  <a:txBody>
+                    <a:bodyPr/>
+                    <a:lstStyle/>
+                    <a:p>
+                      <a:pPr algn="l"/>
+                      <a:r>
+                        <a:rPr sz="1100" b="1">
+                          <a:solidFill>
+                            <a:srgbClr val="F8FAFC"/>
+                          </a:solidFill>
+                          <a:latin typeface="Trebuchet MS"/>
+                        </a:rPr>
+                        <a:t>Authority</a:t>
+                      </a:r>
+                    </a:p>
+                  </a:txBody>
+                  <a:tcPr>
+                    <a:solidFill>
+                      <a:srgbClr val="132A52"/>
+                    </a:solidFill>
+                  </a:tcPr>
+                </a:tc>
+              </a:tr>
+              <a:tr h="548640">
+                <a:tc>
+                  <a:txBody>
+                    <a:bodyPr/>
+                    <a:lstStyle/>
+                    <a:p>
+                      <a:r>
+                        <a:rPr sz="1050">
+                          <a:solidFill>
+                            <a:srgbClr val="0F172A"/>
+                          </a:solidFill>
+                          <a:latin typeface="Georgia"/>
+                        </a:rPr>
+                        <a:t>Securities Transaction Tax (STT)</a:t>
+                      </a:r>
+                    </a:p>
+                  </a:txBody>
+                  <a:tcPr>
+                    <a:solidFill>
+                      <a:srgbClr val="FFFFFF"/>
+                    </a:solidFill>
+                  </a:tcPr>
+                </a:tc>
+                <a:tc>
+                  <a:txBody>
+                    <a:bodyPr/>
+                    <a:lstStyle/>
+                    <a:p>
+                      <a:r>
+                        <a:rPr sz="1050">
+                          <a:solidFill>
+                            <a:srgbClr val="0F172A"/>
+                          </a:solidFill>
+                          <a:latin typeface="Consolas"/>
+                        </a:rPr>
+                        <a:t>0.100%</a:t>
+                      </a:r>
+                    </a:p>
+                  </a:txBody>
+                  <a:tcPr>
+                    <a:solidFill>
+                      <a:srgbClr val="FFFFFF"/>
+                    </a:solidFill>
+                  </a:tcPr>
+                </a:tc>
+                <a:tc>
+                  <a:txBody>
+                    <a:bodyPr/>
+                    <a:lstStyle/>
+                    <a:p>
+                      <a:r>
+                        <a:rPr sz="1050">
+                          <a:solidFill>
+                            <a:srgbClr val="0F172A"/>
+                          </a:solidFill>
+                          <a:latin typeface="Georgia"/>
+                        </a:rPr>
+                        <a:t>Buy &amp; Sell</a:t>
+                      </a:r>
+                    </a:p>
+                  </a:txBody>
+                  <a:tcPr>
+                    <a:solidFill>
+                      <a:srgbClr val="FFFFFF"/>
+                    </a:solidFill>
+                  </a:tcPr>
+                </a:tc>
+                <a:tc>
+                  <a:txBody>
+                    <a:bodyPr/>
+                    <a:lstStyle/>
+                    <a:p>
+                      <a:r>
+                        <a:rPr sz="1050">
+                          <a:solidFill>
+                            <a:srgbClr val="0F172A"/>
+                          </a:solidFill>
+                          <a:latin typeface="Georgia"/>
+                        </a:rPr>
+                        <a:t>Govt. of India</a:t>
+                      </a:r>
+                    </a:p>
+                  </a:txBody>
+                  <a:tcPr>
+                    <a:solidFill>
+                      <a:srgbClr val="FFFFFF"/>
+                    </a:solidFill>
+                  </a:tcPr>
+                </a:tc>
+              </a:tr>
+              <a:tr h="548640">
+                <a:tc>
+                  <a:txBody>
+                    <a:bodyPr/>
+                    <a:lstStyle/>
+                    <a:p>
+                      <a:r>
+                        <a:rPr sz="1050">
+                          <a:solidFill>
+                            <a:srgbClr val="0F172A"/>
+                          </a:solidFill>
+                          <a:latin typeface="Georgia"/>
+                        </a:rPr>
+                        <a:t>Stamp Duty</a:t>
+                      </a:r>
+                    </a:p>
+                  </a:txBody>
+                  <a:tcPr>
+                    <a:solidFill>
+                      <a:srgbClr val="F1F5F9"/>
+                    </a:solidFill>
+                  </a:tcPr>
+                </a:tc>
+                <a:tc>
+                  <a:txBody>
+                    <a:bodyPr/>
+                    <a:lstStyle/>
+                    <a:p>
+                      <a:r>
+                        <a:rPr sz="1050">
+                          <a:solidFill>
+                            <a:srgbClr val="0F172A"/>
+                          </a:solidFill>
+                          <a:latin typeface="Consolas"/>
+                        </a:rPr>
+                        <a:t>0.015%</a:t>
+                      </a:r>
+                    </a:p>
+                  </a:txBody>
+                  <a:tcPr>
+                    <a:solidFill>
+                      <a:srgbClr val="F1F5F9"/>
+                    </a:solidFill>
+                  </a:tcPr>
+                </a:tc>
+                <a:tc>
+                  <a:txBody>
+                    <a:bodyPr/>
+                    <a:lstStyle/>
+                    <a:p>
+                      <a:r>
+                        <a:rPr sz="1050">
+                          <a:solidFill>
+                            <a:srgbClr val="0F172A"/>
+                          </a:solidFill>
+                          <a:latin typeface="Georgia"/>
+                        </a:rPr>
+                        <a:t>Buy Leg Only</a:t>
+                      </a:r>
+                    </a:p>
+                  </a:txBody>
+                  <a:tcPr>
+                    <a:solidFill>
+                      <a:srgbClr val="F1F5F9"/>
+                    </a:solidFill>
+                  </a:tcPr>
+                </a:tc>
+                <a:tc>
+                  <a:txBody>
+                    <a:bodyPr/>
+                    <a:lstStyle/>
+                    <a:p>
+                      <a:r>
+                        <a:rPr sz="1050">
+                          <a:solidFill>
+                            <a:srgbClr val="0F172A"/>
+                          </a:solidFill>
+                          <a:latin typeface="Georgia"/>
+                        </a:rPr>
+                        <a:t>Indian Stamp Act</a:t>
+                      </a:r>
+                    </a:p>
+                  </a:txBody>
+                  <a:tcPr>
+                    <a:solidFill>
+                      <a:srgbClr val="F1F5F9"/>
+                    </a:solidFill>
+                  </a:tcPr>
+                </a:tc>
+              </a:tr>
+              <a:tr h="548640">
+                <a:tc>
+                  <a:txBody>
+                    <a:bodyPr/>
+                    <a:lstStyle/>
+                    <a:p>
+                      <a:r>
+                        <a:rPr sz="1050">
+                          <a:solidFill>
+                            <a:srgbClr val="0F172A"/>
+                          </a:solidFill>
+                          <a:latin typeface="Georgia"/>
+                        </a:rPr>
+                        <a:t>Exchange Turnover Charges</a:t>
+                      </a:r>
+                    </a:p>
+                  </a:txBody>
+                  <a:tcPr>
+                    <a:solidFill>
+                      <a:srgbClr val="FFFFFF"/>
+                    </a:solidFill>
+                  </a:tcPr>
+                </a:tc>
+                <a:tc>
+                  <a:txBody>
+                    <a:bodyPr/>
+                    <a:lstStyle/>
+                    <a:p>
+                      <a:r>
+                        <a:rPr sz="1050">
+                          <a:solidFill>
+                            <a:srgbClr val="0F172A"/>
+                          </a:solidFill>
+                          <a:latin typeface="Consolas"/>
+                        </a:rPr>
+                        <a:t>0.00297%</a:t>
+                      </a:r>
+                    </a:p>
+                  </a:txBody>
+                  <a:tcPr>
+                    <a:solidFill>
+                      <a:srgbClr val="FFFFFF"/>
+                    </a:solidFill>
+                  </a:tcPr>
+                </a:tc>
+                <a:tc>
+                  <a:txBody>
+                    <a:bodyPr/>
+                    <a:lstStyle/>
+                    <a:p>
+                      <a:r>
+                        <a:rPr sz="1050">
+                          <a:solidFill>
+                            <a:srgbClr val="0F172A"/>
+                          </a:solidFill>
+                          <a:latin typeface="Georgia"/>
+                        </a:rPr>
+                        <a:t>Buy &amp; Sell</a:t>
+                      </a:r>
+                    </a:p>
+                  </a:txBody>
+                  <a:tcPr>
+                    <a:solidFill>
+                      <a:srgbClr val="FFFFFF"/>
+                    </a:solidFill>
+                  </a:tcPr>
+                </a:tc>
+                <a:tc>
+                  <a:txBody>
+                    <a:bodyPr/>
+                    <a:lstStyle/>
+                    <a:p>
+                      <a:r>
+                        <a:rPr sz="1050">
+                          <a:solidFill>
+                            <a:srgbClr val="0F172A"/>
+                          </a:solidFill>
+                          <a:latin typeface="Georgia"/>
+                        </a:rPr>
+                        <a:t>NSE</a:t>
+                      </a:r>
+                    </a:p>
+                  </a:txBody>
+                  <a:tcPr>
+                    <a:solidFill>
+                      <a:srgbClr val="FFFFFF"/>
+                    </a:solidFill>
+                  </a:tcPr>
+                </a:tc>
+              </a:tr>
+              <a:tr h="548640">
+                <a:tc>
+                  <a:txBody>
+                    <a:bodyPr/>
+                    <a:lstStyle/>
+                    <a:p>
+                      <a:r>
+                        <a:rPr sz="1050">
+                          <a:solidFill>
+                            <a:srgbClr val="0F172A"/>
+                          </a:solidFill>
+                          <a:latin typeface="Georgia"/>
+                        </a:rPr>
+                        <a:t>SEBI Regulatory Fee</a:t>
+                      </a:r>
+                    </a:p>
+                  </a:txBody>
+                  <a:tcPr>
+                    <a:solidFill>
+                      <a:srgbClr val="F1F5F9"/>
+                    </a:solidFill>
+                  </a:tcPr>
+                </a:tc>
+                <a:tc>
+                  <a:txBody>
+                    <a:bodyPr/>
+                    <a:lstStyle/>
+                    <a:p>
+                      <a:r>
+                        <a:rPr sz="1050">
+                          <a:solidFill>
+                            <a:srgbClr val="0F172A"/>
+                          </a:solidFill>
+                          <a:latin typeface="Consolas"/>
+                        </a:rPr>
+                        <a:t>0.00010%</a:t>
+                      </a:r>
+                    </a:p>
+                  </a:txBody>
+                  <a:tcPr>
+                    <a:solidFill>
+                      <a:srgbClr val="F1F5F9"/>
+                    </a:solidFill>
+                  </a:tcPr>
+                </a:tc>
+                <a:tc>
+                  <a:txBody>
+                    <a:bodyPr/>
+                    <a:lstStyle/>
+                    <a:p>
+                      <a:r>
+                        <a:rPr sz="1050">
+                          <a:solidFill>
+                            <a:srgbClr val="0F172A"/>
+                          </a:solidFill>
+                          <a:latin typeface="Georgia"/>
+                        </a:rPr>
+                        <a:t>Buy &amp; Sell</a:t>
+                      </a:r>
+                    </a:p>
+                  </a:txBody>
+                  <a:tcPr>
+                    <a:solidFill>
+                      <a:srgbClr val="F1F5F9"/>
+                    </a:solidFill>
+                  </a:tcPr>
+                </a:tc>
+                <a:tc>
+                  <a:txBody>
+                    <a:bodyPr/>
+                    <a:lstStyle/>
+                    <a:p>
+                      <a:r>
+                        <a:rPr sz="1050">
+                          <a:solidFill>
+                            <a:srgbClr val="0F172A"/>
+                          </a:solidFill>
+                          <a:latin typeface="Georgia"/>
+                        </a:rPr>
+                        <a:t>SEBI</a:t>
+                      </a:r>
+                    </a:p>
+                  </a:txBody>
+                  <a:tcPr>
+                    <a:solidFill>
+                      <a:srgbClr val="F1F5F9"/>
+                    </a:solidFill>
+                  </a:tcPr>
+                </a:tc>
+              </a:tr>
+              <a:tr h="548640">
+                <a:tc>
+                  <a:txBody>
+                    <a:bodyPr/>
+                    <a:lstStyle/>
+                    <a:p>
+                      <a:r>
+                        <a:rPr sz="1050">
+                          <a:solidFill>
+                            <a:srgbClr val="0F172A"/>
+                          </a:solidFill>
+                          <a:latin typeface="Georgia"/>
+                        </a:rPr>
+                        <a:t>Goods &amp; Services Tax (GST)</a:t>
+                      </a:r>
+                    </a:p>
+                  </a:txBody>
+                  <a:tcPr>
+                    <a:solidFill>
+                      <a:srgbClr val="FFFFFF"/>
+                    </a:solidFill>
+                  </a:tcPr>
+                </a:tc>
+                <a:tc>
+                  <a:txBody>
+                    <a:bodyPr/>
+                    <a:lstStyle/>
+                    <a:p>
+                      <a:r>
+                        <a:rPr sz="1050">
+                          <a:solidFill>
+                            <a:srgbClr val="0F172A"/>
+                          </a:solidFill>
+                          <a:latin typeface="Consolas"/>
+                        </a:rPr>
+                        <a:t>18.000%</a:t>
+                      </a:r>
+                    </a:p>
+                  </a:txBody>
+                  <a:tcPr>
+                    <a:solidFill>
+                      <a:srgbClr val="FFFFFF"/>
+                    </a:solidFill>
+                  </a:tcPr>
+                </a:tc>
+                <a:tc>
+                  <a:txBody>
+                    <a:bodyPr/>
+                    <a:lstStyle/>
+                    <a:p>
+                      <a:r>
+                        <a:rPr sz="1050">
+                          <a:solidFill>
+                            <a:srgbClr val="0F172A"/>
+                          </a:solidFill>
+                          <a:latin typeface="Georgia"/>
+                        </a:rPr>
+                        <a:t>On Brokerage+Exch</a:t>
+                      </a:r>
+                    </a:p>
+                  </a:txBody>
+                  <a:tcPr>
+                    <a:solidFill>
+                      <a:srgbClr val="FFFFFF"/>
+                    </a:solidFill>
+                  </a:tcPr>
+                </a:tc>
+                <a:tc>
+                  <a:txBody>
+                    <a:bodyPr/>
+                    <a:lstStyle/>
+                    <a:p>
+                      <a:r>
+                        <a:rPr sz="1050">
+                          <a:solidFill>
+                            <a:srgbClr val="0F172A"/>
+                          </a:solidFill>
+                          <a:latin typeface="Georgia"/>
+                        </a:rPr>
+                        <a:t>CBIC</a:t>
+                      </a:r>
+                    </a:p>
+                  </a:txBody>
+                  <a:tcPr>
+                    <a:solidFill>
+                      <a:srgbClr val="FFFFFF"/>
+                    </a:solidFill>
+                  </a:tcPr>
+                </a:tc>
+              </a:tr>
+            </a:tbl>
+          </a:graphicData>
+        </a:graphic>
+      </p:graphicFrame>
+      <p:sp>
+        <p:nvSpPr>
+          <p:cNvPr id="7" name="Rectangle 6"/>
+          <p:cNvSpPr/>
+          <p:nvPr/>
+        </p:nvSpPr>
+        <p:spPr>
+          <a:xfrm>
+            <a:off x="7223760" y="1554480"/>
+            <a:ext cx="4236415" cy="4480560"/>
           </a:xfrm>
           <a:prstGeom prst="rect">
             <a:avLst/>
           </a:prstGeom>
-          <a:noFill/>
-        </p:spPr>
-        <p:txBody>
-          <a:bodyPr wrap="square" anchor="ctr">
-            <a:spAutoFit/>
-          </a:bodyPr>
-          <a:lstStyle/>
-          <a:p>
-            <a:pPr algn="l"/>
-            <a:r>
-              <a:rPr sz="3000" b="1" i="0">
-                <a:solidFill>
-                  <a:srgbClr val="FFFFFF"/>
-                </a:solidFill>
-                <a:latin typeface="Calibri"/>
-              </a:rPr>
-              <a:t>Architecture: An Engine That Cannot Cheat</a:t>
-            </a:r>
-          </a:p>
-        </p:txBody>
-      </p:sp>
-      <p:sp>
-        <p:nvSpPr>
-          <p:cNvPr id="4" name="TextBox 3"/>
-          <p:cNvSpPr txBox="1"/>
-          <p:nvPr/>
-        </p:nvSpPr>
-        <p:spPr>
-          <a:xfrm>
-            <a:off x="11140135" y="146304"/>
-            <a:ext cx="685800" cy="640080"/>
-          </a:xfrm>
-          <a:prstGeom prst="rect">
-            <a:avLst/>
-          </a:prstGeom>
-          <a:noFill/>
-        </p:spPr>
-        <p:txBody>
-          <a:bodyPr wrap="square" anchor="ctr">
-            <a:spAutoFit/>
-          </a:bodyPr>
-          <a:lstStyle/>
-          <a:p>
-            <a:pPr algn="r"/>
-            <a:r>
-              <a:rPr sz="4400" b="1" i="0">
-                <a:solidFill>
-                  <a:srgbClr val="0A4D8C"/>
-                </a:solidFill>
-                <a:latin typeface="Calibri"/>
-              </a:rPr>
-              <a:t>3</a:t>
-            </a:r>
-          </a:p>
-        </p:txBody>
-      </p:sp>
-      <p:sp>
-        <p:nvSpPr>
-          <p:cNvPr id="5" name="Rounded Rectangle 4"/>
-          <p:cNvSpPr/>
-          <p:nvPr/>
-        </p:nvSpPr>
-        <p:spPr>
-          <a:xfrm>
-            <a:off x="822960" y="1325880"/>
-            <a:ext cx="10545775" cy="749808"/>
-          </a:xfrm>
-          <a:prstGeom prst="roundRect">
-            <a:avLst/>
-          </a:prstGeom>
           <a:solidFill>
-            <a:srgbClr val="F1F5F9"/>
+            <a:srgbClr val="FFFFFF"/>
           </a:solidFill>
           <a:ln w="12700">
             <a:solidFill>
-              <a:srgbClr val="64748B"/>
+              <a:srgbClr val="E2E8F0"/>
             </a:solidFill>
           </a:ln>
           <a:effectLst/>
@@ -4583,51 +5342,138 @@
           </a:fontRef>
         </p:style>
         <p:txBody>
-          <a:bodyPr rtlCol="0" anchor="ctr" wrap="square"/>
+          <a:bodyPr rtlCol="0" anchor="ctr" wrap="square" lIns="274320" rIns="274320" tIns="274320"/>
           <a:lstStyle/>
           <a:p>
             <a:pPr algn="ctr"/>
             <a:r>
-              <a:rPr sz="1700" b="1">
-                <a:solidFill>
-                  <a:srgbClr val="64748B"/>
-                </a:solidFill>
-                <a:latin typeface="Calibri"/>
-              </a:rPr>
-              <a:t>Presentation   </a:t>
-            </a:r>
-            <a:r>
-              <a:rPr sz="1300">
-                <a:solidFill>
-                  <a:srgbClr val="64748B"/>
-                </a:solidFill>
-                <a:latin typeface="Calibri"/>
-              </a:rPr>
-              <a:t>Next.js UI · Streamlit fallback · CLI</a:t>
-            </a:r>
-          </a:p>
-        </p:txBody>
-      </p:sp>
-      <p:sp>
-        <p:nvSpPr>
-          <p:cNvPr id="6" name="Rounded Rectangle 5"/>
+              <a:rPr sz="1600" b="1">
+                <a:solidFill>
+                  <a:srgbClr val="132A52"/>
+                </a:solidFill>
+                <a:latin typeface="Trebuchet MS"/>
+              </a:rPr>
+              <a:t>Microstructure Invariants</a:t>
+            </a:r>
+          </a:p>
+          <a:p>
+            <a:pPr>
+              <a:spcBef>
+                <a:spcPts val="1200"/>
+              </a:spcBef>
+            </a:pPr>
+            <a:r>
+              <a:rPr sz="1200" b="1">
+                <a:solidFill>
+                  <a:srgbClr val="B91C1C"/>
+                </a:solidFill>
+                <a:latin typeface="Trebuchet MS"/>
+              </a:rPr>
+              <a:t>Non-Linear Slippage (Almgren-Chriss)</a:t>
+            </a:r>
+          </a:p>
+          <a:p>
+            <a:pPr>
+              <a:spcBef>
+                <a:spcPts val="200"/>
+              </a:spcBef>
+            </a:pPr>
+            <a:r>
+              <a:rPr sz="1050">
+                <a:solidFill>
+                  <a:srgbClr val="0F172A"/>
+                </a:solidFill>
+                <a:latin typeface="Georgia"/>
+              </a:rPr>
+              <a:t>Slippage is modeled via square-root market impact: η = σ * √(Q / V). Large order sizing scales friction quadratically with liquidity.</a:t>
+            </a:r>
+          </a:p>
+          <a:p>
+            <a:pPr>
+              <a:spcBef>
+                <a:spcPts val="1200"/>
+              </a:spcBef>
+            </a:pPr>
+            <a:r>
+              <a:rPr sz="1200" b="1">
+                <a:solidFill>
+                  <a:srgbClr val="B91C1C"/>
+                </a:solidFill>
+                <a:latin typeface="Trebuchet MS"/>
+              </a:rPr>
+              <a:t>Turnover Tax Asymmetry</a:t>
+            </a:r>
+          </a:p>
+          <a:p>
+            <a:pPr>
+              <a:spcBef>
+                <a:spcPts val="200"/>
+              </a:spcBef>
+            </a:pPr>
+            <a:r>
+              <a:rPr sz="1050">
+                <a:solidFill>
+                  <a:srgbClr val="0F172A"/>
+                </a:solidFill>
+                <a:latin typeface="Georgia"/>
+              </a:rPr>
+              <a:t>High-frequency rebalancing (e.g. RSI, short SMA) generates recurring STT and turnover drag that compounds negatively over multi-year horizons.</a:t>
+            </a:r>
+          </a:p>
+          <a:p>
+            <a:pPr>
+              <a:spcBef>
+                <a:spcPts val="1200"/>
+              </a:spcBef>
+            </a:pPr>
+            <a:r>
+              <a:rPr sz="1200" b="1">
+                <a:solidFill>
+                  <a:srgbClr val="B91C1C"/>
+                </a:solidFill>
+                <a:latin typeface="Trebuchet MS"/>
+              </a:rPr>
+              <a:t>Delivery vs Intraday Reality</a:t>
+            </a:r>
+          </a:p>
+          <a:p>
+            <a:pPr>
+              <a:spcBef>
+                <a:spcPts val="200"/>
+              </a:spcBef>
+            </a:pPr>
+            <a:r>
+              <a:rPr sz="1050">
+                <a:solidFill>
+                  <a:srgbClr val="0F172A"/>
+                </a:solidFill>
+                <a:latin typeface="Georgia"/>
+              </a:rPr>
+              <a:t>Delivery equity positions carry 0.1% STT on both legs, making naive trend-following significantly more expensive than US market equities.</a:t>
+            </a:r>
+          </a:p>
+        </p:txBody>
+      </p:sp>
+      <p:sp>
+        <p:nvSpPr>
+          <p:cNvPr id="8" name="Rectangle 7"/>
           <p:cNvSpPr/>
           <p:nvPr/>
         </p:nvSpPr>
         <p:spPr>
           <a:xfrm>
-            <a:off x="822960" y="2194560"/>
-            <a:ext cx="10545775" cy="749808"/>
-          </a:xfrm>
-          <a:prstGeom prst="roundRect">
+            <a:off x="731520" y="5120640"/>
+            <a:ext cx="6217920" cy="914400"/>
+          </a:xfrm>
+          <a:prstGeom prst="rect">
             <a:avLst/>
           </a:prstGeom>
           <a:solidFill>
-            <a:srgbClr val="F1F5F9"/>
+            <a:srgbClr val="FEF2F2"/>
           </a:solidFill>
           <a:ln w="12700">
             <a:solidFill>
-              <a:srgbClr val="64748B"/>
+              <a:srgbClr val="B91C1C"/>
             </a:solidFill>
           </a:ln>
           <a:effectLst/>
@@ -4647,233 +5493,32 @@
           </a:fontRef>
         </p:style>
         <p:txBody>
-          <a:bodyPr rtlCol="0" anchor="ctr" wrap="square"/>
+          <a:bodyPr rtlCol="0" anchor="ctr" lIns="228600"/>
           <a:lstStyle/>
           <a:p>
             <a:pPr algn="ctr"/>
             <a:r>
-              <a:rPr sz="1700" b="1">
-                <a:solidFill>
-                  <a:srgbClr val="64748B"/>
-                </a:solidFill>
-                <a:latin typeface="Calibri"/>
-              </a:rPr>
-              <a:t>API   </a:t>
-            </a:r>
-            <a:r>
-              <a:rPr sz="1300">
-                <a:solidFill>
-                  <a:srgbClr val="64748B"/>
-                </a:solidFill>
-                <a:latin typeface="Calibri"/>
-              </a:rPr>
-              <a:t>FastAPI REST · documented request contract</a:t>
-            </a:r>
-          </a:p>
-        </p:txBody>
-      </p:sp>
-      <p:sp>
-        <p:nvSpPr>
-          <p:cNvPr id="7" name="Rounded Rectangle 6"/>
-          <p:cNvSpPr/>
-          <p:nvPr/>
-        </p:nvSpPr>
-        <p:spPr>
-          <a:xfrm>
-            <a:off x="822960" y="3063240"/>
-            <a:ext cx="10545775" cy="749808"/>
-          </a:xfrm>
-          <a:prstGeom prst="roundRect">
-            <a:avLst/>
-          </a:prstGeom>
-          <a:solidFill>
-            <a:srgbClr val="F1F5F9"/>
-          </a:solidFill>
-          <a:ln w="12700">
-            <a:solidFill>
-              <a:srgbClr val="64748B"/>
-            </a:solidFill>
-          </a:ln>
-          <a:effectLst/>
-        </p:spPr>
-        <p:style>
-          <a:lnRef idx="1">
-            <a:schemeClr val="accent1"/>
-          </a:lnRef>
-          <a:fillRef idx="3">
-            <a:schemeClr val="accent1"/>
-          </a:fillRef>
-          <a:effectRef idx="2">
-            <a:schemeClr val="accent1"/>
-          </a:effectRef>
-          <a:fontRef idx="minor">
-            <a:schemeClr val="lt1"/>
-          </a:fontRef>
-        </p:style>
-        <p:txBody>
-          <a:bodyPr rtlCol="0" anchor="ctr" wrap="square"/>
-          <a:lstStyle/>
-          <a:p>
-            <a:pPr algn="ctr"/>
-            <a:r>
-              <a:rPr sz="1700" b="1">
-                <a:solidFill>
-                  <a:srgbClr val="64748B"/>
-                </a:solidFill>
-                <a:latin typeface="Calibri"/>
-              </a:rPr>
-              <a:t>Analytics   </a:t>
-            </a:r>
-            <a:r>
-              <a:rPr sz="1300">
-                <a:solidFill>
-                  <a:srgbClr val="64748B"/>
-                </a:solidFill>
-                <a:latin typeface="Calibri"/>
-              </a:rPr>
-              <a:t>Metrics · Deflated Sharpe · CPCV + embargo</a:t>
-            </a:r>
-          </a:p>
-        </p:txBody>
-      </p:sp>
-      <p:sp>
-        <p:nvSpPr>
-          <p:cNvPr id="8" name="Rounded Rectangle 7"/>
-          <p:cNvSpPr/>
-          <p:nvPr/>
-        </p:nvSpPr>
-        <p:spPr>
-          <a:xfrm>
-            <a:off x="822960" y="3931920"/>
-            <a:ext cx="10545775" cy="749808"/>
-          </a:xfrm>
-          <a:prstGeom prst="roundRect">
-            <a:avLst/>
-          </a:prstGeom>
-          <a:solidFill>
-            <a:srgbClr val="1E293B"/>
-          </a:solidFill>
-          <a:ln w="25400">
-            <a:solidFill>
-              <a:srgbClr val="CC0000"/>
-            </a:solidFill>
-          </a:ln>
-          <a:effectLst/>
-        </p:spPr>
-        <p:style>
-          <a:lnRef idx="1">
-            <a:schemeClr val="accent1"/>
-          </a:lnRef>
-          <a:fillRef idx="3">
-            <a:schemeClr val="accent1"/>
-          </a:fillRef>
-          <a:effectRef idx="2">
-            <a:schemeClr val="accent1"/>
-          </a:effectRef>
-          <a:fontRef idx="minor">
-            <a:schemeClr val="lt1"/>
-          </a:fontRef>
-        </p:style>
-        <p:txBody>
-          <a:bodyPr rtlCol="0" anchor="ctr" wrap="square"/>
-          <a:lstStyle/>
-          <a:p>
-            <a:pPr algn="ctr"/>
-            <a:r>
-              <a:rPr sz="1700" b="1">
-                <a:solidFill>
-                  <a:srgbClr val="FFFFFF"/>
-                </a:solidFill>
-                <a:latin typeface="Calibri"/>
-              </a:rPr>
-              <a:t>Engine  ←  the contribution   </a:t>
-            </a:r>
-            <a:r>
-              <a:rPr sz="1300">
-                <a:solidFill>
-                  <a:srgbClr val="CBD5E1"/>
-                </a:solidFill>
-                <a:latin typeface="Calibri"/>
-              </a:rPr>
-              <a:t>BacktestEngine · Portfolio · Position · IndianCostModel</a:t>
-            </a:r>
-          </a:p>
-        </p:txBody>
-      </p:sp>
-      <p:sp>
-        <p:nvSpPr>
-          <p:cNvPr id="9" name="Rounded Rectangle 8"/>
-          <p:cNvSpPr/>
-          <p:nvPr/>
-        </p:nvSpPr>
-        <p:spPr>
-          <a:xfrm>
-            <a:off x="822960" y="4800600"/>
-            <a:ext cx="10545775" cy="749808"/>
-          </a:xfrm>
-          <a:prstGeom prst="roundRect">
-            <a:avLst/>
-          </a:prstGeom>
-          <a:solidFill>
-            <a:srgbClr val="F1F5F9"/>
-          </a:solidFill>
-          <a:ln w="12700">
-            <a:solidFill>
-              <a:srgbClr val="64748B"/>
-            </a:solidFill>
-          </a:ln>
-          <a:effectLst/>
-        </p:spPr>
-        <p:style>
-          <a:lnRef idx="1">
-            <a:schemeClr val="accent1"/>
-          </a:lnRef>
-          <a:fillRef idx="3">
-            <a:schemeClr val="accent1"/>
-          </a:fillRef>
-          <a:effectRef idx="2">
-            <a:schemeClr val="accent1"/>
-          </a:effectRef>
-          <a:fontRef idx="minor">
-            <a:schemeClr val="lt1"/>
-          </a:fontRef>
-        </p:style>
-        <p:txBody>
-          <a:bodyPr rtlCol="0" anchor="ctr" wrap="square"/>
-          <a:lstStyle/>
-          <a:p>
-            <a:pPr algn="ctr"/>
-            <a:r>
-              <a:rPr sz="1700" b="1">
-                <a:solidFill>
-                  <a:srgbClr val="64748B"/>
-                </a:solidFill>
-                <a:latin typeface="Calibri"/>
-              </a:rPr>
-              <a:t>Strategy + Data   </a:t>
-            </a:r>
-            <a:r>
-              <a:rPr sz="1300">
-                <a:solidFill>
-                  <a:srgbClr val="64748B"/>
-                </a:solidFill>
-                <a:latin typeface="Calibri"/>
-              </a:rPr>
-              <a:t>SMA · RSI · Momentum · BuyAndHold · fetch → clean → universe</a:t>
-            </a:r>
-          </a:p>
-        </p:txBody>
-      </p:sp>
-      <p:sp>
-        <p:nvSpPr>
-          <p:cNvPr id="10" name="TextBox 9"/>
+              <a:rPr sz="1150" b="1">
+                <a:solidFill>
+                  <a:srgbClr val="B91C1C"/>
+                </a:solidFill>
+                <a:latin typeface="Georgia"/>
+              </a:rPr>
+              <a:t>Impact on Delivery: Statutory friction eliminates 30% to 50% of nominal gross gains on typical active equity strategies.</a:t>
+            </a:r>
+          </a:p>
+        </p:txBody>
+      </p:sp>
+      <p:sp>
+        <p:nvSpPr>
+          <p:cNvPr id="9" name="TextBox 8"/>
           <p:cNvSpPr txBox="1"/>
           <p:nvPr/>
         </p:nvSpPr>
         <p:spPr>
           <a:xfrm>
-            <a:off x="822960" y="5760720"/>
-            <a:ext cx="10545775" cy="640080"/>
+            <a:off x="731520" y="6446520"/>
+            <a:ext cx="10728655" cy="274320"/>
           </a:xfrm>
           <a:prstGeom prst="rect">
             <a:avLst/>
@@ -4881,98 +5526,19 @@
           <a:noFill/>
         </p:spPr>
         <p:txBody>
-          <a:bodyPr wrap="square" anchor="t">
+          <a:bodyPr wrap="none" lIns="0" tIns="0" rIns="0" bIns="0">
             <a:spAutoFit/>
           </a:bodyPr>
           <a:lstStyle/>
           <a:p>
-            <a:pPr algn="ctr"/>
-            <a:r>
-              <a:rPr sz="1400" b="0" i="1">
-                <a:solidFill>
-                  <a:srgbClr val="003366"/>
-                </a:solidFill>
-                <a:latin typeface="Calibri"/>
-              </a:rPr>
-              <a:t>The engine has no dependency on the UI — it runs headlessly with no web framework present. It is never rewritten; bugs are fixed with regression tests.</a:t>
-            </a:r>
-          </a:p>
-        </p:txBody>
-      </p:sp>
-      <p:sp>
-        <p:nvSpPr>
-          <p:cNvPr id="11" name="Rectangle 10"/>
-          <p:cNvSpPr/>
-          <p:nvPr/>
-        </p:nvSpPr>
-        <p:spPr>
-          <a:xfrm>
-            <a:off x="0" y="6400800"/>
-            <a:ext cx="12191695" cy="457200"/>
-          </a:xfrm>
-          <a:prstGeom prst="rect">
-            <a:avLst/>
-          </a:prstGeom>
-          <a:solidFill>
-            <a:srgbClr val="003366"/>
-          </a:solidFill>
-          <a:ln>
-            <a:noFill/>
-          </a:ln>
-        </p:spPr>
-        <p:style>
-          <a:lnRef idx="1">
-            <a:schemeClr val="accent1"/>
-          </a:lnRef>
-          <a:fillRef idx="3">
-            <a:schemeClr val="accent1"/>
-          </a:fillRef>
-          <a:effectRef idx="2">
-            <a:schemeClr val="accent1"/>
-          </a:effectRef>
-          <a:fontRef idx="minor">
-            <a:schemeClr val="lt1"/>
-          </a:fontRef>
-        </p:style>
-        <p:txBody>
-          <a:bodyPr rtlCol="0" anchor="ctr"/>
-          <a:lstStyle/>
-          <a:p>
-            <a:pPr algn="ctr"/>
-          </a:p>
-        </p:txBody>
-      </p:sp>
-      <p:sp>
-        <p:nvSpPr>
-          <p:cNvPr id="12" name="TextBox 11"/>
-          <p:cNvSpPr txBox="1"/>
-          <p:nvPr/>
-        </p:nvSpPr>
-        <p:spPr>
-          <a:xfrm>
-            <a:off x="365760" y="6455664"/>
-            <a:ext cx="10058400" cy="365760"/>
-          </a:xfrm>
-          <a:prstGeom prst="rect">
-            <a:avLst/>
-          </a:prstGeom>
-          <a:noFill/>
-        </p:spPr>
-        <p:txBody>
-          <a:bodyPr wrap="square" anchor="ctr">
-            <a:spAutoFit/>
-          </a:bodyPr>
-          <a:lstStyle/>
-          <a:p>
-            <a:pPr algn="l"/>
-            <a:r>
-              <a:rPr sz="1000" b="0" i="0">
-                <a:solidFill>
-                  <a:srgbClr val="FFFFFF"/>
-                </a:solidFill>
-                <a:latin typeface="Calibri"/>
-              </a:rPr>
-              <a:t>GTU DI05000341 · Pramaan</a:t>
+            <a:r>
+              <a:rPr sz="900">
+                <a:solidFill>
+                  <a:srgbClr val="64748B"/>
+                </a:solidFill>
+                <a:latin typeface="Consolas"/>
+              </a:rPr>
+              <a:t>GTU DI05000341 Minor Project | Pramaan Architecture &amp; Verification</a:t>
             </a:r>
           </a:p>
         </p:txBody>
@@ -4991,7 +5557,7 @@
     <p:bg>
       <p:bgPr>
         <a:solidFill>
-          <a:srgbClr val="FFFFFF"/>
+          <a:srgbClr val="F8FAFC"/>
         </a:solidFill>
         <a:effectLst/>
       </p:bgPr>
@@ -5005,20 +5571,123 @@
       <p:grpSpPr/>
       <p:sp>
         <p:nvSpPr>
-          <p:cNvPr id="2" name="Rectangle 1"/>
+          <p:cNvPr id="2" name="TextBox 1"/>
+          <p:cNvSpPr txBox="1"/>
+          <p:nvPr/>
+        </p:nvSpPr>
+        <p:spPr>
+          <a:xfrm>
+            <a:off x="731520" y="411480"/>
+            <a:ext cx="7772400" cy="274320"/>
+          </a:xfrm>
+          <a:prstGeom prst="rect">
+            <a:avLst/>
+          </a:prstGeom>
+          <a:noFill/>
+        </p:spPr>
+        <p:txBody>
+          <a:bodyPr wrap="square" lIns="0" tIns="0" rIns="0" bIns="0">
+            <a:spAutoFit/>
+          </a:bodyPr>
+          <a:lstStyle/>
+          <a:p>
+            <a:r>
+              <a:rPr sz="950" b="1">
+                <a:solidFill>
+                  <a:srgbClr val="64748B"/>
+                </a:solidFill>
+                <a:latin typeface="Consolas"/>
+              </a:rPr>
+              <a:t>UNIT 3: IMPLEMENTATION &amp; SOFTWARE ARCHITECTURE</a:t>
+            </a:r>
+          </a:p>
+        </p:txBody>
+      </p:sp>
+      <p:sp>
+        <p:nvSpPr>
+          <p:cNvPr id="3" name="TextBox 2"/>
+          <p:cNvSpPr txBox="1"/>
+          <p:nvPr/>
+        </p:nvSpPr>
+        <p:spPr>
+          <a:xfrm>
+            <a:off x="731520" y="685800"/>
+            <a:ext cx="9144000" cy="594360"/>
+          </a:xfrm>
+          <a:prstGeom prst="rect">
+            <a:avLst/>
+          </a:prstGeom>
+          <a:noFill/>
+        </p:spPr>
+        <p:txBody>
+          <a:bodyPr wrap="square" lIns="0" tIns="0" rIns="0" bIns="0">
+            <a:spAutoFit/>
+          </a:bodyPr>
+          <a:lstStyle/>
+          <a:p>
+            <a:r>
+              <a:rPr sz="2200" b="1">
+                <a:solidFill>
+                  <a:srgbClr val="132A52"/>
+                </a:solidFill>
+                <a:latin typeface="Trebuchet MS"/>
+              </a:rPr>
+              <a:t>Engine Architecture: Modular, Decoupled &amp; Zero Lookahead</a:t>
+            </a:r>
+          </a:p>
+        </p:txBody>
+      </p:sp>
+      <p:sp>
+        <p:nvSpPr>
+          <p:cNvPr id="4" name="TextBox 3"/>
+          <p:cNvSpPr txBox="1"/>
+          <p:nvPr/>
+        </p:nvSpPr>
+        <p:spPr>
+          <a:xfrm>
+            <a:off x="10058400" y="411480"/>
+            <a:ext cx="1371600" cy="365760"/>
+          </a:xfrm>
+          <a:prstGeom prst="rect">
+            <a:avLst/>
+          </a:prstGeom>
+          <a:noFill/>
+        </p:spPr>
+        <p:txBody>
+          <a:bodyPr wrap="none" lIns="0" tIns="0" rIns="0" bIns="0">
+            <a:spAutoFit/>
+          </a:bodyPr>
+          <a:lstStyle/>
+          <a:p>
+            <a:pPr algn="r"/>
+            <a:r>
+              <a:rPr sz="1100" b="1">
+                <a:solidFill>
+                  <a:srgbClr val="64748B"/>
+                </a:solidFill>
+                <a:latin typeface="Consolas"/>
+              </a:rPr>
+              <a:t>04 / 10</a:t>
+            </a:r>
+          </a:p>
+        </p:txBody>
+      </p:sp>
+      <p:sp>
+        <p:nvSpPr>
+          <p:cNvPr id="5" name="Rectangle 4"/>
           <p:cNvSpPr/>
           <p:nvPr/>
         </p:nvSpPr>
         <p:spPr>
           <a:xfrm>
-            <a:off x="0" y="0"/>
-            <a:ext cx="12191695" cy="914400"/>
+            <a:off x="731520" y="1280160"/>
+            <a:ext cx="10728655" cy="13716"/>
           </a:xfrm>
           <a:prstGeom prst="rect">
             <a:avLst/>
           </a:prstGeom>
           <a:solidFill>
-            <a:srgbClr val="003366"/>
+            <a:srgbClr val="E2E8F0"/>
           </a:solidFill>
           <a:ln>
             <a:noFill/>
@@ -5048,444 +5717,27 @@
       </p:sp>
       <p:sp>
         <p:nvSpPr>
-          <p:cNvPr id="3" name="TextBox 2"/>
-          <p:cNvSpPr txBox="1"/>
-          <p:nvPr/>
-        </p:nvSpPr>
-        <p:spPr>
-          <a:xfrm>
-            <a:off x="457200" y="146304"/>
-            <a:ext cx="9601200" cy="640080"/>
-          </a:xfrm>
-          <a:prstGeom prst="rect">
-            <a:avLst/>
-          </a:prstGeom>
-          <a:noFill/>
-        </p:spPr>
-        <p:txBody>
-          <a:bodyPr wrap="square" anchor="ctr">
-            <a:spAutoFit/>
-          </a:bodyPr>
-          <a:lstStyle/>
-          <a:p>
-            <a:pPr algn="l"/>
-            <a:r>
-              <a:rPr sz="3000" b="1" i="0">
-                <a:solidFill>
-                  <a:srgbClr val="FFFFFF"/>
-                </a:solidFill>
-                <a:latin typeface="Calibri"/>
-              </a:rPr>
-              <a:t>Methodology: Remove Every Excuse</a:t>
-            </a:r>
-          </a:p>
-        </p:txBody>
-      </p:sp>
-      <p:sp>
-        <p:nvSpPr>
-          <p:cNvPr id="4" name="TextBox 3"/>
-          <p:cNvSpPr txBox="1"/>
-          <p:nvPr/>
-        </p:nvSpPr>
-        <p:spPr>
-          <a:xfrm>
-            <a:off x="11140135" y="146304"/>
-            <a:ext cx="685800" cy="640080"/>
-          </a:xfrm>
-          <a:prstGeom prst="rect">
-            <a:avLst/>
-          </a:prstGeom>
-          <a:noFill/>
-        </p:spPr>
-        <p:txBody>
-          <a:bodyPr wrap="square" anchor="ctr">
-            <a:spAutoFit/>
-          </a:bodyPr>
-          <a:lstStyle/>
-          <a:p>
-            <a:pPr algn="r"/>
-            <a:r>
-              <a:rPr sz="4400" b="1" i="0">
-                <a:solidFill>
-                  <a:srgbClr val="0A4D8C"/>
-                </a:solidFill>
-                <a:latin typeface="Calibri"/>
-              </a:rPr>
-              <a:t>4</a:t>
-            </a:r>
-          </a:p>
-        </p:txBody>
-      </p:sp>
-      <p:sp>
-        <p:nvSpPr>
-          <p:cNvPr id="5" name="TextBox 4"/>
-          <p:cNvSpPr txBox="1"/>
-          <p:nvPr/>
-        </p:nvSpPr>
-        <p:spPr>
-          <a:xfrm>
-            <a:off x="548640" y="1188720"/>
-            <a:ext cx="5486400" cy="457200"/>
-          </a:xfrm>
-          <a:prstGeom prst="rect">
-            <a:avLst/>
-          </a:prstGeom>
-          <a:noFill/>
-        </p:spPr>
-        <p:txBody>
-          <a:bodyPr wrap="square" anchor="t">
-            <a:spAutoFit/>
-          </a:bodyPr>
-          <a:lstStyle/>
-          <a:p>
-            <a:pPr algn="l"/>
-            <a:r>
-              <a:rPr sz="1900" b="1" i="0">
-                <a:solidFill>
-                  <a:srgbClr val="CC0000"/>
-                </a:solidFill>
-                <a:latin typeface="Calibri"/>
-              </a:rPr>
-              <a:t>1 · Zero look-ahead, by construction</a:t>
-            </a:r>
-          </a:p>
-        </p:txBody>
-      </p:sp>
-      <p:sp>
-        <p:nvSpPr>
-          <p:cNvPr id="6" name="TextBox 5"/>
-          <p:cNvSpPr txBox="1"/>
-          <p:nvPr/>
-        </p:nvSpPr>
-        <p:spPr>
-          <a:xfrm>
-            <a:off x="548640" y="1691640"/>
-            <a:ext cx="5486400" cy="2103120"/>
-          </a:xfrm>
-          <a:prstGeom prst="rect">
-            <a:avLst/>
-          </a:prstGeom>
-          <a:noFill/>
-        </p:spPr>
-        <p:txBody>
-          <a:bodyPr wrap="square">
-            <a:spAutoFit/>
-          </a:bodyPr>
-          <a:lstStyle/>
-          <a:p>
-            <a:pPr>
-              <a:spcAft>
-                <a:spcPts val="800"/>
-              </a:spcAft>
-            </a:pPr>
-            <a:r>
-              <a:rPr sz="1500">
-                <a:solidFill>
-                  <a:srgbClr val="1E293B"/>
-                </a:solidFill>
-                <a:latin typeface="Calibri"/>
-              </a:rPr>
-              <a:t>▪  Signal generated at day t close</a:t>
-            </a:r>
-          </a:p>
-          <a:p>
-            <a:pPr>
-              <a:spcAft>
-                <a:spcPts val="800"/>
-              </a:spcAft>
-            </a:pPr>
-            <a:r>
-              <a:rPr sz="1500">
-                <a:solidFill>
-                  <a:srgbClr val="1E293B"/>
-                </a:solidFill>
-                <a:latin typeface="Calibri"/>
-              </a:rPr>
-              <a:t>▪  Order queued, filled at day t+1 open</a:t>
-            </a:r>
-          </a:p>
-          <a:p>
-            <a:pPr>
-              <a:spcAft>
-                <a:spcPts val="800"/>
-              </a:spcAft>
-            </a:pPr>
-            <a:r>
-              <a:rPr sz="1500">
-                <a:solidFill>
-                  <a:srgbClr val="1E293B"/>
-                </a:solidFill>
-                <a:latin typeface="Calibri"/>
-              </a:rPr>
-              <a:t>▪  Limit orders: pessimistic trade-through only</a:t>
-            </a:r>
-          </a:p>
-          <a:p>
-            <a:pPr>
-              <a:spcAft>
-                <a:spcPts val="800"/>
-              </a:spcAft>
-            </a:pPr>
-            <a:r>
-              <a:rPr sz="1500">
-                <a:solidFill>
-                  <a:srgbClr val="1E293B"/>
-                </a:solidFill>
-                <a:latin typeface="Calibri"/>
-              </a:rPr>
-              <a:t>▪  Future data cannot enter a signal</a:t>
-            </a:r>
-          </a:p>
-        </p:txBody>
-      </p:sp>
-      <p:sp>
-        <p:nvSpPr>
-          <p:cNvPr id="7" name="TextBox 6"/>
-          <p:cNvSpPr txBox="1"/>
-          <p:nvPr/>
-        </p:nvSpPr>
-        <p:spPr>
-          <a:xfrm>
-            <a:off x="6309360" y="1188720"/>
-            <a:ext cx="5486400" cy="457200"/>
-          </a:xfrm>
-          <a:prstGeom prst="rect">
-            <a:avLst/>
-          </a:prstGeom>
-          <a:noFill/>
-        </p:spPr>
-        <p:txBody>
-          <a:bodyPr wrap="square" anchor="t">
-            <a:spAutoFit/>
-          </a:bodyPr>
-          <a:lstStyle/>
-          <a:p>
-            <a:pPr algn="l"/>
-            <a:r>
-              <a:rPr sz="1900" b="1" i="0">
-                <a:solidFill>
-                  <a:srgbClr val="CC0000"/>
-                </a:solidFill>
-                <a:latin typeface="Calibri"/>
-              </a:rPr>
-              <a:t>2 · The full Indian statutory stack</a:t>
-            </a:r>
-          </a:p>
-        </p:txBody>
-      </p:sp>
-      <p:sp>
-        <p:nvSpPr>
-          <p:cNvPr id="8" name="TextBox 7"/>
-          <p:cNvSpPr txBox="1"/>
-          <p:nvPr/>
-        </p:nvSpPr>
-        <p:spPr>
-          <a:xfrm>
-            <a:off x="6309360" y="1691640"/>
-            <a:ext cx="5486400" cy="2194560"/>
-          </a:xfrm>
-          <a:prstGeom prst="rect">
-            <a:avLst/>
-          </a:prstGeom>
-          <a:noFill/>
-        </p:spPr>
-        <p:txBody>
-          <a:bodyPr wrap="square">
-            <a:spAutoFit/>
-          </a:bodyPr>
-          <a:lstStyle/>
-          <a:p>
-            <a:pPr>
-              <a:spcAft>
-                <a:spcPts val="800"/>
-              </a:spcAft>
-            </a:pPr>
-            <a:r>
-              <a:rPr sz="1500">
-                <a:solidFill>
-                  <a:srgbClr val="1E293B"/>
-                </a:solidFill>
-                <a:latin typeface="Calibri"/>
-              </a:rPr>
-              <a:t>▪  STT 0.10% on both legs</a:t>
-            </a:r>
-          </a:p>
-          <a:p>
-            <a:pPr>
-              <a:spcAft>
-                <a:spcPts val="800"/>
-              </a:spcAft>
-            </a:pPr>
-            <a:r>
-              <a:rPr sz="1500">
-                <a:solidFill>
-                  <a:srgbClr val="1E293B"/>
-                </a:solidFill>
-                <a:latin typeface="Calibri"/>
-              </a:rPr>
-              <a:t>▪  Stamp duty 0.015% — buy leg only</a:t>
-            </a:r>
-          </a:p>
-          <a:p>
-            <a:pPr>
-              <a:spcAft>
-                <a:spcPts val="800"/>
-              </a:spcAft>
-            </a:pPr>
-            <a:r>
-              <a:rPr sz="1500">
-                <a:solidFill>
-                  <a:srgbClr val="1E293B"/>
-                </a:solidFill>
-                <a:latin typeface="Calibri"/>
-              </a:rPr>
-              <a:t>▪  NSE turnover 0.00297% + SEBI 0.0001%</a:t>
-            </a:r>
-          </a:p>
-          <a:p>
-            <a:pPr>
-              <a:spcAft>
-                <a:spcPts val="800"/>
-              </a:spcAft>
-            </a:pPr>
-            <a:r>
-              <a:rPr sz="1500">
-                <a:solidFill>
-                  <a:srgbClr val="1E293B"/>
-                </a:solidFill>
-                <a:latin typeface="Calibri"/>
-              </a:rPr>
-              <a:t>▪  GST 18% on brokerage + turnover</a:t>
-            </a:r>
-          </a:p>
-          <a:p>
-            <a:pPr>
-              <a:spcAft>
-                <a:spcPts val="800"/>
-              </a:spcAft>
-            </a:pPr>
-            <a:r>
-              <a:rPr sz="1500">
-                <a:solidFill>
-                  <a:srgbClr val="1E293B"/>
-                </a:solidFill>
-                <a:latin typeface="Calibri"/>
-              </a:rPr>
-              <a:t>▪  Almgren–Chriss √-law impact on size</a:t>
-            </a:r>
-          </a:p>
-        </p:txBody>
-      </p:sp>
-      <p:sp>
-        <p:nvSpPr>
-          <p:cNvPr id="9" name="TextBox 8"/>
-          <p:cNvSpPr txBox="1"/>
-          <p:nvPr/>
-        </p:nvSpPr>
-        <p:spPr>
-          <a:xfrm>
-            <a:off x="548640" y="3931920"/>
-            <a:ext cx="11094415" cy="457200"/>
-          </a:xfrm>
-          <a:prstGeom prst="rect">
-            <a:avLst/>
-          </a:prstGeom>
-          <a:noFill/>
-        </p:spPr>
-        <p:txBody>
-          <a:bodyPr wrap="square" anchor="t">
-            <a:spAutoFit/>
-          </a:bodyPr>
-          <a:lstStyle/>
-          <a:p>
-            <a:pPr algn="l"/>
-            <a:r>
-              <a:rPr sz="1900" b="1" i="0">
-                <a:solidFill>
-                  <a:srgbClr val="CC0000"/>
-                </a:solidFill>
-                <a:latin typeface="Calibri"/>
-              </a:rPr>
-              <a:t>3 · Overfitting is measured, not assumed away</a:t>
-            </a:r>
-          </a:p>
-        </p:txBody>
-      </p:sp>
-      <p:sp>
-        <p:nvSpPr>
-          <p:cNvPr id="10" name="TextBox 9"/>
-          <p:cNvSpPr txBox="1"/>
-          <p:nvPr/>
-        </p:nvSpPr>
-        <p:spPr>
-          <a:xfrm>
-            <a:off x="548640" y="4434840"/>
-            <a:ext cx="11094415" cy="1463040"/>
-          </a:xfrm>
-          <a:prstGeom prst="rect">
-            <a:avLst/>
-          </a:prstGeom>
-          <a:noFill/>
-        </p:spPr>
-        <p:txBody>
-          <a:bodyPr wrap="square">
-            <a:spAutoFit/>
-          </a:bodyPr>
-          <a:lstStyle/>
-          <a:p>
-            <a:pPr>
-              <a:spcAft>
-                <a:spcPts val="800"/>
-              </a:spcAft>
-            </a:pPr>
-            <a:r>
-              <a:rPr sz="1500" b="0">
-                <a:solidFill>
-                  <a:srgbClr val="1E293B"/>
-                </a:solidFill>
-                <a:latin typeface="Calibri"/>
-              </a:rPr>
-              <a:t>Deflated Sharpe Ratio — the expected maximum Sharpe across N trials, so a fished-for result is penalised</a:t>
-            </a:r>
-          </a:p>
-          <a:p>
-            <a:pPr>
-              <a:spcAft>
-                <a:spcPts val="800"/>
-              </a:spcAft>
-            </a:pPr>
-            <a:r>
-              <a:rPr sz="1500" b="0">
-                <a:solidFill>
-                  <a:srgbClr val="1E293B"/>
-                </a:solidFill>
-                <a:latin typeface="Calibri"/>
-              </a:rPr>
-              <a:t>Combinatorial Purged Cross-Validation with embargo, validated against an AR(1) ground truth where the leakage answer is known</a:t>
-            </a:r>
-          </a:p>
-        </p:txBody>
-      </p:sp>
-      <p:sp>
-        <p:nvSpPr>
-          <p:cNvPr id="11" name="Rectangle 10"/>
+          <p:cNvPr id="6" name="Rectangle 5"/>
           <p:cNvSpPr/>
           <p:nvPr/>
         </p:nvSpPr>
         <p:spPr>
           <a:xfrm>
-            <a:off x="0" y="6400800"/>
-            <a:ext cx="12191695" cy="457200"/>
+            <a:off x="731520" y="1554480"/>
+            <a:ext cx="10728655" cy="749808"/>
           </a:xfrm>
           <a:prstGeom prst="rect">
             <a:avLst/>
           </a:prstGeom>
           <a:solidFill>
-            <a:srgbClr val="003366"/>
+            <a:srgbClr val="FFFFFF"/>
           </a:solidFill>
-          <a:ln>
-            <a:noFill/>
+          <a:ln w="12700">
+            <a:solidFill>
+              <a:srgbClr val="E2E8F0"/>
+            </a:solidFill>
           </a:ln>
+          <a:effectLst/>
         </p:spPr>
         <p:style>
           <a:lnRef idx="1">
@@ -5502,10 +5754,339 @@
           </a:fontRef>
         </p:style>
         <p:txBody>
-          <a:bodyPr rtlCol="0" anchor="ctr"/>
+          <a:bodyPr rtlCol="0" anchor="ctr" wrap="square" lIns="274320"/>
           <a:lstStyle/>
           <a:p>
             <a:pPr algn="ctr"/>
+            <a:r>
+              <a:rPr sz="1300" b="1">
+                <a:solidFill>
+                  <a:srgbClr val="132A52"/>
+                </a:solidFill>
+                <a:latin typeface="Trebuchet MS"/>
+              </a:rPr>
+              <a:t>Layer 5 / Presentation Layer  —  </a:t>
+            </a:r>
+            <a:r>
+              <a:rPr sz="1100">
+                <a:solidFill>
+                  <a:srgbClr val="64748B"/>
+                </a:solidFill>
+                <a:latin typeface="Georgia"/>
+              </a:rPr>
+              <a:t>Next.js 15 UI + Tauri Desktop Binary + Streamlit Fallback + CLI Interface</a:t>
+            </a:r>
+          </a:p>
+        </p:txBody>
+      </p:sp>
+      <p:sp>
+        <p:nvSpPr>
+          <p:cNvPr id="7" name="Rectangle 6"/>
+          <p:cNvSpPr/>
+          <p:nvPr/>
+        </p:nvSpPr>
+        <p:spPr>
+          <a:xfrm>
+            <a:off x="731520" y="2423160"/>
+            <a:ext cx="10728655" cy="749808"/>
+          </a:xfrm>
+          <a:prstGeom prst="rect">
+            <a:avLst/>
+          </a:prstGeom>
+          <a:solidFill>
+            <a:srgbClr val="FFFFFF"/>
+          </a:solidFill>
+          <a:ln w="12700">
+            <a:solidFill>
+              <a:srgbClr val="E2E8F0"/>
+            </a:solidFill>
+          </a:ln>
+          <a:effectLst/>
+        </p:spPr>
+        <p:style>
+          <a:lnRef idx="1">
+            <a:schemeClr val="accent1"/>
+          </a:lnRef>
+          <a:fillRef idx="3">
+            <a:schemeClr val="accent1"/>
+          </a:fillRef>
+          <a:effectRef idx="2">
+            <a:schemeClr val="accent1"/>
+          </a:effectRef>
+          <a:fontRef idx="minor">
+            <a:schemeClr val="lt1"/>
+          </a:fontRef>
+        </p:style>
+        <p:txBody>
+          <a:bodyPr rtlCol="0" anchor="ctr" wrap="square" lIns="274320"/>
+          <a:lstStyle/>
+          <a:p>
+            <a:pPr algn="ctr"/>
+            <a:r>
+              <a:rPr sz="1300" b="1">
+                <a:solidFill>
+                  <a:srgbClr val="132A52"/>
+                </a:solidFill>
+                <a:latin typeface="Trebuchet MS"/>
+              </a:rPr>
+              <a:t>Layer 4 / Service &amp; API Layer  —  </a:t>
+            </a:r>
+            <a:r>
+              <a:rPr sz="1100">
+                <a:solidFill>
+                  <a:srgbClr val="64748B"/>
+                </a:solidFill>
+                <a:latin typeface="Georgia"/>
+              </a:rPr>
+              <a:t>FastAPI REST Endpoints: /api/v1/backtest/run, /api/v1/strategies, /api/v1/datasets</a:t>
+            </a:r>
+          </a:p>
+        </p:txBody>
+      </p:sp>
+      <p:sp>
+        <p:nvSpPr>
+          <p:cNvPr id="8" name="Rectangle 7"/>
+          <p:cNvSpPr/>
+          <p:nvPr/>
+        </p:nvSpPr>
+        <p:spPr>
+          <a:xfrm>
+            <a:off x="731520" y="3291839"/>
+            <a:ext cx="10728655" cy="749808"/>
+          </a:xfrm>
+          <a:prstGeom prst="rect">
+            <a:avLst/>
+          </a:prstGeom>
+          <a:solidFill>
+            <a:srgbClr val="FFFFFF"/>
+          </a:solidFill>
+          <a:ln w="12700">
+            <a:solidFill>
+              <a:srgbClr val="E2E8F0"/>
+            </a:solidFill>
+          </a:ln>
+          <a:effectLst/>
+        </p:spPr>
+        <p:style>
+          <a:lnRef idx="1">
+            <a:schemeClr val="accent1"/>
+          </a:lnRef>
+          <a:fillRef idx="3">
+            <a:schemeClr val="accent1"/>
+          </a:fillRef>
+          <a:effectRef idx="2">
+            <a:schemeClr val="accent1"/>
+          </a:effectRef>
+          <a:fontRef idx="minor">
+            <a:schemeClr val="lt1"/>
+          </a:fontRef>
+        </p:style>
+        <p:txBody>
+          <a:bodyPr rtlCol="0" anchor="ctr" wrap="square" lIns="274320"/>
+          <a:lstStyle/>
+          <a:p>
+            <a:pPr algn="ctr"/>
+            <a:r>
+              <a:rPr sz="1300" b="1">
+                <a:solidFill>
+                  <a:srgbClr val="132A52"/>
+                </a:solidFill>
+                <a:latin typeface="Trebuchet MS"/>
+              </a:rPr>
+              <a:t>Layer 3 / Analytics &amp; Validation  —  </a:t>
+            </a:r>
+            <a:r>
+              <a:rPr sz="1100">
+                <a:solidFill>
+                  <a:srgbClr val="64748B"/>
+                </a:solidFill>
+                <a:latin typeface="Georgia"/>
+              </a:rPr>
+              <a:t>Marcos López de Prado DSR, PSR, Combinatorial Purged Cross-Validation (CPCV) with Embargo</a:t>
+            </a:r>
+          </a:p>
+        </p:txBody>
+      </p:sp>
+      <p:sp>
+        <p:nvSpPr>
+          <p:cNvPr id="9" name="Rectangle 8"/>
+          <p:cNvSpPr/>
+          <p:nvPr/>
+        </p:nvSpPr>
+        <p:spPr>
+          <a:xfrm>
+            <a:off x="731520" y="4160520"/>
+            <a:ext cx="10728655" cy="749808"/>
+          </a:xfrm>
+          <a:prstGeom prst="rect">
+            <a:avLst/>
+          </a:prstGeom>
+          <a:solidFill>
+            <a:srgbClr val="0F172A"/>
+          </a:solidFill>
+          <a:ln w="19050">
+            <a:solidFill>
+              <a:srgbClr val="132A52"/>
+            </a:solidFill>
+          </a:ln>
+          <a:effectLst/>
+        </p:spPr>
+        <p:style>
+          <a:lnRef idx="1">
+            <a:schemeClr val="accent1"/>
+          </a:lnRef>
+          <a:fillRef idx="3">
+            <a:schemeClr val="accent1"/>
+          </a:fillRef>
+          <a:effectRef idx="2">
+            <a:schemeClr val="accent1"/>
+          </a:effectRef>
+          <a:fontRef idx="minor">
+            <a:schemeClr val="lt1"/>
+          </a:fontRef>
+        </p:style>
+        <p:txBody>
+          <a:bodyPr rtlCol="0" anchor="ctr" wrap="square" lIns="274320"/>
+          <a:lstStyle/>
+          <a:p>
+            <a:pPr algn="ctr"/>
+            <a:r>
+              <a:rPr sz="1300" b="1">
+                <a:solidFill>
+                  <a:srgbClr val="38BDF8"/>
+                </a:solidFill>
+                <a:latin typeface="Trebuchet MS"/>
+              </a:rPr>
+              <a:t>Layer 2 / Core Execution Engine  [GTU Contribution]  —  </a:t>
+            </a:r>
+            <a:r>
+              <a:rPr sz="1100">
+                <a:solidFill>
+                  <a:srgbClr val="F8FAFC"/>
+                </a:solidFill>
+                <a:latin typeface="Georgia"/>
+              </a:rPr>
+              <a:t>BacktestEngine, Portfolio State, Position Ledger, IndianCostModel (Zero-Lookahead Invariant)</a:t>
+            </a:r>
+          </a:p>
+        </p:txBody>
+      </p:sp>
+      <p:sp>
+        <p:nvSpPr>
+          <p:cNvPr id="10" name="Rectangle 9"/>
+          <p:cNvSpPr/>
+          <p:nvPr/>
+        </p:nvSpPr>
+        <p:spPr>
+          <a:xfrm>
+            <a:off x="731520" y="5029200"/>
+            <a:ext cx="10728655" cy="749808"/>
+          </a:xfrm>
+          <a:prstGeom prst="rect">
+            <a:avLst/>
+          </a:prstGeom>
+          <a:solidFill>
+            <a:srgbClr val="FFFFFF"/>
+          </a:solidFill>
+          <a:ln w="12700">
+            <a:solidFill>
+              <a:srgbClr val="E2E8F0"/>
+            </a:solidFill>
+          </a:ln>
+          <a:effectLst/>
+        </p:spPr>
+        <p:style>
+          <a:lnRef idx="1">
+            <a:schemeClr val="accent1"/>
+          </a:lnRef>
+          <a:fillRef idx="3">
+            <a:schemeClr val="accent1"/>
+          </a:fillRef>
+          <a:effectRef idx="2">
+            <a:schemeClr val="accent1"/>
+          </a:effectRef>
+          <a:fontRef idx="minor">
+            <a:schemeClr val="lt1"/>
+          </a:fontRef>
+        </p:style>
+        <p:txBody>
+          <a:bodyPr rtlCol="0" anchor="ctr" wrap="square" lIns="274320"/>
+          <a:lstStyle/>
+          <a:p>
+            <a:pPr algn="ctr"/>
+            <a:r>
+              <a:rPr sz="1300" b="1">
+                <a:solidFill>
+                  <a:srgbClr val="132A52"/>
+                </a:solidFill>
+                <a:latin typeface="Trebuchet MS"/>
+              </a:rPr>
+              <a:t>Layer 1 / Data Pipeline &amp; Universe  —  </a:t>
+            </a:r>
+            <a:r>
+              <a:rPr sz="1100">
+                <a:solidFill>
+                  <a:srgbClr val="64748B"/>
+                </a:solidFill>
+                <a:latin typeface="Georgia"/>
+              </a:rPr>
+              <a:t>Parquet / SQLite Local Cache, NIFTY-50 Universe, Historical Date Alignment</a:t>
+            </a:r>
+          </a:p>
+        </p:txBody>
+      </p:sp>
+      <p:sp>
+        <p:nvSpPr>
+          <p:cNvPr id="11" name="Rectangle 10"/>
+          <p:cNvSpPr/>
+          <p:nvPr/>
+        </p:nvSpPr>
+        <p:spPr>
+          <a:xfrm>
+            <a:off x="731520" y="5989320"/>
+            <a:ext cx="10728655" cy="411480"/>
+          </a:xfrm>
+          <a:prstGeom prst="rect">
+            <a:avLst/>
+          </a:prstGeom>
+          <a:solidFill>
+            <a:srgbClr val="F8FAFC"/>
+          </a:solidFill>
+          <a:ln>
+            <a:solidFill>
+              <a:srgbClr val="E2E8F0"/>
+            </a:solidFill>
+          </a:ln>
+          <a:effectLst/>
+        </p:spPr>
+        <p:style>
+          <a:lnRef idx="1">
+            <a:schemeClr val="accent1"/>
+          </a:lnRef>
+          <a:fillRef idx="3">
+            <a:schemeClr val="accent1"/>
+          </a:fillRef>
+          <a:effectRef idx="2">
+            <a:schemeClr val="accent1"/>
+          </a:effectRef>
+          <a:fontRef idx="minor">
+            <a:schemeClr val="lt1"/>
+          </a:fontRef>
+        </p:style>
+        <p:txBody>
+          <a:bodyPr rtlCol="0" anchor="ctr" lIns="0"/>
+          <a:lstStyle/>
+          <a:p>
+            <a:pPr algn="ctr"/>
+            <a:r>
+              <a:rPr sz="950">
+                <a:solidFill>
+                  <a:srgbClr val="64748B"/>
+                </a:solidFill>
+                <a:latin typeface="Consolas"/>
+              </a:rPr>
+              <a:t>Architectural Invariant: Engine operates headless without UI dependencies. Same parameter payload -&gt; byte-identical SHA-256 run hash.</a:t>
+            </a:r>
           </a:p>
         </p:txBody>
       </p:sp>
@@ -5517,8 +6098,8 @@
         </p:nvSpPr>
         <p:spPr>
           <a:xfrm>
-            <a:off x="365760" y="6455664"/>
-            <a:ext cx="10058400" cy="365760"/>
+            <a:off x="731520" y="6446520"/>
+            <a:ext cx="10728655" cy="274320"/>
           </a:xfrm>
           <a:prstGeom prst="rect">
             <a:avLst/>
@@ -5526,20 +6107,19 @@
           <a:noFill/>
         </p:spPr>
         <p:txBody>
-          <a:bodyPr wrap="square" anchor="ctr">
+          <a:bodyPr wrap="none" lIns="0" tIns="0" rIns="0" bIns="0">
             <a:spAutoFit/>
           </a:bodyPr>
           <a:lstStyle/>
           <a:p>
-            <a:pPr algn="l"/>
-            <a:r>
-              <a:rPr sz="1000" b="0" i="0">
-                <a:solidFill>
-                  <a:srgbClr val="FFFFFF"/>
-                </a:solidFill>
-                <a:latin typeface="Calibri"/>
-              </a:rPr>
-              <a:t>GTU DI05000341 · Pramaan</a:t>
+            <a:r>
+              <a:rPr sz="900">
+                <a:solidFill>
+                  <a:srgbClr val="64748B"/>
+                </a:solidFill>
+                <a:latin typeface="Consolas"/>
+              </a:rPr>
+              <a:t>GTU DI05000341 Minor Project | Pramaan Architecture &amp; Verification</a:t>
             </a:r>
           </a:p>
         </p:txBody>
@@ -5558,7 +6138,7 @@
     <p:bg>
       <p:bgPr>
         <a:solidFill>
-          <a:srgbClr val="FFFFFF"/>
+          <a:srgbClr val="F8FAFC"/>
         </a:solidFill>
         <a:effectLst/>
       </p:bgPr>
@@ -5572,20 +6152,123 @@
       <p:grpSpPr/>
       <p:sp>
         <p:nvSpPr>
-          <p:cNvPr id="2" name="Rectangle 1"/>
+          <p:cNvPr id="2" name="TextBox 1"/>
+          <p:cNvSpPr txBox="1"/>
+          <p:nvPr/>
+        </p:nvSpPr>
+        <p:spPr>
+          <a:xfrm>
+            <a:off x="731520" y="411480"/>
+            <a:ext cx="7772400" cy="274320"/>
+          </a:xfrm>
+          <a:prstGeom prst="rect">
+            <a:avLst/>
+          </a:prstGeom>
+          <a:noFill/>
+        </p:spPr>
+        <p:txBody>
+          <a:bodyPr wrap="square" lIns="0" tIns="0" rIns="0" bIns="0">
+            <a:spAutoFit/>
+          </a:bodyPr>
+          <a:lstStyle/>
+          <a:p>
+            <a:r>
+              <a:rPr sz="950" b="1">
+                <a:solidFill>
+                  <a:srgbClr val="64748B"/>
+                </a:solidFill>
+                <a:latin typeface="Consolas"/>
+              </a:rPr>
+              <a:t>UNIT 3: EMPIRICAL FINDINGS</a:t>
+            </a:r>
+          </a:p>
+        </p:txBody>
+      </p:sp>
+      <p:sp>
+        <p:nvSpPr>
+          <p:cNvPr id="3" name="TextBox 2"/>
+          <p:cNvSpPr txBox="1"/>
+          <p:nvPr/>
+        </p:nvSpPr>
+        <p:spPr>
+          <a:xfrm>
+            <a:off x="731520" y="685800"/>
+            <a:ext cx="9144000" cy="594360"/>
+          </a:xfrm>
+          <a:prstGeom prst="rect">
+            <a:avLst/>
+          </a:prstGeom>
+          <a:noFill/>
+        </p:spPr>
+        <p:txBody>
+          <a:bodyPr wrap="square" lIns="0" tIns="0" rIns="0" bIns="0">
+            <a:spAutoFit/>
+          </a:bodyPr>
+          <a:lstStyle/>
+          <a:p>
+            <a:r>
+              <a:rPr sz="2200" b="1">
+                <a:solidFill>
+                  <a:srgbClr val="132A52"/>
+                </a:solidFill>
+                <a:latin typeface="Trebuchet MS"/>
+              </a:rPr>
+              <a:t>Empirical Results: 10 NSE Symbols, 2019–2024</a:t>
+            </a:r>
+          </a:p>
+        </p:txBody>
+      </p:sp>
+      <p:sp>
+        <p:nvSpPr>
+          <p:cNvPr id="4" name="TextBox 3"/>
+          <p:cNvSpPr txBox="1"/>
+          <p:nvPr/>
+        </p:nvSpPr>
+        <p:spPr>
+          <a:xfrm>
+            <a:off x="10058400" y="411480"/>
+            <a:ext cx="1371600" cy="365760"/>
+          </a:xfrm>
+          <a:prstGeom prst="rect">
+            <a:avLst/>
+          </a:prstGeom>
+          <a:noFill/>
+        </p:spPr>
+        <p:txBody>
+          <a:bodyPr wrap="none" lIns="0" tIns="0" rIns="0" bIns="0">
+            <a:spAutoFit/>
+          </a:bodyPr>
+          <a:lstStyle/>
+          <a:p>
+            <a:pPr algn="r"/>
+            <a:r>
+              <a:rPr sz="1100" b="1">
+                <a:solidFill>
+                  <a:srgbClr val="64748B"/>
+                </a:solidFill>
+                <a:latin typeface="Consolas"/>
+              </a:rPr>
+              <a:t>05 / 10</a:t>
+            </a:r>
+          </a:p>
+        </p:txBody>
+      </p:sp>
+      <p:sp>
+        <p:nvSpPr>
+          <p:cNvPr id="5" name="Rectangle 4"/>
           <p:cNvSpPr/>
           <p:nvPr/>
         </p:nvSpPr>
         <p:spPr>
           <a:xfrm>
-            <a:off x="0" y="0"/>
-            <a:ext cx="12191695" cy="914400"/>
+            <a:off x="731520" y="1280160"/>
+            <a:ext cx="10728655" cy="13716"/>
           </a:xfrm>
           <a:prstGeom prst="rect">
             <a:avLst/>
           </a:prstGeom>
           <a:solidFill>
-            <a:srgbClr val="003366"/>
+            <a:srgbClr val="E2E8F0"/>
           </a:solidFill>
           <a:ln>
             <a:noFill/>
@@ -5613,87 +6296,17 @@
           </a:p>
         </p:txBody>
       </p:sp>
-      <p:sp>
-        <p:nvSpPr>
-          <p:cNvPr id="3" name="TextBox 2"/>
-          <p:cNvSpPr txBox="1"/>
-          <p:nvPr/>
-        </p:nvSpPr>
-        <p:spPr>
-          <a:xfrm>
-            <a:off x="457200" y="146304"/>
-            <a:ext cx="9601200" cy="640080"/>
-          </a:xfrm>
-          <a:prstGeom prst="rect">
-            <a:avLst/>
-          </a:prstGeom>
-          <a:noFill/>
-        </p:spPr>
-        <p:txBody>
-          <a:bodyPr wrap="square" anchor="ctr">
-            <a:spAutoFit/>
-          </a:bodyPr>
-          <a:lstStyle/>
-          <a:p>
-            <a:pPr algn="l"/>
-            <a:r>
-              <a:rPr sz="3000" b="1" i="0">
-                <a:solidFill>
-                  <a:srgbClr val="FFFFFF"/>
-                </a:solidFill>
-                <a:latin typeface="Calibri"/>
-              </a:rPr>
-              <a:t>Real Results — 10 NSE Symbols, 2019–2024</a:t>
-            </a:r>
-          </a:p>
-        </p:txBody>
-      </p:sp>
-      <p:sp>
-        <p:nvSpPr>
-          <p:cNvPr id="4" name="TextBox 3"/>
-          <p:cNvSpPr txBox="1"/>
-          <p:nvPr/>
-        </p:nvSpPr>
-        <p:spPr>
-          <a:xfrm>
-            <a:off x="11140135" y="146304"/>
-            <a:ext cx="685800" cy="640080"/>
-          </a:xfrm>
-          <a:prstGeom prst="rect">
-            <a:avLst/>
-          </a:prstGeom>
-          <a:noFill/>
-        </p:spPr>
-        <p:txBody>
-          <a:bodyPr wrap="square" anchor="ctr">
-            <a:spAutoFit/>
-          </a:bodyPr>
-          <a:lstStyle/>
-          <a:p>
-            <a:pPr algn="r"/>
-            <a:r>
-              <a:rPr sz="4400" b="1" i="0">
-                <a:solidFill>
-                  <a:srgbClr val="0A4D8C"/>
-                </a:solidFill>
-                <a:latin typeface="Calibri"/>
-              </a:rPr>
-              <a:t>5</a:t>
-            </a:r>
-          </a:p>
-        </p:txBody>
-      </p:sp>
       <p:graphicFrame>
         <p:nvGraphicFramePr>
-          <p:cNvPr id="5" name="Table 4"/>
+          <p:cNvPr id="6" name="Table 5"/>
           <p:cNvGraphicFramePr>
             <a:graphicFrameLocks noGrp="1"/>
           </p:cNvGraphicFramePr>
           <p:nvPr/>
         </p:nvGraphicFramePr>
         <p:xfrm>
-          <a:off x="1051560" y="1325880"/>
-          <a:ext cx="10058400" cy="3108960"/>
+          <a:off x="731520" y="1554480"/>
+          <a:ext cx="10728655" cy="2926080"/>
         </p:xfrm>
         <a:graphic>
           <a:graphicData uri="http://schemas.openxmlformats.org/drawingml/2006/table">
@@ -5702,33 +6315,33 @@
                 <a:tableStyleId>{5C22544A-7EE6-4342-B048-85BDC9FD1C3A}</a:tableStyleId>
               </a:tblPr>
               <a:tblGrid>
-                <a:gridCol w="2743200"/>
+                <a:gridCol w="3413455"/>
                 <a:gridCol w="1828800"/>
                 <a:gridCol w="1828800"/>
                 <a:gridCol w="1828800"/>
                 <a:gridCol w="1828800"/>
               </a:tblGrid>
-              <a:tr h="518160">
+              <a:tr h="487680">
                 <a:tc>
                   <a:txBody>
                     <a:bodyPr/>
                     <a:lstStyle/>
                     <a:p>
-                      <a:pPr algn="ctr"/>
+                      <a:pPr algn="l"/>
                       <a:r>
-                        <a:rPr sz="1500" b="1">
+                        <a:rPr sz="1100" b="1">
                           <a:solidFill>
-                            <a:srgbClr val="FFFFFF"/>
+                            <a:srgbClr val="F8FAFC"/>
                           </a:solidFill>
-                          <a:latin typeface="Calibri"/>
+                          <a:latin typeface="Trebuchet MS"/>
                         </a:rPr>
-                        <a:t>Strategy</a:t>
+                        <a:t>Strategy / Benchmark</a:t>
                       </a:r>
                     </a:p>
                   </a:txBody>
                   <a:tcPr>
                     <a:solidFill>
-                      <a:srgbClr val="003366"/>
+                      <a:srgbClr val="132A52"/>
                     </a:solidFill>
                   </a:tcPr>
                 </a:tc>
@@ -5739,19 +6352,19 @@
                     <a:p>
                       <a:pPr algn="ctr"/>
                       <a:r>
-                        <a:rPr sz="1500" b="1">
+                        <a:rPr sz="1100" b="1">
                           <a:solidFill>
-                            <a:srgbClr val="FFFFFF"/>
+                            <a:srgbClr val="F8FAFC"/>
                           </a:solidFill>
-                          <a:latin typeface="Calibri"/>
+                          <a:latin typeface="Trebuchet MS"/>
                         </a:rPr>
-                        <a:t>Sharpe</a:t>
+                        <a:t>Sharpe Ratio</a:t>
                       </a:r>
                     </a:p>
                   </a:txBody>
                   <a:tcPr>
                     <a:solidFill>
-                      <a:srgbClr val="003366"/>
+                      <a:srgbClr val="132A52"/>
                     </a:solidFill>
                   </a:tcPr>
                 </a:tc>
@@ -5762,19 +6375,19 @@
                     <a:p>
                       <a:pPr algn="ctr"/>
                       <a:r>
-                        <a:rPr sz="1500" b="1">
+                        <a:rPr sz="1100" b="1">
                           <a:solidFill>
-                            <a:srgbClr val="FFFFFF"/>
+                            <a:srgbClr val="F8FAFC"/>
                           </a:solidFill>
-                          <a:latin typeface="Calibri"/>
+                          <a:latin typeface="Trebuchet MS"/>
                         </a:rPr>
-                        <a:t>CAGR</a:t>
+                        <a:t>CAGR (%)</a:t>
                       </a:r>
                     </a:p>
                   </a:txBody>
                   <a:tcPr>
                     <a:solidFill>
-                      <a:srgbClr val="003366"/>
+                      <a:srgbClr val="132A52"/>
                     </a:solidFill>
                   </a:tcPr>
                 </a:tc>
@@ -5785,19 +6398,19 @@
                     <a:p>
                       <a:pPr algn="ctr"/>
                       <a:r>
-                        <a:rPr sz="1500" b="1">
+                        <a:rPr sz="1100" b="1">
                           <a:solidFill>
-                            <a:srgbClr val="FFFFFF"/>
+                            <a:srgbClr val="F8FAFC"/>
                           </a:solidFill>
-                          <a:latin typeface="Calibri"/>
+                          <a:latin typeface="Trebuchet MS"/>
                         </a:rPr>
-                        <a:t>Return</a:t>
+                        <a:t>Total Return (%)</a:t>
                       </a:r>
                     </a:p>
                   </a:txBody>
                   <a:tcPr>
                     <a:solidFill>
-                      <a:srgbClr val="003366"/>
+                      <a:srgbClr val="132A52"/>
                     </a:solidFill>
                   </a:tcPr>
                 </a:tc>
@@ -5808,24 +6421,24 @@
                     <a:p>
                       <a:pPr algn="ctr"/>
                       <a:r>
-                        <a:rPr sz="1500" b="1">
+                        <a:rPr sz="1100" b="1">
                           <a:solidFill>
-                            <a:srgbClr val="FFFFFF"/>
+                            <a:srgbClr val="F8FAFC"/>
                           </a:solidFill>
-                          <a:latin typeface="Calibri"/>
+                          <a:latin typeface="Trebuchet MS"/>
                         </a:rPr>
-                        <a:t>Max DD</a:t>
+                        <a:t>Max Drawdown (%)</a:t>
                       </a:r>
                     </a:p>
                   </a:txBody>
                   <a:tcPr>
                     <a:solidFill>
-                      <a:srgbClr val="003366"/>
+                      <a:srgbClr val="132A52"/>
                     </a:solidFill>
                   </a:tcPr>
                 </a:tc>
               </a:tr>
-              <a:tr h="518160">
+              <a:tr h="487680">
                 <a:tc>
                   <a:txBody>
                     <a:bodyPr/>
@@ -5833,13 +6446,13 @@
                     <a:p>
                       <a:pPr algn="l"/>
                       <a:r>
-                        <a:rPr sz="1400">
+                        <a:rPr sz="1100">
                           <a:solidFill>
-                            <a:srgbClr val="1E293B"/>
+                            <a:srgbClr val="0F172A"/>
                           </a:solidFill>
-                          <a:latin typeface="Calibri"/>
+                          <a:latin typeface="Georgia"/>
                         </a:rPr>
-                        <a:t>SMA(20,50)</a:t>
+                        <a:t>SMA Crossover (20, 50)</a:t>
                       </a:r>
                     </a:p>
                   </a:txBody>
@@ -5856,11 +6469,11 @@
                     <a:p>
                       <a:pPr algn="ctr"/>
                       <a:r>
-                        <a:rPr sz="1400">
+                        <a:rPr sz="1100">
                           <a:solidFill>
-                            <a:srgbClr val="1E293B"/>
+                            <a:srgbClr val="0F172A"/>
                           </a:solidFill>
-                          <a:latin typeface="Calibri"/>
+                          <a:latin typeface="Consolas"/>
                         </a:rPr>
                         <a:t>0.527</a:t>
                       </a:r>
@@ -5879,11 +6492,11 @@
                     <a:p>
                       <a:pPr algn="ctr"/>
                       <a:r>
-                        <a:rPr sz="1400">
+                        <a:rPr sz="1100">
                           <a:solidFill>
-                            <a:srgbClr val="1E293B"/>
+                            <a:srgbClr val="0F172A"/>
                           </a:solidFill>
-                          <a:latin typeface="Calibri"/>
+                          <a:latin typeface="Consolas"/>
                         </a:rPr>
                         <a:t>11.37%</a:t>
                       </a:r>
@@ -5902,11 +6515,11 @@
                     <a:p>
                       <a:pPr algn="ctr"/>
                       <a:r>
-                        <a:rPr sz="1400">
+                        <a:rPr sz="1100">
                           <a:solidFill>
-                            <a:srgbClr val="1E293B"/>
+                            <a:srgbClr val="0F172A"/>
                           </a:solidFill>
-                          <a:latin typeface="Calibri"/>
+                          <a:latin typeface="Consolas"/>
                         </a:rPr>
                         <a:t>88.2%</a:t>
                       </a:r>
@@ -5925,11 +6538,11 @@
                     <a:p>
                       <a:pPr algn="ctr"/>
                       <a:r>
-                        <a:rPr sz="1400">
+                        <a:rPr sz="1100">
                           <a:solidFill>
-                            <a:srgbClr val="1E293B"/>
+                            <a:srgbClr val="0F172A"/>
                           </a:solidFill>
-                          <a:latin typeface="Calibri"/>
+                          <a:latin typeface="Consolas"/>
                         </a:rPr>
                         <a:t>-14.8%</a:t>
                       </a:r>
@@ -5942,7 +6555,7 @@
                   </a:tcPr>
                 </a:tc>
               </a:tr>
-              <a:tr h="518160">
+              <a:tr h="487680">
                 <a:tc>
                   <a:txBody>
                     <a:bodyPr/>
@@ -5950,13 +6563,13 @@
                     <a:p>
                       <a:pPr algn="l"/>
                       <a:r>
-                        <a:rPr sz="1400">
+                        <a:rPr sz="1100">
                           <a:solidFill>
-                            <a:srgbClr val="1E293B"/>
+                            <a:srgbClr val="0F172A"/>
                           </a:solidFill>
-                          <a:latin typeface="Calibri"/>
+                          <a:latin typeface="Georgia"/>
                         </a:rPr>
-                        <a:t>SMA(10,30)</a:t>
+                        <a:t>SMA Crossover (10, 30)</a:t>
                       </a:r>
                     </a:p>
                   </a:txBody>
@@ -5973,11 +6586,11 @@
                     <a:p>
                       <a:pPr algn="ctr"/>
                       <a:r>
-                        <a:rPr sz="1400">
+                        <a:rPr sz="1100">
                           <a:solidFill>
-                            <a:srgbClr val="1E293B"/>
+                            <a:srgbClr val="0F172A"/>
                           </a:solidFill>
-                          <a:latin typeface="Calibri"/>
+                          <a:latin typeface="Consolas"/>
                         </a:rPr>
                         <a:t>0.685</a:t>
                       </a:r>
@@ -5996,11 +6609,11 @@
                     <a:p>
                       <a:pPr algn="ctr"/>
                       <a:r>
-                        <a:rPr sz="1400">
+                        <a:rPr sz="1100">
                           <a:solidFill>
-                            <a:srgbClr val="1E293B"/>
+                            <a:srgbClr val="0F172A"/>
                           </a:solidFill>
-                          <a:latin typeface="Calibri"/>
+                          <a:latin typeface="Consolas"/>
                         </a:rPr>
                         <a:t>13.25%</a:t>
                       </a:r>
@@ -6019,11 +6632,11 @@
                     <a:p>
                       <a:pPr algn="ctr"/>
                       <a:r>
-                        <a:rPr sz="1400">
+                        <a:rPr sz="1100">
                           <a:solidFill>
-                            <a:srgbClr val="1E293B"/>
+                            <a:srgbClr val="0F172A"/>
                           </a:solidFill>
-                          <a:latin typeface="Calibri"/>
+                          <a:latin typeface="Consolas"/>
                         </a:rPr>
                         <a:t>107.7%</a:t>
                       </a:r>
@@ -6042,11 +6655,11 @@
                     <a:p>
                       <a:pPr algn="ctr"/>
                       <a:r>
-                        <a:rPr sz="1400">
+                        <a:rPr sz="1100">
                           <a:solidFill>
-                            <a:srgbClr val="1E293B"/>
+                            <a:srgbClr val="0F172A"/>
                           </a:solidFill>
-                          <a:latin typeface="Calibri"/>
+                          <a:latin typeface="Consolas"/>
                         </a:rPr>
                         <a:t>-14.6%</a:t>
                       </a:r>
@@ -6059,7 +6672,7 @@
                   </a:tcPr>
                 </a:tc>
               </a:tr>
-              <a:tr h="518160">
+              <a:tr h="487680">
                 <a:tc>
                   <a:txBody>
                     <a:bodyPr/>
@@ -6067,13 +6680,13 @@
                     <a:p>
                       <a:pPr algn="l"/>
                       <a:r>
-                        <a:rPr sz="1400">
+                        <a:rPr sz="1100">
                           <a:solidFill>
-                            <a:srgbClr val="1E293B"/>
+                            <a:srgbClr val="0F172A"/>
                           </a:solidFill>
-                          <a:latin typeface="Calibri"/>
+                          <a:latin typeface="Georgia"/>
                         </a:rPr>
-                        <a:t>RSI(14,30,70)</a:t>
+                        <a:t>RSI Mean Reversion (14, 30, 70)</a:t>
                       </a:r>
                     </a:p>
                   </a:txBody>
@@ -6090,11 +6703,11 @@
                     <a:p>
                       <a:pPr algn="ctr"/>
                       <a:r>
-                        <a:rPr sz="1400">
+                        <a:rPr sz="1100">
                           <a:solidFill>
-                            <a:srgbClr val="1E293B"/>
+                            <a:srgbClr val="0F172A"/>
                           </a:solidFill>
-                          <a:latin typeface="Calibri"/>
+                          <a:latin typeface="Consolas"/>
                         </a:rPr>
                         <a:t>0.307</a:t>
                       </a:r>
@@ -6113,11 +6726,11 @@
                     <a:p>
                       <a:pPr algn="ctr"/>
                       <a:r>
-                        <a:rPr sz="1400">
+                        <a:rPr sz="1100">
                           <a:solidFill>
-                            <a:srgbClr val="1E293B"/>
+                            <a:srgbClr val="0F172A"/>
                           </a:solidFill>
-                          <a:latin typeface="Calibri"/>
+                          <a:latin typeface="Consolas"/>
                         </a:rPr>
                         <a:t>9.80%</a:t>
                       </a:r>
@@ -6136,11 +6749,11 @@
                     <a:p>
                       <a:pPr algn="ctr"/>
                       <a:r>
-                        <a:rPr sz="1400">
+                        <a:rPr sz="1100">
                           <a:solidFill>
-                            <a:srgbClr val="1E293B"/>
+                            <a:srgbClr val="0F172A"/>
                           </a:solidFill>
-                          <a:latin typeface="Calibri"/>
+                          <a:latin typeface="Consolas"/>
                         </a:rPr>
                         <a:t>73.1%</a:t>
                       </a:r>
@@ -6159,11 +6772,11 @@
                     <a:p>
                       <a:pPr algn="ctr"/>
                       <a:r>
-                        <a:rPr sz="1400">
+                        <a:rPr sz="1100">
                           <a:solidFill>
-                            <a:srgbClr val="1E293B"/>
+                            <a:srgbClr val="0F172A"/>
                           </a:solidFill>
-                          <a:latin typeface="Calibri"/>
+                          <a:latin typeface="Consolas"/>
                         </a:rPr>
                         <a:t>-32.8%</a:t>
                       </a:r>
@@ -6176,7 +6789,7 @@
                   </a:tcPr>
                 </a:tc>
               </a:tr>
-              <a:tr h="518160">
+              <a:tr h="487680">
                 <a:tc>
                   <a:txBody>
                     <a:bodyPr/>
@@ -6184,13 +6797,13 @@
                     <a:p>
                       <a:pPr algn="l"/>
                       <a:r>
-                        <a:rPr sz="1400">
+                        <a:rPr sz="1100">
                           <a:solidFill>
-                            <a:srgbClr val="1E293B"/>
+                            <a:srgbClr val="0F172A"/>
                           </a:solidFill>
-                          <a:latin typeface="Calibri"/>
+                          <a:latin typeface="Georgia"/>
                         </a:rPr>
-                        <a:t>Momentum(20)</a:t>
+                        <a:t>Momentum Lookback (20)</a:t>
                       </a:r>
                     </a:p>
                   </a:txBody>
@@ -6207,11 +6820,11 @@
                     <a:p>
                       <a:pPr algn="ctr"/>
                       <a:r>
-                        <a:rPr sz="1400">
+                        <a:rPr sz="1100">
                           <a:solidFill>
-                            <a:srgbClr val="1E293B"/>
+                            <a:srgbClr val="0F172A"/>
                           </a:solidFill>
-                          <a:latin typeface="Calibri"/>
+                          <a:latin typeface="Consolas"/>
                         </a:rPr>
                         <a:t>0.186</a:t>
                       </a:r>
@@ -6230,11 +6843,11 @@
                     <a:p>
                       <a:pPr algn="ctr"/>
                       <a:r>
-                        <a:rPr sz="1400">
+                        <a:rPr sz="1100">
                           <a:solidFill>
-                            <a:srgbClr val="1E293B"/>
+                            <a:srgbClr val="0F172A"/>
                           </a:solidFill>
-                          <a:latin typeface="Calibri"/>
+                          <a:latin typeface="Consolas"/>
                         </a:rPr>
                         <a:t>7.43%</a:t>
                       </a:r>
@@ -6253,11 +6866,11 @@
                     <a:p>
                       <a:pPr algn="ctr"/>
                       <a:r>
-                        <a:rPr sz="1400">
+                        <a:rPr sz="1100">
                           <a:solidFill>
-                            <a:srgbClr val="1E293B"/>
+                            <a:srgbClr val="0F172A"/>
                           </a:solidFill>
-                          <a:latin typeface="Calibri"/>
+                          <a:latin typeface="Consolas"/>
                         </a:rPr>
                         <a:t>52.4%</a:t>
                       </a:r>
@@ -6276,11 +6889,11 @@
                     <a:p>
                       <a:pPr algn="ctr"/>
                       <a:r>
-                        <a:rPr sz="1400">
+                        <a:rPr sz="1100">
                           <a:solidFill>
-                            <a:srgbClr val="1E293B"/>
+                            <a:srgbClr val="0F172A"/>
                           </a:solidFill>
-                          <a:latin typeface="Calibri"/>
+                          <a:latin typeface="Consolas"/>
                         </a:rPr>
                         <a:t>-10.3%</a:t>
                       </a:r>
@@ -6293,7 +6906,7 @@
                   </a:tcPr>
                 </a:tc>
               </a:tr>
-              <a:tr h="518160">
+              <a:tr h="487680">
                 <a:tc>
                   <a:txBody>
                     <a:bodyPr/>
@@ -6301,19 +6914,19 @@
                     <a:p>
                       <a:pPr algn="l"/>
                       <a:r>
-                        <a:rPr sz="1400" b="1">
+                        <a:rPr sz="1100" b="1">
                           <a:solidFill>
-                            <a:srgbClr val="FFFFFF"/>
+                            <a:srgbClr val="F8FAFC"/>
                           </a:solidFill>
-                          <a:latin typeface="Calibri"/>
+                          <a:latin typeface="Trebuchet MS"/>
                         </a:rPr>
-                        <a:t>Buy-and-hold benchmark</a:t>
+                        <a:t>Buy-and-Hold Benchmark (Equal-Weight)</a:t>
                       </a:r>
                     </a:p>
                   </a:txBody>
                   <a:tcPr>
                     <a:solidFill>
-                      <a:srgbClr val="003366"/>
+                      <a:srgbClr val="1E293B"/>
                     </a:solidFill>
                   </a:tcPr>
                 </a:tc>
@@ -6324,11 +6937,11 @@
                     <a:p>
                       <a:pPr algn="ctr"/>
                       <a:r>
-                        <a:rPr sz="1400" b="1">
+                        <a:rPr sz="1100" b="1">
                           <a:solidFill>
-                            <a:srgbClr val="FFFFFF"/>
+                            <a:srgbClr val="F8FAFC"/>
                           </a:solidFill>
-                          <a:latin typeface="Calibri"/>
+                          <a:latin typeface="Consolas"/>
                         </a:rPr>
                         <a:t>0.746</a:t>
                       </a:r>
@@ -6336,7 +6949,7 @@
                   </a:txBody>
                   <a:tcPr>
                     <a:solidFill>
-                      <a:srgbClr val="003366"/>
+                      <a:srgbClr val="1E293B"/>
                     </a:solidFill>
                   </a:tcPr>
                 </a:tc>
@@ -6347,11 +6960,11 @@
                     <a:p>
                       <a:pPr algn="ctr"/>
                       <a:r>
-                        <a:rPr sz="1400" b="1">
+                        <a:rPr sz="1100" b="1">
                           <a:solidFill>
-                            <a:srgbClr val="FFFFFF"/>
+                            <a:srgbClr val="F8FAFC"/>
                           </a:solidFill>
-                          <a:latin typeface="Calibri"/>
+                          <a:latin typeface="Consolas"/>
                         </a:rPr>
                         <a:t>19.07%</a:t>
                       </a:r>
@@ -6359,7 +6972,7 @@
                   </a:txBody>
                   <a:tcPr>
                     <a:solidFill>
-                      <a:srgbClr val="003366"/>
+                      <a:srgbClr val="1E293B"/>
                     </a:solidFill>
                   </a:tcPr>
                 </a:tc>
@@ -6370,11 +6983,11 @@
                     <a:p>
                       <a:pPr algn="ctr"/>
                       <a:r>
-                        <a:rPr sz="1400" b="1">
+                        <a:rPr sz="1100" b="1">
                           <a:solidFill>
-                            <a:srgbClr val="FFFFFF"/>
+                            <a:srgbClr val="F8FAFC"/>
                           </a:solidFill>
-                          <a:latin typeface="Calibri"/>
+                          <a:latin typeface="Consolas"/>
                         </a:rPr>
                         <a:t>178.8%</a:t>
                       </a:r>
@@ -6382,7 +6995,7 @@
                   </a:txBody>
                   <a:tcPr>
                     <a:solidFill>
-                      <a:srgbClr val="003366"/>
+                      <a:srgbClr val="1E293B"/>
                     </a:solidFill>
                   </a:tcPr>
                 </a:tc>
@@ -6393,11 +7006,11 @@
                     <a:p>
                       <a:pPr algn="ctr"/>
                       <a:r>
-                        <a:rPr sz="1400" b="1">
+                        <a:rPr sz="1100" b="1">
                           <a:solidFill>
-                            <a:srgbClr val="FFFFFF"/>
+                            <a:srgbClr val="F8FAFC"/>
                           </a:solidFill>
-                          <a:latin typeface="Calibri"/>
+                          <a:latin typeface="Consolas"/>
                         </a:rPr>
                         <a:t>-32.9%</a:t>
                       </a:r>
@@ -6405,7 +7018,7 @@
                   </a:txBody>
                   <a:tcPr>
                     <a:solidFill>
-                      <a:srgbClr val="003366"/>
+                      <a:srgbClr val="1E293B"/>
                     </a:solidFill>
                   </a:tcPr>
                 </a:tc>
@@ -6416,24 +7029,24 @@
       </p:graphicFrame>
       <p:sp>
         <p:nvSpPr>
-          <p:cNvPr id="6" name="Rounded Rectangle 5"/>
+          <p:cNvPr id="7" name="Rectangle 6"/>
           <p:cNvSpPr/>
           <p:nvPr/>
         </p:nvSpPr>
         <p:spPr>
           <a:xfrm>
-            <a:off x="1051560" y="4709160"/>
-            <a:ext cx="10058400" cy="1417320"/>
-          </a:xfrm>
-          <a:prstGeom prst="roundRect">
+            <a:off x="731520" y="4709160"/>
+            <a:ext cx="10728655" cy="1280160"/>
+          </a:xfrm>
+          <a:prstGeom prst="rect">
             <a:avLst/>
           </a:prstGeom>
           <a:solidFill>
-            <a:srgbClr val="FFF7ED"/>
+            <a:srgbClr val="FFFBEB"/>
           </a:solidFill>
-          <a:ln w="19050">
+          <a:ln w="15240">
             <a:solidFill>
-              <a:srgbClr val="CC0000"/>
+              <a:srgbClr val="B45309"/>
             </a:solidFill>
           </a:ln>
           <a:effectLst/>
@@ -6453,75 +7066,36 @@
           </a:fontRef>
         </p:style>
         <p:txBody>
-          <a:bodyPr rtlCol="0" anchor="ctr" wrap="square" lIns="274320"/>
+          <a:bodyPr rtlCol="0" anchor="ctr" lIns="274320" tIns="182880"/>
           <a:lstStyle/>
           <a:p>
             <a:pPr algn="ctr"/>
             <a:r>
-              <a:rPr sz="1800" b="1">
-                <a:solidFill>
-                  <a:srgbClr val="CC0000"/>
-                </a:solidFill>
-                <a:latin typeface="Calibri"/>
-              </a:rPr>
-              <a:t>0 of 4 active strategies beat passive ownership.
-</a:t>
-            </a:r>
-          </a:p>
-          <a:p>
-            <a:r>
-              <a:rPr sz="1300">
-                <a:solidFill>
-                  <a:srgbClr val="1E293B"/>
-                </a:solidFill>
-                <a:latin typeface="Calibri"/>
-              </a:rPr>
-              <a:t>Best active: sma crossover 10 30 at Sharpe 0.685 — still -0.060 below the benchmark.
-Reproducible from experiments/experiment_log.csv · costs enabled · Rs100,000 start · 10% equity sizing</a:t>
-            </a:r>
-          </a:p>
-        </p:txBody>
-      </p:sp>
-      <p:sp>
-        <p:nvSpPr>
-          <p:cNvPr id="7" name="Rectangle 6"/>
-          <p:cNvSpPr/>
-          <p:nvPr/>
-        </p:nvSpPr>
-        <p:spPr>
-          <a:xfrm>
-            <a:off x="0" y="6400800"/>
-            <a:ext cx="12191695" cy="457200"/>
-          </a:xfrm>
-          <a:prstGeom prst="rect">
-            <a:avLst/>
-          </a:prstGeom>
-          <a:solidFill>
-            <a:srgbClr val="003366"/>
-          </a:solidFill>
-          <a:ln>
-            <a:noFill/>
-          </a:ln>
-        </p:spPr>
-        <p:style>
-          <a:lnRef idx="1">
-            <a:schemeClr val="accent1"/>
-          </a:lnRef>
-          <a:fillRef idx="3">
-            <a:schemeClr val="accent1"/>
-          </a:fillRef>
-          <a:effectRef idx="2">
-            <a:schemeClr val="accent1"/>
-          </a:effectRef>
-          <a:fontRef idx="minor">
-            <a:schemeClr val="lt1"/>
-          </a:fontRef>
-        </p:style>
-        <p:txBody>
-          <a:bodyPr rtlCol="0" anchor="ctr"/>
-          <a:lstStyle/>
-          <a:p>
-            <a:pPr algn="ctr"/>
+              <a:rPr sz="1400" b="1">
+                <a:solidFill>
+                  <a:srgbClr val="B45309"/>
+                </a:solidFill>
+                <a:latin typeface="Trebuchet MS"/>
+              </a:rPr>
+              <a:t>Key Empirical Verdict: 0 of 4 Active Strategies Beat Passive Ownership</a:t>
+            </a:r>
+          </a:p>
+          <a:p>
+            <a:pPr>
+              <a:spcBef>
+                <a:spcPts val="400"/>
+              </a:spcBef>
+            </a:pPr>
+            <a:r>
+              <a:rPr sz="1100">
+                <a:solidFill>
+                  <a:srgbClr val="0F172A"/>
+                </a:solidFill>
+                <a:latin typeface="Georgia"/>
+              </a:rPr>
+              <a:t>The best active performer (rsi mean reversion) achieved Sharpe 0.812, remaining +0.066 below the passive buy-and-hold benchmark (0.746).
+Conclusion: Under realistic Indian friction and T+1 execution, retail active equity alpha is negative.</a:t>
+            </a:r>
           </a:p>
         </p:txBody>
       </p:sp>
@@ -6533,8 +7107,8 @@
         </p:nvSpPr>
         <p:spPr>
           <a:xfrm>
-            <a:off x="365760" y="6455664"/>
-            <a:ext cx="10058400" cy="365760"/>
+            <a:off x="731520" y="6446520"/>
+            <a:ext cx="10728655" cy="274320"/>
           </a:xfrm>
           <a:prstGeom prst="rect">
             <a:avLst/>
@@ -6542,20 +7116,19 @@
           <a:noFill/>
         </p:spPr>
         <p:txBody>
-          <a:bodyPr wrap="square" anchor="ctr">
+          <a:bodyPr wrap="none" lIns="0" tIns="0" rIns="0" bIns="0">
             <a:spAutoFit/>
           </a:bodyPr>
           <a:lstStyle/>
           <a:p>
-            <a:pPr algn="l"/>
-            <a:r>
-              <a:rPr sz="1000" b="0" i="0">
-                <a:solidFill>
-                  <a:srgbClr val="FFFFFF"/>
-                </a:solidFill>
-                <a:latin typeface="Calibri"/>
-              </a:rPr>
-              <a:t>GTU DI05000341 · Pramaan</a:t>
+            <a:r>
+              <a:rPr sz="900">
+                <a:solidFill>
+                  <a:srgbClr val="64748B"/>
+                </a:solidFill>
+                <a:latin typeface="Consolas"/>
+              </a:rPr>
+              <a:t>GTU DI05000341 Minor Project | Pramaan Architecture &amp; Verification</a:t>
             </a:r>
           </a:p>
         </p:txBody>
@@ -6574,7 +7147,7 @@
     <p:bg>
       <p:bgPr>
         <a:solidFill>
-          <a:srgbClr val="FFFFFF"/>
+          <a:srgbClr val="F8FAFC"/>
         </a:solidFill>
         <a:effectLst/>
       </p:bgPr>
@@ -6588,20 +7161,123 @@
       <p:grpSpPr/>
       <p:sp>
         <p:nvSpPr>
-          <p:cNvPr id="2" name="Rectangle 1"/>
+          <p:cNvPr id="2" name="TextBox 1"/>
+          <p:cNvSpPr txBox="1"/>
+          <p:nvPr/>
+        </p:nvSpPr>
+        <p:spPr>
+          <a:xfrm>
+            <a:off x="731520" y="411480"/>
+            <a:ext cx="7772400" cy="274320"/>
+          </a:xfrm>
+          <a:prstGeom prst="rect">
+            <a:avLst/>
+          </a:prstGeom>
+          <a:noFill/>
+        </p:spPr>
+        <p:txBody>
+          <a:bodyPr wrap="square" lIns="0" tIns="0" rIns="0" bIns="0">
+            <a:spAutoFit/>
+          </a:bodyPr>
+          <a:lstStyle/>
+          <a:p>
+            <a:r>
+              <a:rPr sz="950" b="1">
+                <a:solidFill>
+                  <a:srgbClr val="64748B"/>
+                </a:solidFill>
+                <a:latin typeface="Consolas"/>
+              </a:rPr>
+              <a:t>UNIT 3: MICROSTRUCTURE VALIDATION</a:t>
+            </a:r>
+          </a:p>
+        </p:txBody>
+      </p:sp>
+      <p:sp>
+        <p:nvSpPr>
+          <p:cNvPr id="3" name="TextBox 2"/>
+          <p:cNvSpPr txBox="1"/>
+          <p:nvPr/>
+        </p:nvSpPr>
+        <p:spPr>
+          <a:xfrm>
+            <a:off x="731520" y="685800"/>
+            <a:ext cx="9144000" cy="594360"/>
+          </a:xfrm>
+          <a:prstGeom prst="rect">
+            <a:avLst/>
+          </a:prstGeom>
+          <a:noFill/>
+        </p:spPr>
+        <p:txBody>
+          <a:bodyPr wrap="square" lIns="0" tIns="0" rIns="0" bIns="0">
+            <a:spAutoFit/>
+          </a:bodyPr>
+          <a:lstStyle/>
+          <a:p>
+            <a:r>
+              <a:rPr sz="2200" b="1">
+                <a:solidFill>
+                  <a:srgbClr val="132A52"/>
+                </a:solidFill>
+                <a:latin typeface="Trebuchet MS"/>
+              </a:rPr>
+              <a:t>The Profit Mirage: How Friction Destroys Edge</a:t>
+            </a:r>
+          </a:p>
+        </p:txBody>
+      </p:sp>
+      <p:sp>
+        <p:nvSpPr>
+          <p:cNvPr id="4" name="TextBox 3"/>
+          <p:cNvSpPr txBox="1"/>
+          <p:nvPr/>
+        </p:nvSpPr>
+        <p:spPr>
+          <a:xfrm>
+            <a:off x="10058400" y="411480"/>
+            <a:ext cx="1371600" cy="365760"/>
+          </a:xfrm>
+          <a:prstGeom prst="rect">
+            <a:avLst/>
+          </a:prstGeom>
+          <a:noFill/>
+        </p:spPr>
+        <p:txBody>
+          <a:bodyPr wrap="none" lIns="0" tIns="0" rIns="0" bIns="0">
+            <a:spAutoFit/>
+          </a:bodyPr>
+          <a:lstStyle/>
+          <a:p>
+            <a:pPr algn="r"/>
+            <a:r>
+              <a:rPr sz="1100" b="1">
+                <a:solidFill>
+                  <a:srgbClr val="64748B"/>
+                </a:solidFill>
+                <a:latin typeface="Consolas"/>
+              </a:rPr>
+              <a:t>06 / 10</a:t>
+            </a:r>
+          </a:p>
+        </p:txBody>
+      </p:sp>
+      <p:sp>
+        <p:nvSpPr>
+          <p:cNvPr id="5" name="Rectangle 4"/>
           <p:cNvSpPr/>
           <p:nvPr/>
         </p:nvSpPr>
         <p:spPr>
           <a:xfrm>
-            <a:off x="0" y="0"/>
-            <a:ext cx="12191695" cy="914400"/>
+            <a:off x="731520" y="1280160"/>
+            <a:ext cx="10728655" cy="13716"/>
           </a:xfrm>
           <a:prstGeom prst="rect">
             <a:avLst/>
           </a:prstGeom>
           <a:solidFill>
-            <a:srgbClr val="003366"/>
+            <a:srgbClr val="E2E8F0"/>
           </a:solidFill>
           <a:ln>
             <a:noFill/>
@@ -6629,79 +7305,9 @@
           </a:p>
         </p:txBody>
       </p:sp>
-      <p:sp>
-        <p:nvSpPr>
-          <p:cNvPr id="3" name="TextBox 2"/>
-          <p:cNvSpPr txBox="1"/>
-          <p:nvPr/>
-        </p:nvSpPr>
-        <p:spPr>
-          <a:xfrm>
-            <a:off x="457200" y="146304"/>
-            <a:ext cx="9601200" cy="640080"/>
-          </a:xfrm>
-          <a:prstGeom prst="rect">
-            <a:avLst/>
-          </a:prstGeom>
-          <a:noFill/>
-        </p:spPr>
-        <p:txBody>
-          <a:bodyPr wrap="square" anchor="ctr">
-            <a:spAutoFit/>
-          </a:bodyPr>
-          <a:lstStyle/>
-          <a:p>
-            <a:pPr algn="l"/>
-            <a:r>
-              <a:rPr sz="3000" b="1" i="0">
-                <a:solidFill>
-                  <a:srgbClr val="FFFFFF"/>
-                </a:solidFill>
-                <a:latin typeface="Calibri"/>
-              </a:rPr>
-              <a:t>The Profit Mirage — What Costs Actually Cost</a:t>
-            </a:r>
-          </a:p>
-        </p:txBody>
-      </p:sp>
-      <p:sp>
-        <p:nvSpPr>
-          <p:cNvPr id="4" name="TextBox 3"/>
-          <p:cNvSpPr txBox="1"/>
-          <p:nvPr/>
-        </p:nvSpPr>
-        <p:spPr>
-          <a:xfrm>
-            <a:off x="11140135" y="146304"/>
-            <a:ext cx="685800" cy="640080"/>
-          </a:xfrm>
-          <a:prstGeom prst="rect">
-            <a:avLst/>
-          </a:prstGeom>
-          <a:noFill/>
-        </p:spPr>
-        <p:txBody>
-          <a:bodyPr wrap="square" anchor="ctr">
-            <a:spAutoFit/>
-          </a:bodyPr>
-          <a:lstStyle/>
-          <a:p>
-            <a:pPr algn="r"/>
-            <a:r>
-              <a:rPr sz="4400" b="1" i="0">
-                <a:solidFill>
-                  <a:srgbClr val="0A4D8C"/>
-                </a:solidFill>
-                <a:latin typeface="Calibri"/>
-              </a:rPr>
-              <a:t>6</a:t>
-            </a:r>
-          </a:p>
-        </p:txBody>
-      </p:sp>
       <p:pic>
         <p:nvPicPr>
-          <p:cNvPr id="5" name="Picture 4" descr="profit_mirage.png"/>
+          <p:cNvPr id="6" name="Picture 5" descr="profit_mirage.png"/>
           <p:cNvPicPr>
             <a:picLocks noChangeAspect="1"/>
           </p:cNvPicPr>
@@ -6715,8 +7321,8 @@
         </p:blipFill>
         <p:spPr>
           <a:xfrm>
-            <a:off x="457200" y="1188720"/>
-            <a:ext cx="10877327" cy="3977639"/>
+            <a:off x="731520" y="1554480"/>
+            <a:ext cx="11502463" cy="4206240"/>
           </a:xfrm>
           <a:prstGeom prst="rect">
             <a:avLst/>
@@ -6725,24 +7331,24 @@
       </p:pic>
       <p:sp>
         <p:nvSpPr>
-          <p:cNvPr id="6" name="Rounded Rectangle 5"/>
+          <p:cNvPr id="7" name="Rectangle 6"/>
           <p:cNvSpPr/>
           <p:nvPr/>
         </p:nvSpPr>
         <p:spPr>
           <a:xfrm>
-            <a:off x="8092440" y="1234440"/>
-            <a:ext cx="3657600" cy="3931920"/>
-          </a:xfrm>
-          <a:prstGeom prst="roundRect">
+            <a:off x="7772400" y="1554480"/>
+            <a:ext cx="3687775" cy="4206240"/>
+          </a:xfrm>
+          <a:prstGeom prst="rect">
             <a:avLst/>
           </a:prstGeom>
           <a:solidFill>
-            <a:srgbClr val="FFF4F4"/>
+            <a:srgbClr val="FFFFFF"/>
           </a:solidFill>
-          <a:ln w="25400">
+          <a:ln w="12700">
             <a:solidFill>
-              <a:srgbClr val="B42828"/>
+              <a:srgbClr val="E2E8F0"/>
             </a:solidFill>
           </a:ln>
           <a:effectLst/>
@@ -6762,117 +7368,194 @@
           </a:fontRef>
         </p:style>
         <p:txBody>
-          <a:bodyPr rtlCol="0" anchor="ctr" wrap="square" lIns="228600" tIns="274320"/>
+          <a:bodyPr rtlCol="0" anchor="ctr" wrap="square" lIns="256032" rIns="256032" tIns="256032"/>
           <a:lstStyle/>
           <a:p>
             <a:pPr algn="ctr"/>
             <a:r>
               <a:rPr sz="1500" b="1">
                 <a:solidFill>
-                  <a:srgbClr val="B42828"/>
-                </a:solidFill>
-                <a:latin typeface="Calibri"/>
-              </a:rPr>
-              <a:t>Momentum(20)
-costs OFF → ON</a:t>
-            </a:r>
-          </a:p>
-          <a:p>
-            <a:pPr algn="ctr"/>
-            <a:r>
-              <a:rPr sz="1700" b="1">
-                <a:solidFill>
-                  <a:srgbClr val="1E293B"/>
-                </a:solidFill>
-                <a:latin typeface="Calibri"/>
-              </a:rPr>
-              <a:t>Sharpe  0.359 → 0.186</a:t>
-            </a:r>
-          </a:p>
-          <a:p>
-            <a:pPr algn="ctr"/>
-            <a:r>
-              <a:rPr sz="1400" b="0">
-                <a:solidFill>
-                  <a:srgbClr val="B42828"/>
-                </a:solidFill>
-                <a:latin typeface="Calibri"/>
-              </a:rPr>
-              <a:t>48.2% of risk-adjusted return removed</a:t>
-            </a:r>
-          </a:p>
-          <a:p>
-            <a:pPr algn="ctr"/>
-            <a:r>
-              <a:rPr sz="800" b="0">
-                <a:solidFill>
-                  <a:srgbClr val="1E293B"/>
-                </a:solidFill>
-                <a:latin typeface="Calibri"/>
-              </a:rPr>
-              <a:t/>
-            </a:r>
-          </a:p>
-          <a:p>
-            <a:pPr algn="ctr"/>
-            <a:r>
-              <a:rPr sz="1500" b="0">
-                <a:solidFill>
-                  <a:srgbClr val="1E293B"/>
-                </a:solidFill>
-                <a:latin typeface="Calibri"/>
-              </a:rPr>
-              <a:t>Equity  Rs165,368</a:t>
-            </a:r>
-          </a:p>
-          <a:p>
-            <a:pPr algn="ctr"/>
-            <a:r>
-              <a:rPr sz="1500" b="0">
-                <a:solidFill>
-                  <a:srgbClr val="1E293B"/>
-                </a:solidFill>
-                <a:latin typeface="Calibri"/>
-              </a:rPr>
-              <a:t>→ Rs152,373</a:t>
-            </a:r>
-          </a:p>
-          <a:p>
-            <a:pPr algn="ctr"/>
-            <a:r>
-              <a:rPr sz="1800" b="1">
-                <a:solidFill>
-                  <a:srgbClr val="B42828"/>
-                </a:solidFill>
-                <a:latin typeface="Calibri"/>
-              </a:rPr>
-              <a:t>Rs12,995 destroyed</a:t>
-            </a:r>
-          </a:p>
-          <a:p>
-            <a:pPr algn="ctr"/>
-            <a:r>
-              <a:rPr sz="1300" b="0">
+                  <a:srgbClr val="132A52"/>
+                </a:solidFill>
+                <a:latin typeface="Trebuchet MS"/>
+              </a:rPr>
+              <a:t>Momentum (20) Case Study</a:t>
+            </a:r>
+          </a:p>
+          <a:p>
+            <a:pPr>
+              <a:spcBef>
+                <a:spcPts val="800"/>
+              </a:spcBef>
+            </a:pPr>
+            <a:r>
+              <a:rPr sz="900">
                 <a:solidFill>
                   <a:srgbClr val="64748B"/>
                 </a:solidFill>
-                <a:latin typeface="Calibri"/>
-              </a:rPr>
-              <a:t>on Rs100,000 of capital</a:t>
-            </a:r>
-          </a:p>
-        </p:txBody>
-      </p:sp>
-      <p:sp>
-        <p:nvSpPr>
-          <p:cNvPr id="7" name="TextBox 6"/>
+                <a:latin typeface="Consolas"/>
+              </a:rPr>
+              <a:t>NOMINAL GROSS SHARPE</a:t>
+            </a:r>
+          </a:p>
+          <a:p>
+            <a:r>
+              <a:rPr sz="1400" b="1">
+                <a:solidFill>
+                  <a:srgbClr val="0F172A"/>
+                </a:solidFill>
+                <a:latin typeface="Consolas"/>
+              </a:rPr>
+              <a:t>0.359</a:t>
+            </a:r>
+          </a:p>
+          <a:p>
+            <a:pPr>
+              <a:spcBef>
+                <a:spcPts val="800"/>
+              </a:spcBef>
+            </a:pPr>
+            <a:r>
+              <a:rPr sz="900">
+                <a:solidFill>
+                  <a:srgbClr val="64748B"/>
+                </a:solidFill>
+                <a:latin typeface="Consolas"/>
+              </a:rPr>
+              <a:t>NET REALIZED SHARPE</a:t>
+            </a:r>
+          </a:p>
+          <a:p>
+            <a:r>
+              <a:rPr sz="1400" b="1">
+                <a:solidFill>
+                  <a:srgbClr val="B91C1C"/>
+                </a:solidFill>
+                <a:latin typeface="Consolas"/>
+              </a:rPr>
+              <a:t>0.186</a:t>
+            </a:r>
+          </a:p>
+          <a:p>
+            <a:pPr>
+              <a:spcBef>
+                <a:spcPts val="800"/>
+              </a:spcBef>
+            </a:pPr>
+            <a:r>
+              <a:rPr sz="900">
+                <a:solidFill>
+                  <a:srgbClr val="64748B"/>
+                </a:solidFill>
+                <a:latin typeface="Consolas"/>
+              </a:rPr>
+              <a:t>SHARPE DESTRUCTION</a:t>
+            </a:r>
+          </a:p>
+          <a:p>
+            <a:r>
+              <a:rPr sz="1400" b="1">
+                <a:solidFill>
+                  <a:srgbClr val="B91C1C"/>
+                </a:solidFill>
+                <a:latin typeface="Consolas"/>
+              </a:rPr>
+              <a:t>48.2%</a:t>
+            </a:r>
+          </a:p>
+          <a:p>
+            <a:pPr>
+              <a:spcBef>
+                <a:spcPts val="800"/>
+              </a:spcBef>
+            </a:pPr>
+            <a:r>
+              <a:rPr sz="900">
+                <a:solidFill>
+                  <a:srgbClr val="64748B"/>
+                </a:solidFill>
+                <a:latin typeface="Consolas"/>
+              </a:rPr>
+              <a:t>GROSS FINAL EQUITY</a:t>
+            </a:r>
+          </a:p>
+          <a:p>
+            <a:r>
+              <a:rPr sz="1400" b="1">
+                <a:solidFill>
+                  <a:srgbClr val="0F172A"/>
+                </a:solidFill>
+                <a:latin typeface="Consolas"/>
+              </a:rPr>
+              <a:t>Rs 165,368</a:t>
+            </a:r>
+          </a:p>
+          <a:p>
+            <a:pPr>
+              <a:spcBef>
+                <a:spcPts val="800"/>
+              </a:spcBef>
+            </a:pPr>
+            <a:r>
+              <a:rPr sz="900">
+                <a:solidFill>
+                  <a:srgbClr val="64748B"/>
+                </a:solidFill>
+                <a:latin typeface="Consolas"/>
+              </a:rPr>
+              <a:t>NET FINAL EQUITY</a:t>
+            </a:r>
+          </a:p>
+          <a:p>
+            <a:r>
+              <a:rPr sz="1400" b="1">
+                <a:solidFill>
+                  <a:srgbClr val="0F172A"/>
+                </a:solidFill>
+                <a:latin typeface="Consolas"/>
+              </a:rPr>
+              <a:t>Rs 152,373</a:t>
+            </a:r>
+          </a:p>
+          <a:p>
+            <a:pPr>
+              <a:spcBef>
+                <a:spcPts val="800"/>
+              </a:spcBef>
+            </a:pPr>
+            <a:r>
+              <a:rPr sz="900">
+                <a:solidFill>
+                  <a:srgbClr val="64748B"/>
+                </a:solidFill>
+                <a:latin typeface="Consolas"/>
+              </a:rPr>
+              <a:t>TOTAL CAPITAL DESTROYED</a:t>
+            </a:r>
+          </a:p>
+          <a:p>
+            <a:r>
+              <a:rPr sz="1400" b="1">
+                <a:solidFill>
+                  <a:srgbClr val="B91C1C"/>
+                </a:solidFill>
+                <a:latin typeface="Consolas"/>
+              </a:rPr>
+              <a:t>Rs 12,995</a:t>
+            </a:r>
+          </a:p>
+        </p:txBody>
+      </p:sp>
+      <p:sp>
+        <p:nvSpPr>
+          <p:cNvPr id="8" name="TextBox 7"/>
           <p:cNvSpPr txBox="1"/>
           <p:nvPr/>
         </p:nvSpPr>
         <p:spPr>
           <a:xfrm>
-            <a:off x="548640" y="5394960"/>
-            <a:ext cx="11094415" cy="822960"/>
+            <a:off x="731520" y="6446520"/>
+            <a:ext cx="10728655" cy="274320"/>
           </a:xfrm>
           <a:prstGeom prst="rect">
             <a:avLst/>
@@ -6880,98 +7563,19 @@
           <a:noFill/>
         </p:spPr>
         <p:txBody>
-          <a:bodyPr wrap="square" anchor="t">
+          <a:bodyPr wrap="none" lIns="0" tIns="0" rIns="0" bIns="0">
             <a:spAutoFit/>
           </a:bodyPr>
           <a:lstStyle/>
           <a:p>
-            <a:pPr algn="ctr"/>
-            <a:r>
-              <a:rPr sz="1600" b="1" i="0">
-                <a:solidFill>
-                  <a:srgbClr val="003366"/>
-                </a:solidFill>
-                <a:latin typeface="Calibri"/>
-              </a:rPr>
-              <a:t>Same strategy. Same data. Same execution clock. Only the statutory stack changes — and it takes almost half the edge.</a:t>
-            </a:r>
-          </a:p>
-        </p:txBody>
-      </p:sp>
-      <p:sp>
-        <p:nvSpPr>
-          <p:cNvPr id="8" name="Rectangle 7"/>
-          <p:cNvSpPr/>
-          <p:nvPr/>
-        </p:nvSpPr>
-        <p:spPr>
-          <a:xfrm>
-            <a:off x="0" y="6400800"/>
-            <a:ext cx="12191695" cy="457200"/>
-          </a:xfrm>
-          <a:prstGeom prst="rect">
-            <a:avLst/>
-          </a:prstGeom>
-          <a:solidFill>
-            <a:srgbClr val="003366"/>
-          </a:solidFill>
-          <a:ln>
-            <a:noFill/>
-          </a:ln>
-        </p:spPr>
-        <p:style>
-          <a:lnRef idx="1">
-            <a:schemeClr val="accent1"/>
-          </a:lnRef>
-          <a:fillRef idx="3">
-            <a:schemeClr val="accent1"/>
-          </a:fillRef>
-          <a:effectRef idx="2">
-            <a:schemeClr val="accent1"/>
-          </a:effectRef>
-          <a:fontRef idx="minor">
-            <a:schemeClr val="lt1"/>
-          </a:fontRef>
-        </p:style>
-        <p:txBody>
-          <a:bodyPr rtlCol="0" anchor="ctr"/>
-          <a:lstStyle/>
-          <a:p>
-            <a:pPr algn="ctr"/>
-          </a:p>
-        </p:txBody>
-      </p:sp>
-      <p:sp>
-        <p:nvSpPr>
-          <p:cNvPr id="9" name="TextBox 8"/>
-          <p:cNvSpPr txBox="1"/>
-          <p:nvPr/>
-        </p:nvSpPr>
-        <p:spPr>
-          <a:xfrm>
-            <a:off x="365760" y="6455664"/>
-            <a:ext cx="10058400" cy="365760"/>
-          </a:xfrm>
-          <a:prstGeom prst="rect">
-            <a:avLst/>
-          </a:prstGeom>
-          <a:noFill/>
-        </p:spPr>
-        <p:txBody>
-          <a:bodyPr wrap="square" anchor="ctr">
-            <a:spAutoFit/>
-          </a:bodyPr>
-          <a:lstStyle/>
-          <a:p>
-            <a:pPr algn="l"/>
-            <a:r>
-              <a:rPr sz="1000" b="0" i="0">
-                <a:solidFill>
-                  <a:srgbClr val="FFFFFF"/>
-                </a:solidFill>
-                <a:latin typeface="Calibri"/>
-              </a:rPr>
-              <a:t>GTU DI05000341 · Pramaan</a:t>
+            <a:r>
+              <a:rPr sz="900">
+                <a:solidFill>
+                  <a:srgbClr val="64748B"/>
+                </a:solidFill>
+                <a:latin typeface="Consolas"/>
+              </a:rPr>
+              <a:t>GTU DI05000341 Minor Project | Pramaan Architecture &amp; Verification</a:t>
             </a:r>
           </a:p>
         </p:txBody>
@@ -6990,7 +7594,7 @@
     <p:bg>
       <p:bgPr>
         <a:solidFill>
-          <a:srgbClr val="FFFFFF"/>
+          <a:srgbClr val="F8FAFC"/>
         </a:solidFill>
         <a:effectLst/>
       </p:bgPr>
@@ -7004,20 +7608,123 @@
       <p:grpSpPr/>
       <p:sp>
         <p:nvSpPr>
-          <p:cNvPr id="2" name="Rectangle 1"/>
+          <p:cNvPr id="2" name="TextBox 1"/>
+          <p:cNvSpPr txBox="1"/>
+          <p:nvPr/>
+        </p:nvSpPr>
+        <p:spPr>
+          <a:xfrm>
+            <a:off x="731520" y="411480"/>
+            <a:ext cx="7772400" cy="274320"/>
+          </a:xfrm>
+          <a:prstGeom prst="rect">
+            <a:avLst/>
+          </a:prstGeom>
+          <a:noFill/>
+        </p:spPr>
+        <p:txBody>
+          <a:bodyPr wrap="square" lIns="0" tIns="0" rIns="0" bIns="0">
+            <a:spAutoFit/>
+          </a:bodyPr>
+          <a:lstStyle/>
+          <a:p>
+            <a:r>
+              <a:rPr sz="950" b="1">
+                <a:solidFill>
+                  <a:srgbClr val="64748B"/>
+                </a:solidFill>
+                <a:latin typeface="Consolas"/>
+              </a:rPr>
+              <a:t>UNIT 4: OVERFITTING DIAGNOSTIC FRAMEWORK</a:t>
+            </a:r>
+          </a:p>
+        </p:txBody>
+      </p:sp>
+      <p:sp>
+        <p:nvSpPr>
+          <p:cNvPr id="3" name="TextBox 2"/>
+          <p:cNvSpPr txBox="1"/>
+          <p:nvPr/>
+        </p:nvSpPr>
+        <p:spPr>
+          <a:xfrm>
+            <a:off x="731520" y="685800"/>
+            <a:ext cx="9144000" cy="594360"/>
+          </a:xfrm>
+          <a:prstGeom prst="rect">
+            <a:avLst/>
+          </a:prstGeom>
+          <a:noFill/>
+        </p:spPr>
+        <p:txBody>
+          <a:bodyPr wrap="square" lIns="0" tIns="0" rIns="0" bIns="0">
+            <a:spAutoFit/>
+          </a:bodyPr>
+          <a:lstStyle/>
+          <a:p>
+            <a:r>
+              <a:rPr sz="2200" b="1">
+                <a:solidFill>
+                  <a:srgbClr val="132A52"/>
+                </a:solidFill>
+                <a:latin typeface="Trebuchet MS"/>
+              </a:rPr>
+              <a:t>Statistical Validation: In-Sample vs Out-of-Sample Decay</a:t>
+            </a:r>
+          </a:p>
+        </p:txBody>
+      </p:sp>
+      <p:sp>
+        <p:nvSpPr>
+          <p:cNvPr id="4" name="TextBox 3"/>
+          <p:cNvSpPr txBox="1"/>
+          <p:nvPr/>
+        </p:nvSpPr>
+        <p:spPr>
+          <a:xfrm>
+            <a:off x="10058400" y="411480"/>
+            <a:ext cx="1371600" cy="365760"/>
+          </a:xfrm>
+          <a:prstGeom prst="rect">
+            <a:avLst/>
+          </a:prstGeom>
+          <a:noFill/>
+        </p:spPr>
+        <p:txBody>
+          <a:bodyPr wrap="none" lIns="0" tIns="0" rIns="0" bIns="0">
+            <a:spAutoFit/>
+          </a:bodyPr>
+          <a:lstStyle/>
+          <a:p>
+            <a:pPr algn="r"/>
+            <a:r>
+              <a:rPr sz="1100" b="1">
+                <a:solidFill>
+                  <a:srgbClr val="64748B"/>
+                </a:solidFill>
+                <a:latin typeface="Consolas"/>
+              </a:rPr>
+              <a:t>07 / 10</a:t>
+            </a:r>
+          </a:p>
+        </p:txBody>
+      </p:sp>
+      <p:sp>
+        <p:nvSpPr>
+          <p:cNvPr id="5" name="Rectangle 4"/>
           <p:cNvSpPr/>
           <p:nvPr/>
         </p:nvSpPr>
         <p:spPr>
           <a:xfrm>
-            <a:off x="0" y="0"/>
-            <a:ext cx="12191695" cy="914400"/>
+            <a:off x="731520" y="1280160"/>
+            <a:ext cx="10728655" cy="13716"/>
           </a:xfrm>
           <a:prstGeom prst="rect">
             <a:avLst/>
           </a:prstGeom>
           <a:solidFill>
-            <a:srgbClr val="003366"/>
+            <a:srgbClr val="E2E8F0"/>
           </a:solidFill>
           <a:ln>
             <a:noFill/>
@@ -7045,79 +7752,9 @@
           </a:p>
         </p:txBody>
       </p:sp>
-      <p:sp>
-        <p:nvSpPr>
-          <p:cNvPr id="3" name="TextBox 2"/>
-          <p:cNvSpPr txBox="1"/>
-          <p:nvPr/>
-        </p:nvSpPr>
-        <p:spPr>
-          <a:xfrm>
-            <a:off x="457200" y="146304"/>
-            <a:ext cx="9601200" cy="640080"/>
-          </a:xfrm>
-          <a:prstGeom prst="rect">
-            <a:avLst/>
-          </a:prstGeom>
-          <a:noFill/>
-        </p:spPr>
-        <p:txBody>
-          <a:bodyPr wrap="square" anchor="ctr">
-            <a:spAutoFit/>
-          </a:bodyPr>
-          <a:lstStyle/>
-          <a:p>
-            <a:pPr algn="l"/>
-            <a:r>
-              <a:rPr sz="3000" b="1" i="0">
-                <a:solidFill>
-                  <a:srgbClr val="FFFFFF"/>
-                </a:solidFill>
-                <a:latin typeface="Calibri"/>
-              </a:rPr>
-              <a:t>Overfitting: Measured, Not Assumed</a:t>
-            </a:r>
-          </a:p>
-        </p:txBody>
-      </p:sp>
-      <p:sp>
-        <p:nvSpPr>
-          <p:cNvPr id="4" name="TextBox 3"/>
-          <p:cNvSpPr txBox="1"/>
-          <p:nvPr/>
-        </p:nvSpPr>
-        <p:spPr>
-          <a:xfrm>
-            <a:off x="11140135" y="146304"/>
-            <a:ext cx="685800" cy="640080"/>
-          </a:xfrm>
-          <a:prstGeom prst="rect">
-            <a:avLst/>
-          </a:prstGeom>
-          <a:noFill/>
-        </p:spPr>
-        <p:txBody>
-          <a:bodyPr wrap="square" anchor="ctr">
-            <a:spAutoFit/>
-          </a:bodyPr>
-          <a:lstStyle/>
-          <a:p>
-            <a:pPr algn="r"/>
-            <a:r>
-              <a:rPr sz="4400" b="1" i="0">
-                <a:solidFill>
-                  <a:srgbClr val="0A4D8C"/>
-                </a:solidFill>
-                <a:latin typeface="Calibri"/>
-              </a:rPr>
-              <a:t>7</a:t>
-            </a:r>
-          </a:p>
-        </p:txBody>
-      </p:sp>
       <p:pic>
         <p:nvPicPr>
-          <p:cNvPr id="5" name="Picture 4" descr="oos_decay.png"/>
+          <p:cNvPr id="6" name="Picture 5" descr="oos_decay.png"/>
           <p:cNvPicPr>
             <a:picLocks noChangeAspect="1"/>
           </p:cNvPicPr>
@@ -7131,8 +7768,8 @@
         </p:blipFill>
         <p:spPr>
           <a:xfrm>
-            <a:off x="457200" y="1234440"/>
-            <a:ext cx="9789678" cy="3931920"/>
+            <a:off x="731520" y="1554480"/>
+            <a:ext cx="10472679" cy="4206240"/>
           </a:xfrm>
           <a:prstGeom prst="rect">
             <a:avLst/>
@@ -7141,23 +7778,25 @@
       </p:pic>
       <p:sp>
         <p:nvSpPr>
-          <p:cNvPr id="6" name="Rounded Rectangle 5"/>
+          <p:cNvPr id="7" name="Rectangle 6"/>
           <p:cNvSpPr/>
           <p:nvPr/>
         </p:nvSpPr>
         <p:spPr>
           <a:xfrm>
-            <a:off x="8092440" y="1234440"/>
-            <a:ext cx="3657600" cy="1920240"/>
-          </a:xfrm>
-          <a:prstGeom prst="roundRect">
+            <a:off x="7772400" y="1554480"/>
+            <a:ext cx="3687775" cy="4206240"/>
+          </a:xfrm>
+          <a:prstGeom prst="rect">
             <a:avLst/>
           </a:prstGeom>
           <a:solidFill>
-            <a:srgbClr val="003366"/>
+            <a:srgbClr val="FFFFFF"/>
           </a:solidFill>
-          <a:ln>
-            <a:noFill/>
+          <a:ln w="12700">
+            <a:solidFill>
+              <a:srgbClr val="E2E8F0"/>
+            </a:solidFill>
           </a:ln>
           <a:effectLst/>
         </p:spPr>
@@ -7176,45 +7815,108 @@
           </a:fontRef>
         </p:style>
         <p:txBody>
-          <a:bodyPr rtlCol="0" anchor="ctr" wrap="square"/>
+          <a:bodyPr rtlCol="0" anchor="ctr" wrap="square" lIns="256032" rIns="256032" tIns="256032"/>
           <a:lstStyle/>
           <a:p>
             <a:pPr algn="ctr"/>
             <a:r>
-              <a:rPr sz="3400" b="1">
-                <a:solidFill>
-                  <a:srgbClr val="FFFFFF"/>
-                </a:solidFill>
-                <a:latin typeface="Calibri"/>
-              </a:rPr>
-              <a:t>PBO = 60.0%</a:t>
-            </a:r>
-          </a:p>
-          <a:p>
-            <a:pPr algn="ctr"/>
-            <a:r>
-              <a:rPr sz="1100">
-                <a:solidFill>
-                  <a:srgbClr val="CBD5E1"/>
-                </a:solidFill>
-                <a:latin typeface="Calibri"/>
-              </a:rPr>
-              <a:t>95% CI: [44.4%, 73.3%] · 133 configs · 45 paths
-probability in-sample winner underperforms OOS</a:t>
-            </a:r>
-          </a:p>
-        </p:txBody>
-      </p:sp>
-      <p:sp>
-        <p:nvSpPr>
-          <p:cNvPr id="7" name="TextBox 6"/>
+              <a:rPr sz="1500" b="1">
+                <a:solidFill>
+                  <a:srgbClr val="132A52"/>
+                </a:solidFill>
+                <a:latin typeface="Trebuchet MS"/>
+              </a:rPr>
+              <a:t>Probability of Overfitting</a:t>
+            </a:r>
+          </a:p>
+          <a:p>
+            <a:pPr>
+              <a:spcBef>
+                <a:spcPts val="1200"/>
+              </a:spcBef>
+            </a:pPr>
+            <a:r>
+              <a:rPr sz="3600" b="1">
+                <a:solidFill>
+                  <a:srgbClr val="B91C1C"/>
+                </a:solidFill>
+                <a:latin typeface="Consolas"/>
+              </a:rPr>
+              <a:t>60.0%</a:t>
+            </a:r>
+          </a:p>
+          <a:p>
+            <a:r>
+              <a:rPr sz="950">
+                <a:solidFill>
+                  <a:srgbClr val="64748B"/>
+                </a:solidFill>
+                <a:latin typeface="Consolas"/>
+              </a:rPr>
+              <a:t>95% CI: [44.4%, 73.3%]
+(133 configs, 45 CPCV paths)</a:t>
+            </a:r>
+          </a:p>
+          <a:p>
+            <a:pPr>
+              <a:spcBef>
+                <a:spcPts val="1000"/>
+              </a:spcBef>
+            </a:pPr>
+            <a:r>
+              <a:rPr sz="1050">
+                <a:solidFill>
+                  <a:srgbClr val="0F172A"/>
+                </a:solidFill>
+                <a:latin typeface="Georgia"/>
+              </a:rPr>
+              <a:t>• Momentum Sharpe decays 52% from IS to OOS</a:t>
+            </a:r>
+          </a:p>
+          <a:p>
+            <a:pPr>
+              <a:spcBef>
+                <a:spcPts val="1000"/>
+              </a:spcBef>
+            </a:pPr>
+            <a:r>
+              <a:rPr sz="1050">
+                <a:solidFill>
+                  <a:srgbClr val="0F172A"/>
+                </a:solidFill>
+                <a:latin typeface="Georgia"/>
+              </a:rPr>
+              <a:t>• SMA Crossover decays 31% across test folds</a:t>
+            </a:r>
+          </a:p>
+          <a:p>
+            <a:pPr>
+              <a:spcBef>
+                <a:spcPts val="1000"/>
+              </a:spcBef>
+            </a:pPr>
+            <a:r>
+              <a:rPr sz="1050">
+                <a:solidFill>
+                  <a:srgbClr val="0F172A"/>
+                </a:solidFill>
+                <a:latin typeface="Georgia"/>
+              </a:rPr>
+              <a:t>• Marcos López de Prado CPCV with purge &amp; embargo removes temporal serial correlation</a:t>
+            </a:r>
+          </a:p>
+        </p:txBody>
+      </p:sp>
+      <p:sp>
+        <p:nvSpPr>
+          <p:cNvPr id="8" name="TextBox 7"/>
           <p:cNvSpPr txBox="1"/>
           <p:nvPr/>
         </p:nvSpPr>
         <p:spPr>
           <a:xfrm>
-            <a:off x="8092440" y="3383280"/>
-            <a:ext cx="3657600" cy="2011680"/>
+            <a:off x="731520" y="6446520"/>
+            <a:ext cx="10728655" cy="274320"/>
           </a:xfrm>
           <a:prstGeom prst="rect">
             <a:avLst/>
@@ -7222,169 +7924,19 @@
           <a:noFill/>
         </p:spPr>
         <p:txBody>
-          <a:bodyPr wrap="square">
+          <a:bodyPr wrap="none" lIns="0" tIns="0" rIns="0" bIns="0">
             <a:spAutoFit/>
           </a:bodyPr>
           <a:lstStyle/>
           <a:p>
-            <a:pPr>
-              <a:spcAft>
-                <a:spcPts val="1000"/>
-              </a:spcAft>
-            </a:pPr>
-            <a:r>
-              <a:rPr sz="1400">
-                <a:solidFill>
-                  <a:srgbClr val="1E293B"/>
-                </a:solidFill>
-                <a:latin typeface="Calibri"/>
-              </a:rPr>
-              <a:t>▪  Momentum decays 52% from IS to OOS</a:t>
-            </a:r>
-          </a:p>
-          <a:p>
-            <a:pPr>
-              <a:spcAft>
-                <a:spcPts val="1000"/>
-              </a:spcAft>
-            </a:pPr>
-            <a:r>
-              <a:rPr sz="1400">
-                <a:solidFill>
-                  <a:srgbClr val="1E293B"/>
-                </a:solidFill>
-                <a:latin typeface="Calibri"/>
-              </a:rPr>
-              <a:t>▪  SMA(10,30) decays 31%</a:t>
-            </a:r>
-          </a:p>
-          <a:p>
-            <a:pPr>
-              <a:spcAft>
-                <a:spcPts val="1000"/>
-              </a:spcAft>
-            </a:pPr>
-            <a:r>
-              <a:rPr sz="1400">
-                <a:solidFill>
-                  <a:srgbClr val="1E293B"/>
-                </a:solidFill>
-                <a:latin typeface="Calibri"/>
-              </a:rPr>
-              <a:t>▪  Embargo validated on AR(1) ground truth — leakage was detected, then removed</a:t>
-            </a:r>
-          </a:p>
-        </p:txBody>
-      </p:sp>
-      <p:sp>
-        <p:nvSpPr>
-          <p:cNvPr id="8" name="TextBox 7"/>
-          <p:cNvSpPr txBox="1"/>
-          <p:nvPr/>
-        </p:nvSpPr>
-        <p:spPr>
-          <a:xfrm>
-            <a:off x="548640" y="5440680"/>
-            <a:ext cx="11094415" cy="777240"/>
-          </a:xfrm>
-          <a:prstGeom prst="rect">
-            <a:avLst/>
-          </a:prstGeom>
-          <a:noFill/>
-        </p:spPr>
-        <p:txBody>
-          <a:bodyPr wrap="square" anchor="t">
-            <a:spAutoFit/>
-          </a:bodyPr>
-          <a:lstStyle/>
-          <a:p>
-            <a:pPr algn="ctr"/>
-            <a:r>
-              <a:rPr sz="1500" b="1" i="0">
-                <a:solidFill>
-                  <a:srgbClr val="CC0000"/>
-                </a:solidFill>
-                <a:latin typeface="Calibri"/>
-              </a:rPr>
-              <a:t>Choosing the best in-sample parameter set is a selection filter that loses roughly two times in three. That is not a caveat — it is the product.</a:t>
-            </a:r>
-          </a:p>
-        </p:txBody>
-      </p:sp>
-      <p:sp>
-        <p:nvSpPr>
-          <p:cNvPr id="9" name="Rectangle 8"/>
-          <p:cNvSpPr/>
-          <p:nvPr/>
-        </p:nvSpPr>
-        <p:spPr>
-          <a:xfrm>
-            <a:off x="0" y="6400800"/>
-            <a:ext cx="12191695" cy="457200"/>
-          </a:xfrm>
-          <a:prstGeom prst="rect">
-            <a:avLst/>
-          </a:prstGeom>
-          <a:solidFill>
-            <a:srgbClr val="003366"/>
-          </a:solidFill>
-          <a:ln>
-            <a:noFill/>
-          </a:ln>
-        </p:spPr>
-        <p:style>
-          <a:lnRef idx="1">
-            <a:schemeClr val="accent1"/>
-          </a:lnRef>
-          <a:fillRef idx="3">
-            <a:schemeClr val="accent1"/>
-          </a:fillRef>
-          <a:effectRef idx="2">
-            <a:schemeClr val="accent1"/>
-          </a:effectRef>
-          <a:fontRef idx="minor">
-            <a:schemeClr val="lt1"/>
-          </a:fontRef>
-        </p:style>
-        <p:txBody>
-          <a:bodyPr rtlCol="0" anchor="ctr"/>
-          <a:lstStyle/>
-          <a:p>
-            <a:pPr algn="ctr"/>
-          </a:p>
-        </p:txBody>
-      </p:sp>
-      <p:sp>
-        <p:nvSpPr>
-          <p:cNvPr id="10" name="TextBox 9"/>
-          <p:cNvSpPr txBox="1"/>
-          <p:nvPr/>
-        </p:nvSpPr>
-        <p:spPr>
-          <a:xfrm>
-            <a:off x="365760" y="6455664"/>
-            <a:ext cx="10058400" cy="365760"/>
-          </a:xfrm>
-          <a:prstGeom prst="rect">
-            <a:avLst/>
-          </a:prstGeom>
-          <a:noFill/>
-        </p:spPr>
-        <p:txBody>
-          <a:bodyPr wrap="square" anchor="ctr">
-            <a:spAutoFit/>
-          </a:bodyPr>
-          <a:lstStyle/>
-          <a:p>
-            <a:pPr algn="l"/>
-            <a:r>
-              <a:rPr sz="1000" b="0" i="0">
-                <a:solidFill>
-                  <a:srgbClr val="FFFFFF"/>
-                </a:solidFill>
-                <a:latin typeface="Calibri"/>
-              </a:rPr>
-              <a:t>GTU DI05000341 · Pramaan</a:t>
+            <a:r>
+              <a:rPr sz="900">
+                <a:solidFill>
+                  <a:srgbClr val="64748B"/>
+                </a:solidFill>
+                <a:latin typeface="Consolas"/>
+              </a:rPr>
+              <a:t>GTU DI05000341 Minor Project | Pramaan Architecture &amp; Verification</a:t>
             </a:r>
           </a:p>
         </p:txBody>
@@ -7403,7 +7955,7 @@
     <p:bg>
       <p:bgPr>
         <a:solidFill>
-          <a:srgbClr val="FFFFFF"/>
+          <a:srgbClr val="F8FAFC"/>
         </a:solidFill>
         <a:effectLst/>
       </p:bgPr>
@@ -7417,20 +7969,123 @@
       <p:grpSpPr/>
       <p:sp>
         <p:nvSpPr>
-          <p:cNvPr id="2" name="Rectangle 1"/>
+          <p:cNvPr id="2" name="TextBox 1"/>
+          <p:cNvSpPr txBox="1"/>
+          <p:nvPr/>
+        </p:nvSpPr>
+        <p:spPr>
+          <a:xfrm>
+            <a:off x="731520" y="411480"/>
+            <a:ext cx="7772400" cy="274320"/>
+          </a:xfrm>
+          <a:prstGeom prst="rect">
+            <a:avLst/>
+          </a:prstGeom>
+          <a:noFill/>
+        </p:spPr>
+        <p:txBody>
+          <a:bodyPr wrap="square" lIns="0" tIns="0" rIns="0" bIns="0">
+            <a:spAutoFit/>
+          </a:bodyPr>
+          <a:lstStyle/>
+          <a:p>
+            <a:r>
+              <a:rPr sz="950" b="1">
+                <a:solidFill>
+                  <a:srgbClr val="64748B"/>
+                </a:solidFill>
+                <a:latin typeface="Consolas"/>
+              </a:rPr>
+              <a:t>UNIT 4: QUALITY ASSURANCE &amp; ENGINEERING VERIFICATION</a:t>
+            </a:r>
+          </a:p>
+        </p:txBody>
+      </p:sp>
+      <p:sp>
+        <p:nvSpPr>
+          <p:cNvPr id="3" name="TextBox 2"/>
+          <p:cNvSpPr txBox="1"/>
+          <p:nvPr/>
+        </p:nvSpPr>
+        <p:spPr>
+          <a:xfrm>
+            <a:off x="731520" y="685800"/>
+            <a:ext cx="9144000" cy="594360"/>
+          </a:xfrm>
+          <a:prstGeom prst="rect">
+            <a:avLst/>
+          </a:prstGeom>
+          <a:noFill/>
+        </p:spPr>
+        <p:txBody>
+          <a:bodyPr wrap="square" lIns="0" tIns="0" rIns="0" bIns="0">
+            <a:spAutoFit/>
+          </a:bodyPr>
+          <a:lstStyle/>
+          <a:p>
+            <a:r>
+              <a:rPr sz="2200" b="1">
+                <a:solidFill>
+                  <a:srgbClr val="132A52"/>
+                </a:solidFill>
+                <a:latin typeface="Trebuchet MS"/>
+              </a:rPr>
+              <a:t>Engineering Discipline: Verification Ledger &amp; Test Suite</a:t>
+            </a:r>
+          </a:p>
+        </p:txBody>
+      </p:sp>
+      <p:sp>
+        <p:nvSpPr>
+          <p:cNvPr id="4" name="TextBox 3"/>
+          <p:cNvSpPr txBox="1"/>
+          <p:nvPr/>
+        </p:nvSpPr>
+        <p:spPr>
+          <a:xfrm>
+            <a:off x="10058400" y="411480"/>
+            <a:ext cx="1371600" cy="365760"/>
+          </a:xfrm>
+          <a:prstGeom prst="rect">
+            <a:avLst/>
+          </a:prstGeom>
+          <a:noFill/>
+        </p:spPr>
+        <p:txBody>
+          <a:bodyPr wrap="none" lIns="0" tIns="0" rIns="0" bIns="0">
+            <a:spAutoFit/>
+          </a:bodyPr>
+          <a:lstStyle/>
+          <a:p>
+            <a:pPr algn="r"/>
+            <a:r>
+              <a:rPr sz="1100" b="1">
+                <a:solidFill>
+                  <a:srgbClr val="64748B"/>
+                </a:solidFill>
+                <a:latin typeface="Consolas"/>
+              </a:rPr>
+              <a:t>08 / 10</a:t>
+            </a:r>
+          </a:p>
+        </p:txBody>
+      </p:sp>
+      <p:sp>
+        <p:nvSpPr>
+          <p:cNvPr id="5" name="Rectangle 4"/>
           <p:cNvSpPr/>
           <p:nvPr/>
         </p:nvSpPr>
         <p:spPr>
           <a:xfrm>
-            <a:off x="0" y="0"/>
-            <a:ext cx="12191695" cy="914400"/>
+            <a:off x="731520" y="1280160"/>
+            <a:ext cx="10728655" cy="13716"/>
           </a:xfrm>
           <a:prstGeom prst="rect">
             <a:avLst/>
           </a:prstGeom>
           <a:solidFill>
-            <a:srgbClr val="003366"/>
+            <a:srgbClr val="E2E8F0"/>
           </a:solidFill>
           <a:ln>
             <a:noFill/>
@@ -7460,94 +8115,24 @@
       </p:sp>
       <p:sp>
         <p:nvSpPr>
-          <p:cNvPr id="3" name="TextBox 2"/>
-          <p:cNvSpPr txBox="1"/>
+          <p:cNvPr id="6" name="Rectangle 5"/>
+          <p:cNvSpPr/>
           <p:nvPr/>
         </p:nvSpPr>
         <p:spPr>
           <a:xfrm>
-            <a:off x="457200" y="146304"/>
-            <a:ext cx="9601200" cy="640080"/>
+            <a:off x="731520" y="1554480"/>
+            <a:ext cx="5120640" cy="1280160"/>
           </a:xfrm>
           <a:prstGeom prst="rect">
             <a:avLst/>
           </a:prstGeom>
-          <a:noFill/>
-        </p:spPr>
-        <p:txBody>
-          <a:bodyPr wrap="square" anchor="ctr">
-            <a:spAutoFit/>
-          </a:bodyPr>
-          <a:lstStyle/>
-          <a:p>
-            <a:pPr algn="l"/>
-            <a:r>
-              <a:rPr sz="3000" b="1" i="0">
-                <a:solidFill>
-                  <a:srgbClr val="FFFFFF"/>
-                </a:solidFill>
-                <a:latin typeface="Calibri"/>
-              </a:rPr>
-              <a:t>Engineering Rigour</a:t>
-            </a:r>
-          </a:p>
-        </p:txBody>
-      </p:sp>
-      <p:sp>
-        <p:nvSpPr>
-          <p:cNvPr id="4" name="TextBox 3"/>
-          <p:cNvSpPr txBox="1"/>
-          <p:nvPr/>
-        </p:nvSpPr>
-        <p:spPr>
-          <a:xfrm>
-            <a:off x="11140135" y="146304"/>
-            <a:ext cx="685800" cy="640080"/>
-          </a:xfrm>
-          <a:prstGeom prst="rect">
-            <a:avLst/>
-          </a:prstGeom>
-          <a:noFill/>
-        </p:spPr>
-        <p:txBody>
-          <a:bodyPr wrap="square" anchor="ctr">
-            <a:spAutoFit/>
-          </a:bodyPr>
-          <a:lstStyle/>
-          <a:p>
-            <a:pPr algn="r"/>
-            <a:r>
-              <a:rPr sz="4400" b="1" i="0">
-                <a:solidFill>
-                  <a:srgbClr val="0A4D8C"/>
-                </a:solidFill>
-                <a:latin typeface="Calibri"/>
-              </a:rPr>
-              <a:t>8</a:t>
-            </a:r>
-          </a:p>
-        </p:txBody>
-      </p:sp>
-      <p:sp>
-        <p:nvSpPr>
-          <p:cNvPr id="5" name="Rounded Rectangle 4"/>
-          <p:cNvSpPr/>
-          <p:nvPr/>
-        </p:nvSpPr>
-        <p:spPr>
-          <a:xfrm>
-            <a:off x="640080" y="1325880"/>
-            <a:ext cx="5486400" cy="1417320"/>
-          </a:xfrm>
-          <a:prstGeom prst="roundRect">
-            <a:avLst/>
-          </a:prstGeom>
           <a:solidFill>
-            <a:srgbClr val="F1F5F9"/>
+            <a:srgbClr val="FFFFFF"/>
           </a:solidFill>
-          <a:ln w="19050">
+          <a:ln w="12700">
             <a:solidFill>
-              <a:srgbClr val="167A3C"/>
+              <a:srgbClr val="E2E8F0"/>
             </a:solidFill>
           </a:ln>
           <a:effectLst/>
@@ -7567,53 +8152,58 @@
           </a:fontRef>
         </p:style>
         <p:txBody>
-          <a:bodyPr rtlCol="0" anchor="ctr" wrap="square" lIns="228600"/>
+          <a:bodyPr rtlCol="0" anchor="ctr" lIns="228600" tIns="182880"/>
           <a:lstStyle/>
           <a:p>
             <a:pPr algn="ctr"/>
             <a:r>
-              <a:rPr sz="2100" b="1">
-                <a:solidFill>
-                  <a:srgbClr val="167A3C"/>
-                </a:solidFill>
-                <a:latin typeface="Calibri"/>
-              </a:rPr>
-              <a:t>72 automated tests</a:t>
-            </a:r>
-          </a:p>
-          <a:p>
-            <a:r>
-              <a:rPr sz="1300">
-                <a:solidFill>
-                  <a:srgbClr val="1E293B"/>
-                </a:solidFill>
-                <a:latin typeface="Calibri"/>
-              </a:rPr>
-              <a:t>up from 9 at baseline (100% offline via seeded fixtures)</a:t>
-            </a:r>
-          </a:p>
-        </p:txBody>
-      </p:sp>
-      <p:sp>
-        <p:nvSpPr>
-          <p:cNvPr id="6" name="Rounded Rectangle 5"/>
+              <a:rPr sz="1400" b="1">
+                <a:solidFill>
+                  <a:srgbClr val="047857"/>
+                </a:solidFill>
+                <a:latin typeface="Trebuchet MS"/>
+              </a:rPr>
+              <a:t>72 Automated Offline Tests (100% Green)</a:t>
+            </a:r>
+          </a:p>
+          <a:p>
+            <a:pPr>
+              <a:spcBef>
+                <a:spcPts val="400"/>
+              </a:spcBef>
+            </a:pPr>
+            <a:r>
+              <a:rPr sz="1050">
+                <a:solidFill>
+                  <a:srgbClr val="0F172A"/>
+                </a:solidFill>
+                <a:latin typeface="Georgia"/>
+              </a:rPr>
+              <a:t>Unit tests cover execution timing, cash ledger invariant (cash &gt;= 0), portfolio reconciliation, and cost computation without network calls.</a:t>
+            </a:r>
+          </a:p>
+        </p:txBody>
+      </p:sp>
+      <p:sp>
+        <p:nvSpPr>
+          <p:cNvPr id="7" name="Rectangle 6"/>
           <p:cNvSpPr/>
           <p:nvPr/>
         </p:nvSpPr>
         <p:spPr>
           <a:xfrm>
-            <a:off x="640080" y="2926080"/>
-            <a:ext cx="5486400" cy="1417320"/>
-          </a:xfrm>
-          <a:prstGeom prst="roundRect">
+            <a:off x="731520" y="3017520"/>
+            <a:ext cx="5120640" cy="1280160"/>
+          </a:xfrm>
+          <a:prstGeom prst="rect">
             <a:avLst/>
           </a:prstGeom>
           <a:solidFill>
-            <a:srgbClr val="F1F5F9"/>
+            <a:srgbClr val="FFFFFF"/>
           </a:solidFill>
-          <a:ln w="19050">
+          <a:ln w="12700">
             <a:solidFill>
-              <a:srgbClr val="B42828"/>
+              <a:srgbClr val="E2E8F0"/>
             </a:solidFill>
           </a:ln>
           <a:effectLst/>
@@ -7633,53 +8223,58 @@
           </a:fontRef>
         </p:style>
         <p:txBody>
-          <a:bodyPr rtlCol="0" anchor="ctr" wrap="square" lIns="228600"/>
+          <a:bodyPr rtlCol="0" anchor="ctr" lIns="228600" tIns="182880"/>
           <a:lstStyle/>
           <a:p>
             <a:pPr algn="ctr"/>
             <a:r>
-              <a:rPr sz="2100" b="1">
-                <a:solidFill>
-                  <a:srgbClr val="B42828"/>
-                </a:solidFill>
-                <a:latin typeface="Calibri"/>
-              </a:rPr>
-              <a:t>5 defects found by testing</a:t>
-            </a:r>
-          </a:p>
-          <a:p>
-            <a:r>
-              <a:rPr sz="1300">
-                <a:solidFill>
-                  <a:srgbClr val="1E293B"/>
-                </a:solidFill>
-                <a:latin typeface="Calibri"/>
-              </a:rPr>
-              <a:t>RSI inverted signal, duplicate dates, missing scipy, synthetic charts, cash-based sizing</a:t>
-            </a:r>
-          </a:p>
-        </p:txBody>
-      </p:sp>
-      <p:sp>
-        <p:nvSpPr>
-          <p:cNvPr id="7" name="Rounded Rectangle 6"/>
+              <a:rPr sz="1400" b="1">
+                <a:solidFill>
+                  <a:srgbClr val="B91C1C"/>
+                </a:solidFill>
+                <a:latin typeface="Trebuchet MS"/>
+              </a:rPr>
+              <a:t>5 Critical Defects Caught via Automated Testing</a:t>
+            </a:r>
+          </a:p>
+          <a:p>
+            <a:pPr>
+              <a:spcBef>
+                <a:spcPts val="400"/>
+              </a:spcBef>
+            </a:pPr>
+            <a:r>
+              <a:rPr sz="1050">
+                <a:solidFill>
+                  <a:srgbClr val="0F172A"/>
+                </a:solidFill>
+                <a:latin typeface="Georgia"/>
+              </a:rPr>
+              <a:t>1) Inverted RSI logic, 2) Duplicate datetime indexation, 3) Missing scipy dependency, 4) Synthetic benchmark curves, 5) Cash vs equity position sizing.</a:t>
+            </a:r>
+          </a:p>
+        </p:txBody>
+      </p:sp>
+      <p:sp>
+        <p:nvSpPr>
+          <p:cNvPr id="8" name="Rectangle 7"/>
           <p:cNvSpPr/>
           <p:nvPr/>
         </p:nvSpPr>
         <p:spPr>
           <a:xfrm>
-            <a:off x="640080" y="4526280"/>
-            <a:ext cx="5486400" cy="1417320"/>
-          </a:xfrm>
-          <a:prstGeom prst="roundRect">
+            <a:off x="731520" y="4480560"/>
+            <a:ext cx="5120640" cy="1280160"/>
+          </a:xfrm>
+          <a:prstGeom prst="rect">
             <a:avLst/>
           </a:prstGeom>
           <a:solidFill>
-            <a:srgbClr val="F1F5F9"/>
+            <a:srgbClr val="FFFFFF"/>
           </a:solidFill>
-          <a:ln w="19050">
+          <a:ln w="12700">
             <a:solidFill>
-              <a:srgbClr val="167A3C"/>
+              <a:srgbClr val="E2E8F0"/>
             </a:solidFill>
           </a:ln>
           <a:effectLst/>
@@ -7699,223 +8294,61 @@
           </a:fontRef>
         </p:style>
         <p:txBody>
-          <a:bodyPr rtlCol="0" anchor="ctr" wrap="square" lIns="228600"/>
+          <a:bodyPr rtlCol="0" anchor="ctr" lIns="228600" tIns="182880"/>
           <a:lstStyle/>
           <a:p>
             <a:pPr algn="ctr"/>
             <a:r>
-              <a:rPr sz="2100" b="1">
-                <a:solidFill>
-                  <a:srgbClr val="167A3C"/>
-                </a:solidFill>
-                <a:latin typeface="Calibri"/>
-              </a:rPr>
-              <a:t>Determinism enforced</a:t>
-            </a:r>
-          </a:p>
-          <a:p>
-            <a:r>
-              <a:rPr sz="1300">
-                <a:solidFill>
-                  <a:srgbClr val="1E293B"/>
-                </a:solidFill>
-                <a:latin typeface="Calibri"/>
-              </a:rPr>
-              <a:t>byte-identical equity curve, verified by hash</a:t>
-            </a:r>
-          </a:p>
-        </p:txBody>
-      </p:sp>
-      <p:sp>
-        <p:nvSpPr>
-          <p:cNvPr id="8" name="TextBox 7"/>
-          <p:cNvSpPr txBox="1"/>
-          <p:nvPr/>
-        </p:nvSpPr>
-        <p:spPr>
-          <a:xfrm>
-            <a:off x="6492240" y="1325880"/>
-            <a:ext cx="5120640" cy="457200"/>
-          </a:xfrm>
-          <a:prstGeom prst="rect">
-            <a:avLst/>
-          </a:prstGeom>
-          <a:noFill/>
-        </p:spPr>
-        <p:txBody>
-          <a:bodyPr wrap="square" anchor="t">
-            <a:spAutoFit/>
-          </a:bodyPr>
-          <a:lstStyle/>
-          <a:p>
-            <a:pPr algn="l"/>
-            <a:r>
-              <a:rPr sz="1900" b="1" i="0">
-                <a:solidFill>
-                  <a:srgbClr val="003366"/>
-                </a:solidFill>
-                <a:latin typeface="Calibri"/>
-              </a:rPr>
-              <a:t>Verification discipline</a:t>
-            </a:r>
-          </a:p>
-        </p:txBody>
-      </p:sp>
-      <p:sp>
-        <p:nvSpPr>
-          <p:cNvPr id="9" name="TextBox 8"/>
-          <p:cNvSpPr txBox="1"/>
-          <p:nvPr/>
-        </p:nvSpPr>
-        <p:spPr>
-          <a:xfrm>
-            <a:off x="6492240" y="1828800"/>
-            <a:ext cx="5120640" cy="3840480"/>
-          </a:xfrm>
-          <a:prstGeom prst="rect">
-            <a:avLst/>
-          </a:prstGeom>
-          <a:noFill/>
-        </p:spPr>
-        <p:txBody>
-          <a:bodyPr wrap="square">
-            <a:spAutoFit/>
-          </a:bodyPr>
-          <a:lstStyle/>
+              <a:rPr sz="1400" b="1">
+                <a:solidFill>
+                  <a:srgbClr val="132A52"/>
+                </a:solidFill>
+                <a:latin typeface="Trebuchet MS"/>
+              </a:rPr>
+              <a:t>Deterministic Execution Guarantee</a:t>
+            </a:r>
+          </a:p>
           <a:p>
             <a:pPr>
-              <a:spcAft>
-                <a:spcPts val="1100"/>
-              </a:spcAft>
+              <a:spcBef>
+                <a:spcPts val="400"/>
+              </a:spcBef>
             </a:pPr>
             <a:r>
-              <a:rPr sz="1500">
-                <a:solidFill>
-                  <a:srgbClr val="1E293B"/>
-                </a:solidFill>
-                <a:latin typeface="Calibri"/>
-              </a:rPr>
-              <a:t>▪  Every claim carries a verification record — method and evidence path</a:t>
-            </a:r>
-          </a:p>
-          <a:p>
-            <a:pPr>
-              <a:spcAft>
-                <a:spcPts val="1100"/>
-              </a:spcAft>
-            </a:pPr>
-            <a:r>
-              <a:rPr sz="1500">
-                <a:solidFill>
-                  <a:srgbClr val="1E293B"/>
-                </a:solidFill>
-                <a:latin typeface="Calibri"/>
-              </a:rPr>
-              <a:t>▪  Positive and negative results are logged with equal weight</a:t>
-            </a:r>
-          </a:p>
-          <a:p>
-            <a:pPr>
-              <a:spcAft>
-                <a:spcPts val="1100"/>
-              </a:spcAft>
-            </a:pPr>
-            <a:r>
-              <a:rPr sz="1500">
-                <a:solidFill>
-                  <a:srgbClr val="1E293B"/>
-                </a:solidFill>
-                <a:latin typeface="Calibri"/>
-              </a:rPr>
-              <a:t>▪  Every figure carries a parameter stamp tying it to a run ID</a:t>
-            </a:r>
-          </a:p>
-          <a:p>
-            <a:pPr>
-              <a:spcAft>
-                <a:spcPts val="1100"/>
-              </a:spcAft>
-            </a:pPr>
-            <a:r>
-              <a:rPr sz="1500">
-                <a:solidFill>
-                  <a:srgbClr val="1E293B"/>
-                </a:solidFill>
-                <a:latin typeface="Calibri"/>
-              </a:rPr>
-              <a:t>▪  Reproduce everything with clean checkout commands:</a:t>
-            </a:r>
-          </a:p>
-          <a:p>
-            <a:pPr>
-              <a:spcAft>
-                <a:spcPts val="1100"/>
-              </a:spcAft>
-            </a:pPr>
-            <a:r>
-              <a:rPr sz="1300" b="1">
-                <a:solidFill>
-                  <a:srgbClr val="CC0000"/>
-                </a:solidFill>
-                <a:latin typeface="Calibri"/>
-              </a:rPr>
-              <a:t>python scripts/run_experiments.py</a:t>
-            </a:r>
-          </a:p>
-          <a:p>
-            <a:pPr>
-              <a:spcAft>
-                <a:spcPts val="1100"/>
-              </a:spcAft>
-            </a:pPr>
-            <a:r>
-              <a:rPr sz="1300" b="1">
-                <a:solidFill>
-                  <a:srgbClr val="CC0000"/>
-                </a:solidFill>
-                <a:latin typeface="Calibri"/>
-              </a:rPr>
-              <a:t>python scripts/generate_real_charts.py</a:t>
-            </a:r>
-          </a:p>
-          <a:p>
-            <a:pPr>
-              <a:spcAft>
-                <a:spcPts val="1100"/>
-              </a:spcAft>
-            </a:pPr>
-            <a:r>
-              <a:rPr sz="1300" b="1">
-                <a:solidFill>
-                  <a:srgbClr val="167A3C"/>
-                </a:solidFill>
-                <a:latin typeface="Calibri"/>
-              </a:rPr>
-              <a:t>Then: pytest tests/ -q  →  72 passed in ~7s</a:t>
-            </a:r>
-          </a:p>
-        </p:txBody>
-      </p:sp>
-      <p:sp>
-        <p:nvSpPr>
-          <p:cNvPr id="10" name="Rectangle 9"/>
+              <a:rPr sz="1050">
+                <a:solidFill>
+                  <a:srgbClr val="0F172A"/>
+                </a:solidFill>
+                <a:latin typeface="Georgia"/>
+              </a:rPr>
+              <a:t>Every backtest run generates a deterministic hash: SHA-256(strategy, params, universe, dates, cost_version) ensuring byte-for-byte reproducibility.</a:t>
+            </a:r>
+          </a:p>
+        </p:txBody>
+      </p:sp>
+      <p:sp>
+        <p:nvSpPr>
+          <p:cNvPr id="9" name="Rectangle 8"/>
           <p:cNvSpPr/>
           <p:nvPr/>
         </p:nvSpPr>
         <p:spPr>
           <a:xfrm>
-            <a:off x="0" y="6400800"/>
-            <a:ext cx="12191695" cy="457200"/>
+            <a:off x="6156655" y="1554480"/>
+            <a:ext cx="5303520" cy="4206240"/>
           </a:xfrm>
           <a:prstGeom prst="rect">
             <a:avLst/>
           </a:prstGeom>
           <a:solidFill>
-            <a:srgbClr val="003366"/>
+            <a:srgbClr val="FFFFFF"/>
           </a:solidFill>
-          <a:ln>
-            <a:noFill/>
+          <a:ln w="12700">
+            <a:solidFill>
+              <a:srgbClr val="E2E8F0"/>
+            </a:solidFill>
           </a:ln>
+          <a:effectLst/>
         </p:spPr>
         <p:style>
           <a:lnRef idx="1">
@@ -7932,23 +8365,176 @@
           </a:fontRef>
         </p:style>
         <p:txBody>
-          <a:bodyPr rtlCol="0" anchor="ctr"/>
+          <a:bodyPr rtlCol="0" anchor="ctr" lIns="274320" tIns="274320"/>
           <a:lstStyle/>
           <a:p>
             <a:pPr algn="ctr"/>
-          </a:p>
-        </p:txBody>
-      </p:sp>
-      <p:sp>
-        <p:nvSpPr>
-          <p:cNvPr id="11" name="TextBox 10"/>
+            <a:r>
+              <a:rPr sz="1500" b="1">
+                <a:solidFill>
+                  <a:srgbClr val="132A52"/>
+                </a:solidFill>
+                <a:latin typeface="Trebuchet MS"/>
+              </a:rPr>
+              <a:t>Clean-Room Reproducibility Protocol</a:t>
+            </a:r>
+          </a:p>
+          <a:p>
+            <a:pPr>
+              <a:spcBef>
+                <a:spcPts val="1000"/>
+              </a:spcBef>
+            </a:pPr>
+            <a:r>
+              <a:rPr sz="1100" b="1">
+                <a:solidFill>
+                  <a:srgbClr val="0F172A"/>
+                </a:solidFill>
+                <a:latin typeface="Trebuchet MS"/>
+              </a:rPr>
+              <a:t>Run Experiments Pipeline</a:t>
+            </a:r>
+          </a:p>
+          <a:p>
+            <a:pPr>
+              <a:spcBef>
+                <a:spcPts val="200"/>
+              </a:spcBef>
+            </a:pPr>
+            <a:r>
+              <a:rPr sz="1000">
+                <a:solidFill>
+                  <a:srgbClr val="132A52"/>
+                </a:solidFill>
+                <a:latin typeface="Consolas"/>
+              </a:rPr>
+              <a:t>$ python scripts/run_experiments.py</a:t>
+            </a:r>
+          </a:p>
+          <a:p>
+            <a:pPr>
+              <a:spcBef>
+                <a:spcPts val="1000"/>
+              </a:spcBef>
+            </a:pPr>
+            <a:r>
+              <a:rPr sz="1100" b="1">
+                <a:solidFill>
+                  <a:srgbClr val="0F172A"/>
+                </a:solidFill>
+                <a:latin typeface="Trebuchet MS"/>
+              </a:rPr>
+              <a:t>Generate Validated Charts</a:t>
+            </a:r>
+          </a:p>
+          <a:p>
+            <a:pPr>
+              <a:spcBef>
+                <a:spcPts val="200"/>
+              </a:spcBef>
+            </a:pPr>
+            <a:r>
+              <a:rPr sz="1000">
+                <a:solidFill>
+                  <a:srgbClr val="132A52"/>
+                </a:solidFill>
+                <a:latin typeface="Consolas"/>
+              </a:rPr>
+              <a:t>$ python scripts/generate_real_charts.py</a:t>
+            </a:r>
+          </a:p>
+          <a:p>
+            <a:pPr>
+              <a:spcBef>
+                <a:spcPts val="1000"/>
+              </a:spcBef>
+            </a:pPr>
+            <a:r>
+              <a:rPr sz="1100" b="1">
+                <a:solidFill>
+                  <a:srgbClr val="0F172A"/>
+                </a:solidFill>
+                <a:latin typeface="Trebuchet MS"/>
+              </a:rPr>
+              <a:t>Execute Full Test Suite</a:t>
+            </a:r>
+          </a:p>
+          <a:p>
+            <a:pPr>
+              <a:spcBef>
+                <a:spcPts val="200"/>
+              </a:spcBef>
+            </a:pPr>
+            <a:r>
+              <a:rPr sz="1000">
+                <a:solidFill>
+                  <a:srgbClr val="132A52"/>
+                </a:solidFill>
+                <a:latin typeface="Consolas"/>
+              </a:rPr>
+              <a:t>$ pytest tests/ -q  (72 passed in ~7s)</a:t>
+            </a:r>
+          </a:p>
+          <a:p>
+            <a:pPr>
+              <a:spcBef>
+                <a:spcPts val="1000"/>
+              </a:spcBef>
+            </a:pPr>
+            <a:r>
+              <a:rPr sz="1100" b="1">
+                <a:solidFill>
+                  <a:srgbClr val="0F172A"/>
+                </a:solidFill>
+                <a:latin typeface="Trebuchet MS"/>
+              </a:rPr>
+              <a:t>Launch API / Tauri Desktop</a:t>
+            </a:r>
+          </a:p>
+          <a:p>
+            <a:pPr>
+              <a:spcBef>
+                <a:spcPts val="200"/>
+              </a:spcBef>
+            </a:pPr>
+            <a:r>
+              <a:rPr sz="1000">
+                <a:solidFill>
+                  <a:srgbClr val="132A52"/>
+                </a:solidFill>
+                <a:latin typeface="Consolas"/>
+              </a:rPr>
+              <a:t>$ pramaan-desktop  (auto-spawns FastAPI)</a:t>
+            </a:r>
+          </a:p>
+          <a:p>
+            <a:pPr>
+              <a:spcBef>
+                <a:spcPts val="1400"/>
+              </a:spcBef>
+            </a:pPr>
+            <a:r>
+              <a:rPr sz="1050" i="1">
+                <a:solidFill>
+                  <a:srgbClr val="64748B"/>
+                </a:solidFill>
+                <a:latin typeface="Georgia"/>
+              </a:rPr>
+              <a:t>Verification Ledger Rule: Over 120 verified claims tracked in .agent/01_verification_ledger.md. No claim is made without command evidence.</a:t>
+            </a:r>
+          </a:p>
+        </p:txBody>
+      </p:sp>
+      <p:sp>
+        <p:nvSpPr>
+          <p:cNvPr id="10" name="TextBox 9"/>
           <p:cNvSpPr txBox="1"/>
           <p:nvPr/>
         </p:nvSpPr>
         <p:spPr>
           <a:xfrm>
-            <a:off x="365760" y="6455664"/>
-            <a:ext cx="10058400" cy="365760"/>
+            <a:off x="731520" y="6446520"/>
+            <a:ext cx="10728655" cy="274320"/>
           </a:xfrm>
           <a:prstGeom prst="rect">
             <a:avLst/>
@@ -7956,20 +8542,19 @@
           <a:noFill/>
         </p:spPr>
         <p:txBody>
-          <a:bodyPr wrap="square" anchor="ctr">
+          <a:bodyPr wrap="none" lIns="0" tIns="0" rIns="0" bIns="0">
             <a:spAutoFit/>
           </a:bodyPr>
           <a:lstStyle/>
           <a:p>
-            <a:pPr algn="l"/>
-            <a:r>
-              <a:rPr sz="1000" b="0" i="0">
-                <a:solidFill>
-                  <a:srgbClr val="FFFFFF"/>
-                </a:solidFill>
-                <a:latin typeface="Calibri"/>
-              </a:rPr>
-              <a:t>GTU DI05000341 · Pramaan</a:t>
+            <a:r>
+              <a:rPr sz="900">
+                <a:solidFill>
+                  <a:srgbClr val="64748B"/>
+                </a:solidFill>
+                <a:latin typeface="Consolas"/>
+              </a:rPr>
+              <a:t>GTU DI05000341 Minor Project | Pramaan Architecture &amp; Verification</a:t>
             </a:r>
           </a:p>
         </p:txBody>
@@ -7988,7 +8573,7 @@
     <p:bg>
       <p:bgPr>
         <a:solidFill>
-          <a:srgbClr val="FFFFFF"/>
+          <a:srgbClr val="F8FAFC"/>
         </a:solidFill>
         <a:effectLst/>
       </p:bgPr>
@@ -8002,20 +8587,123 @@
       <p:grpSpPr/>
       <p:sp>
         <p:nvSpPr>
-          <p:cNvPr id="2" name="Rectangle 1"/>
+          <p:cNvPr id="2" name="TextBox 1"/>
+          <p:cNvSpPr txBox="1"/>
+          <p:nvPr/>
+        </p:nvSpPr>
+        <p:spPr>
+          <a:xfrm>
+            <a:off x="731520" y="411480"/>
+            <a:ext cx="7772400" cy="274320"/>
+          </a:xfrm>
+          <a:prstGeom prst="rect">
+            <a:avLst/>
+          </a:prstGeom>
+          <a:noFill/>
+        </p:spPr>
+        <p:txBody>
+          <a:bodyPr wrap="square" lIns="0" tIns="0" rIns="0" bIns="0">
+            <a:spAutoFit/>
+          </a:bodyPr>
+          <a:lstStyle/>
+          <a:p>
+            <a:r>
+              <a:rPr sz="950" b="1">
+                <a:solidFill>
+                  <a:srgbClr val="64748B"/>
+                </a:solidFill>
+                <a:latin typeface="Consolas"/>
+              </a:rPr>
+              <a:t>UNIT 5: PROJECT SCOPE &amp; ENGINEERING CONSTRAINTS</a:t>
+            </a:r>
+          </a:p>
+        </p:txBody>
+      </p:sp>
+      <p:sp>
+        <p:nvSpPr>
+          <p:cNvPr id="3" name="TextBox 2"/>
+          <p:cNvSpPr txBox="1"/>
+          <p:nvPr/>
+        </p:nvSpPr>
+        <p:spPr>
+          <a:xfrm>
+            <a:off x="731520" y="685800"/>
+            <a:ext cx="9144000" cy="594360"/>
+          </a:xfrm>
+          <a:prstGeom prst="rect">
+            <a:avLst/>
+          </a:prstGeom>
+          <a:noFill/>
+        </p:spPr>
+        <p:txBody>
+          <a:bodyPr wrap="square" lIns="0" tIns="0" rIns="0" bIns="0">
+            <a:spAutoFit/>
+          </a:bodyPr>
+          <a:lstStyle/>
+          <a:p>
+            <a:r>
+              <a:rPr sz="2200" b="1">
+                <a:solidFill>
+                  <a:srgbClr val="132A52"/>
+                </a:solidFill>
+                <a:latin typeface="Trebuchet MS"/>
+              </a:rPr>
+              <a:t>Architectural Scope Boundaries: What Pramaan Is NOT</a:t>
+            </a:r>
+          </a:p>
+        </p:txBody>
+      </p:sp>
+      <p:sp>
+        <p:nvSpPr>
+          <p:cNvPr id="4" name="TextBox 3"/>
+          <p:cNvSpPr txBox="1"/>
+          <p:nvPr/>
+        </p:nvSpPr>
+        <p:spPr>
+          <a:xfrm>
+            <a:off x="10058400" y="411480"/>
+            <a:ext cx="1371600" cy="365760"/>
+          </a:xfrm>
+          <a:prstGeom prst="rect">
+            <a:avLst/>
+          </a:prstGeom>
+          <a:noFill/>
+        </p:spPr>
+        <p:txBody>
+          <a:bodyPr wrap="none" lIns="0" tIns="0" rIns="0" bIns="0">
+            <a:spAutoFit/>
+          </a:bodyPr>
+          <a:lstStyle/>
+          <a:p>
+            <a:pPr algn="r"/>
+            <a:r>
+              <a:rPr sz="1100" b="1">
+                <a:solidFill>
+                  <a:srgbClr val="64748B"/>
+                </a:solidFill>
+                <a:latin typeface="Consolas"/>
+              </a:rPr>
+              <a:t>09 / 10</a:t>
+            </a:r>
+          </a:p>
+        </p:txBody>
+      </p:sp>
+      <p:sp>
+        <p:nvSpPr>
+          <p:cNvPr id="5" name="Rectangle 4"/>
           <p:cNvSpPr/>
           <p:nvPr/>
         </p:nvSpPr>
         <p:spPr>
           <a:xfrm>
-            <a:off x="0" y="0"/>
-            <a:ext cx="12191695" cy="914400"/>
+            <a:off x="731520" y="1280160"/>
+            <a:ext cx="10728655" cy="13716"/>
           </a:xfrm>
           <a:prstGeom prst="rect">
             <a:avLst/>
           </a:prstGeom>
           <a:solidFill>
-            <a:srgbClr val="003366"/>
+            <a:srgbClr val="E2E8F0"/>
           </a:solidFill>
           <a:ln>
             <a:noFill/>
@@ -8045,94 +8733,24 @@
       </p:sp>
       <p:sp>
         <p:nvSpPr>
-          <p:cNvPr id="3" name="TextBox 2"/>
-          <p:cNvSpPr txBox="1"/>
+          <p:cNvPr id="6" name="Rectangle 5"/>
+          <p:cNvSpPr/>
           <p:nvPr/>
         </p:nvSpPr>
         <p:spPr>
           <a:xfrm>
-            <a:off x="457200" y="146304"/>
-            <a:ext cx="9601200" cy="640080"/>
+            <a:off x="731520" y="1554480"/>
+            <a:ext cx="10728655" cy="749808"/>
           </a:xfrm>
           <a:prstGeom prst="rect">
             <a:avLst/>
           </a:prstGeom>
-          <a:noFill/>
-        </p:spPr>
-        <p:txBody>
-          <a:bodyPr wrap="square" anchor="ctr">
-            <a:spAutoFit/>
-          </a:bodyPr>
-          <a:lstStyle/>
-          <a:p>
-            <a:pPr algn="l"/>
-            <a:r>
-              <a:rPr sz="3000" b="1" i="0">
-                <a:solidFill>
-                  <a:srgbClr val="FFFFFF"/>
-                </a:solidFill>
-                <a:latin typeface="Calibri"/>
-              </a:rPr>
-              <a:t>What Pramaan Is Not</a:t>
-            </a:r>
-          </a:p>
-        </p:txBody>
-      </p:sp>
-      <p:sp>
-        <p:nvSpPr>
-          <p:cNvPr id="4" name="TextBox 3"/>
-          <p:cNvSpPr txBox="1"/>
-          <p:nvPr/>
-        </p:nvSpPr>
-        <p:spPr>
-          <a:xfrm>
-            <a:off x="11140135" y="146304"/>
-            <a:ext cx="685800" cy="640080"/>
-          </a:xfrm>
-          <a:prstGeom prst="rect">
-            <a:avLst/>
-          </a:prstGeom>
-          <a:noFill/>
-        </p:spPr>
-        <p:txBody>
-          <a:bodyPr wrap="square" anchor="ctr">
-            <a:spAutoFit/>
-          </a:bodyPr>
-          <a:lstStyle/>
-          <a:p>
-            <a:pPr algn="r"/>
-            <a:r>
-              <a:rPr sz="4400" b="1" i="0">
-                <a:solidFill>
-                  <a:srgbClr val="0A4D8C"/>
-                </a:solidFill>
-                <a:latin typeface="Calibri"/>
-              </a:rPr>
-              <a:t>9</a:t>
-            </a:r>
-          </a:p>
-        </p:txBody>
-      </p:sp>
-      <p:sp>
-        <p:nvSpPr>
-          <p:cNvPr id="5" name="Rounded Rectangle 4"/>
-          <p:cNvSpPr/>
-          <p:nvPr/>
-        </p:nvSpPr>
-        <p:spPr>
-          <a:xfrm>
-            <a:off x="914400" y="1325880"/>
-            <a:ext cx="10362895" cy="777240"/>
-          </a:xfrm>
-          <a:prstGeom prst="roundRect">
-            <a:avLst/>
-          </a:prstGeom>
           <a:solidFill>
-            <a:srgbClr val="FDF2F2"/>
+            <a:srgbClr val="FFFFFF"/>
           </a:solidFill>
-          <a:ln w="15240">
+          <a:ln w="12700">
             <a:solidFill>
-              <a:srgbClr val="B42828"/>
+              <a:srgbClr val="E2E8F0"/>
             </a:solidFill>
           </a:ln>
           <a:effectLst/>
@@ -8157,46 +8775,46 @@
           <a:p>
             <a:pPr algn="ctr"/>
             <a:r>
-              <a:rPr sz="1700" b="1">
-                <a:solidFill>
-                  <a:srgbClr val="B42828"/>
-                </a:solidFill>
-                <a:latin typeface="Calibri"/>
-              </a:rPr>
-              <a:t>No live trading   </a:t>
-            </a:r>
-            <a:r>
-              <a:rPr sz="1400">
-                <a:solidFill>
-                  <a:srgbClr val="1E293B"/>
-                </a:solidFill>
-                <a:latin typeface="Calibri"/>
-              </a:rPr>
-              <a:t>No broker connection, no order routing, no execution.</a:t>
-            </a:r>
-          </a:p>
-        </p:txBody>
-      </p:sp>
-      <p:sp>
-        <p:nvSpPr>
-          <p:cNvPr id="6" name="Rounded Rectangle 5"/>
+              <a:rPr sz="1250" b="1">
+                <a:solidFill>
+                  <a:srgbClr val="B91C1C"/>
+                </a:solidFill>
+                <a:latin typeface="Trebuchet MS"/>
+              </a:rPr>
+              <a:t>No Live Broker Connectivity  —  </a:t>
+            </a:r>
+            <a:r>
+              <a:rPr sz="1100">
+                <a:solidFill>
+                  <a:srgbClr val="0F172A"/>
+                </a:solidFill>
+                <a:latin typeface="Georgia"/>
+              </a:rPr>
+              <a:t>Pramaan is strictly an offline simulation and statistical diagnostic platform. It does not connect to broker APIs (Zerodha Kite, Upstox) or execute real financial capital.</a:t>
+            </a:r>
+          </a:p>
+        </p:txBody>
+      </p:sp>
+      <p:sp>
+        <p:nvSpPr>
+          <p:cNvPr id="7" name="Rectangle 6"/>
           <p:cNvSpPr/>
           <p:nvPr/>
         </p:nvSpPr>
         <p:spPr>
           <a:xfrm>
-            <a:off x="914400" y="2194560"/>
-            <a:ext cx="10362895" cy="777240"/>
-          </a:xfrm>
-          <a:prstGeom prst="roundRect">
+            <a:off x="731520" y="2423160"/>
+            <a:ext cx="10728655" cy="749808"/>
+          </a:xfrm>
+          <a:prstGeom prst="rect">
             <a:avLst/>
           </a:prstGeom>
           <a:solidFill>
-            <a:srgbClr val="FDF2F2"/>
+            <a:srgbClr val="FFFFFF"/>
           </a:solidFill>
-          <a:ln w="15240">
+          <a:ln w="12700">
             <a:solidFill>
-              <a:srgbClr val="B42828"/>
+              <a:srgbClr val="E2E8F0"/>
             </a:solidFill>
           </a:ln>
           <a:effectLst/>
@@ -8221,46 +8839,46 @@
           <a:p>
             <a:pPr algn="ctr"/>
             <a:r>
-              <a:rPr sz="1700" b="1">
-                <a:solidFill>
-                  <a:srgbClr val="B42828"/>
-                </a:solidFill>
-                <a:latin typeface="Calibri"/>
-              </a:rPr>
-              <a:t>No intraday or tick data   </a:t>
-            </a:r>
-            <a:r>
-              <a:rPr sz="1400">
-                <a:solidFill>
-                  <a:srgbClr val="1E293B"/>
-                </a:solidFill>
-                <a:latin typeface="Calibri"/>
-              </a:rPr>
-              <a:t>Daily bars only.</a:t>
-            </a:r>
-          </a:p>
-        </p:txBody>
-      </p:sp>
-      <p:sp>
-        <p:nvSpPr>
-          <p:cNvPr id="7" name="Rounded Rectangle 6"/>
+              <a:rPr sz="1250" b="1">
+                <a:solidFill>
+                  <a:srgbClr val="B91C1C"/>
+                </a:solidFill>
+                <a:latin typeface="Trebuchet MS"/>
+              </a:rPr>
+              <a:t>Daily Equity Bars Only (No Intraday or Tick)  —  </a:t>
+            </a:r>
+            <a:r>
+              <a:rPr sz="1100">
+                <a:solidFill>
+                  <a:srgbClr val="0F172A"/>
+                </a:solidFill>
+                <a:latin typeface="Georgia"/>
+              </a:rPr>
+              <a:t>Designed for swing and positional horizons. High-frequency tick and intraday order book dynamics are explicitly out of academic scope.</a:t>
+            </a:r>
+          </a:p>
+        </p:txBody>
+      </p:sp>
+      <p:sp>
+        <p:nvSpPr>
+          <p:cNvPr id="8" name="Rectangle 7"/>
           <p:cNvSpPr/>
           <p:nvPr/>
         </p:nvSpPr>
         <p:spPr>
           <a:xfrm>
-            <a:off x="914400" y="3063240"/>
-            <a:ext cx="10362895" cy="777240"/>
-          </a:xfrm>
-          <a:prstGeom prst="roundRect">
+            <a:off x="731520" y="3291839"/>
+            <a:ext cx="10728655" cy="749808"/>
+          </a:xfrm>
+          <a:prstGeom prst="rect">
             <a:avLst/>
           </a:prstGeom>
           <a:solidFill>
-            <a:srgbClr val="FDF2F2"/>
+            <a:srgbClr val="FFFFFF"/>
           </a:solidFill>
-          <a:ln w="15240">
+          <a:ln w="12700">
             <a:solidFill>
-              <a:srgbClr val="B42828"/>
+              <a:srgbClr val="E2E8F0"/>
             </a:solidFill>
           </a:ln>
           <a:effectLst/>
@@ -8285,46 +8903,46 @@
           <a:p>
             <a:pPr algn="ctr"/>
             <a:r>
-              <a:rPr sz="1700" b="1">
-                <a:solidFill>
-                  <a:srgbClr val="B42828"/>
-                </a:solidFill>
-                <a:latin typeface="Calibri"/>
-              </a:rPr>
-              <a:t>No derivatives or other asset classes   </a:t>
-            </a:r>
-            <a:r>
-              <a:rPr sz="1400">
-                <a:solidFill>
-                  <a:srgbClr val="1E293B"/>
-                </a:solidFill>
-                <a:latin typeface="Calibri"/>
-              </a:rPr>
-              <a:t>NSE cash equities only.</a:t>
-            </a:r>
-          </a:p>
-        </p:txBody>
-      </p:sp>
-      <p:sp>
-        <p:nvSpPr>
-          <p:cNvPr id="8" name="Rounded Rectangle 7"/>
+              <a:rPr sz="1250" b="1">
+                <a:solidFill>
+                  <a:srgbClr val="B91C1C"/>
+                </a:solidFill>
+                <a:latin typeface="Trebuchet MS"/>
+              </a:rPr>
+              <a:t>NSE Cash Equities Only (No Derivatives or F&amp;O)  —  </a:t>
+            </a:r>
+            <a:r>
+              <a:rPr sz="1100">
+                <a:solidFill>
+                  <a:srgbClr val="0F172A"/>
+                </a:solidFill>
+                <a:latin typeface="Georgia"/>
+              </a:rPr>
+              <a:t>Statutory models strictly simulate NSE cash delivery. Options, futures, and currency segments carry different tax regimes and are omitted.</a:t>
+            </a:r>
+          </a:p>
+        </p:txBody>
+      </p:sp>
+      <p:sp>
+        <p:nvSpPr>
+          <p:cNvPr id="9" name="Rectangle 8"/>
           <p:cNvSpPr/>
           <p:nvPr/>
         </p:nvSpPr>
         <p:spPr>
           <a:xfrm>
-            <a:off x="914400" y="3931920"/>
-            <a:ext cx="10362895" cy="777240"/>
-          </a:xfrm>
-          <a:prstGeom prst="roundRect">
+            <a:off x="731520" y="4160520"/>
+            <a:ext cx="10728655" cy="749808"/>
+          </a:xfrm>
+          <a:prstGeom prst="rect">
             <a:avLst/>
           </a:prstGeom>
           <a:solidFill>
-            <a:srgbClr val="FDF2F2"/>
+            <a:srgbClr val="FFFFFF"/>
           </a:solidFill>
-          <a:ln w="15240">
+          <a:ln w="12700">
             <a:solidFill>
-              <a:srgbClr val="B42828"/>
+              <a:srgbClr val="E2E8F0"/>
             </a:solidFill>
           </a:ln>
           <a:effectLst/>
@@ -8349,46 +8967,46 @@
           <a:p>
             <a:pPr algn="ctr"/>
             <a:r>
-              <a:rPr sz="1700" b="1">
-                <a:solidFill>
-                  <a:srgbClr val="B42828"/>
-                </a:solidFill>
-                <a:latin typeface="Calibri"/>
-              </a:rPr>
-              <a:t>No short selling or leverage   </a:t>
-            </a:r>
-            <a:r>
-              <a:rPr sz="1400">
-                <a:solidFill>
-                  <a:srgbClr val="1E293B"/>
-                </a:solidFill>
-                <a:latin typeface="Calibri"/>
-              </a:rPr>
-              <a:t>Long-only positions.</a:t>
-            </a:r>
-          </a:p>
-        </p:txBody>
-      </p:sp>
-      <p:sp>
-        <p:nvSpPr>
-          <p:cNvPr id="9" name="Rounded Rectangle 8"/>
+              <a:rPr sz="1250" b="1">
+                <a:solidFill>
+                  <a:srgbClr val="B91C1C"/>
+                </a:solidFill>
+                <a:latin typeface="Trebuchet MS"/>
+              </a:rPr>
+              <a:t>Long-Only Cash Delivery (No Shorting or Margin)  —  </a:t>
+            </a:r>
+            <a:r>
+              <a:rPr sz="1100">
+                <a:solidFill>
+                  <a:srgbClr val="0F172A"/>
+                </a:solidFill>
+                <a:latin typeface="Georgia"/>
+              </a:rPr>
+              <a:t>Assumes 100% unleveraged cash delivery. Margin trading facility (MTF) and naked shorting risks are not simulated.</a:t>
+            </a:r>
+          </a:p>
+        </p:txBody>
+      </p:sp>
+      <p:sp>
+        <p:nvSpPr>
+          <p:cNvPr id="10" name="Rectangle 9"/>
           <p:cNvSpPr/>
           <p:nvPr/>
         </p:nvSpPr>
         <p:spPr>
           <a:xfrm>
-            <a:off x="914400" y="4800600"/>
-            <a:ext cx="10362895" cy="777240"/>
-          </a:xfrm>
-          <a:prstGeom prst="roundRect">
+            <a:off x="731520" y="5029200"/>
+            <a:ext cx="10728655" cy="749808"/>
+          </a:xfrm>
+          <a:prstGeom prst="rect">
             <a:avLst/>
           </a:prstGeom>
           <a:solidFill>
-            <a:srgbClr val="FDF2F2"/>
+            <a:srgbClr val="FFFFFF"/>
           </a:solidFill>
-          <a:ln w="15240">
+          <a:ln w="12700">
             <a:solidFill>
-              <a:srgbClr val="B42828"/>
+              <a:srgbClr val="E2E8F0"/>
             </a:solidFill>
           </a:ln>
           <a:effectLst/>
@@ -8413,45 +9031,47 @@
           <a:p>
             <a:pPr algn="ctr"/>
             <a:r>
-              <a:rPr sz="1700" b="1">
-                <a:solidFill>
-                  <a:srgbClr val="B42828"/>
-                </a:solidFill>
-                <a:latin typeface="Calibri"/>
-              </a:rPr>
-              <a:t>Not investment advice   </a:t>
-            </a:r>
-            <a:r>
-              <a:rPr sz="1400">
-                <a:solidFill>
-                  <a:srgbClr val="1E293B"/>
-                </a:solidFill>
-                <a:latin typeface="Calibri"/>
-              </a:rPr>
-              <a:t>A simulation and validation tool.</a:t>
-            </a:r>
-          </a:p>
-        </p:txBody>
-      </p:sp>
-      <p:sp>
-        <p:nvSpPr>
-          <p:cNvPr id="10" name="Rounded Rectangle 9"/>
+              <a:rPr sz="1250" b="1">
+                <a:solidFill>
+                  <a:srgbClr val="B91C1C"/>
+                </a:solidFill>
+                <a:latin typeface="Trebuchet MS"/>
+              </a:rPr>
+              <a:t>Diagnostic Tool, Not Investment Advice  —  </a:t>
+            </a:r>
+            <a:r>
+              <a:rPr sz="1100">
+                <a:solidFill>
+                  <a:srgbClr val="0F172A"/>
+                </a:solidFill>
+                <a:latin typeface="Georgia"/>
+              </a:rPr>
+              <a:t>The platform proves the absence of edge and quantifies overfitting; it makes no promises of forward profitability.</a:t>
+            </a:r>
+          </a:p>
+        </p:txBody>
+      </p:sp>
+      <p:sp>
+        <p:nvSpPr>
+          <p:cNvPr id="11" name="Rectangle 10"/>
           <p:cNvSpPr/>
           <p:nvPr/>
         </p:nvSpPr>
         <p:spPr>
           <a:xfrm>
-            <a:off x="914400" y="5715000"/>
-            <a:ext cx="10362895" cy="777240"/>
-          </a:xfrm>
-          <a:prstGeom prst="roundRect">
+            <a:off x="731520" y="5989320"/>
+            <a:ext cx="10728655" cy="411480"/>
+          </a:xfrm>
+          <a:prstGeom prst="rect">
             <a:avLst/>
           </a:prstGeom>
           <a:solidFill>
-            <a:srgbClr val="003366"/>
+            <a:srgbClr val="F8FAFC"/>
           </a:solidFill>
           <a:ln>
-            <a:noFill/>
+            <a:solidFill>
+              <a:srgbClr val="E2E8F0"/>
+            </a:solidFill>
           </a:ln>
           <a:effectLst/>
         </p:spPr>
@@ -8470,62 +9090,19 @@
           </a:fontRef>
         </p:style>
         <p:txBody>
-          <a:bodyPr rtlCol="0" anchor="ctr" wrap="square"/>
+          <a:bodyPr rtlCol="0" anchor="ctr" lIns="0"/>
           <a:lstStyle/>
           <a:p>
             <a:pPr algn="ctr"/>
             <a:r>
-              <a:rPr sz="1500">
-                <a:solidFill>
-                  <a:srgbClr val="FFFFFF"/>
-                </a:solidFill>
-                <a:latin typeface="Calibri"/>
-              </a:rPr>
-              <a:t>Stating boundaries explicitly is a feature. An evaluator is entitled to them before the demo — not after.</a:t>
-            </a:r>
-          </a:p>
-        </p:txBody>
-      </p:sp>
-      <p:sp>
-        <p:nvSpPr>
-          <p:cNvPr id="11" name="Rectangle 10"/>
-          <p:cNvSpPr/>
-          <p:nvPr/>
-        </p:nvSpPr>
-        <p:spPr>
-          <a:xfrm>
-            <a:off x="0" y="6400800"/>
-            <a:ext cx="12191695" cy="457200"/>
-          </a:xfrm>
-          <a:prstGeom prst="rect">
-            <a:avLst/>
-          </a:prstGeom>
-          <a:solidFill>
-            <a:srgbClr val="003366"/>
-          </a:solidFill>
-          <a:ln>
-            <a:noFill/>
-          </a:ln>
-        </p:spPr>
-        <p:style>
-          <a:lnRef idx="1">
-            <a:schemeClr val="accent1"/>
-          </a:lnRef>
-          <a:fillRef idx="3">
-            <a:schemeClr val="accent1"/>
-          </a:fillRef>
-          <a:effectRef idx="2">
-            <a:schemeClr val="accent1"/>
-          </a:effectRef>
-          <a:fontRef idx="minor">
-            <a:schemeClr val="lt1"/>
-          </a:fontRef>
-        </p:style>
-        <p:txBody>
-          <a:bodyPr rtlCol="0" anchor="ctr"/>
-          <a:lstStyle/>
-          <a:p>
-            <a:pPr algn="ctr"/>
+              <a:rPr sz="950">
+                <a:solidFill>
+                  <a:srgbClr val="64748B"/>
+                </a:solidFill>
+                <a:latin typeface="Consolas"/>
+              </a:rPr>
+              <a:t>Examiner Note: Stating boundaries in the viva is an academic strength. An honest tool defines its operating perimeter.</a:t>
+            </a:r>
           </a:p>
         </p:txBody>
       </p:sp>
@@ -8537,8 +9114,8 @@
         </p:nvSpPr>
         <p:spPr>
           <a:xfrm>
-            <a:off x="365760" y="6455664"/>
-            <a:ext cx="10058400" cy="365760"/>
+            <a:off x="731520" y="6446520"/>
+            <a:ext cx="10728655" cy="274320"/>
           </a:xfrm>
           <a:prstGeom prst="rect">
             <a:avLst/>
@@ -8546,20 +9123,19 @@
           <a:noFill/>
         </p:spPr>
         <p:txBody>
-          <a:bodyPr wrap="square" anchor="ctr">
+          <a:bodyPr wrap="none" lIns="0" tIns="0" rIns="0" bIns="0">
             <a:spAutoFit/>
           </a:bodyPr>
           <a:lstStyle/>
           <a:p>
-            <a:pPr algn="l"/>
-            <a:r>
-              <a:rPr sz="1000" b="0" i="0">
-                <a:solidFill>
-                  <a:srgbClr val="FFFFFF"/>
-                </a:solidFill>
-                <a:latin typeface="Calibri"/>
-              </a:rPr>
-              <a:t>GTU DI05000341 · Pramaan</a:t>
+            <a:r>
+              <a:rPr sz="900">
+                <a:solidFill>
+                  <a:srgbClr val="64748B"/>
+                </a:solidFill>
+                <a:latin typeface="Consolas"/>
+              </a:rPr>
+              <a:t>GTU DI05000341 Minor Project | Pramaan Architecture &amp; Verification</a:t>
             </a:r>
           </a:p>
         </p:txBody>
